--- a/output/wordlabs-way-3day.pptx
+++ b/output/wordlabs-way-3day.pptx
@@ -4240,7 +4240,7 @@
                 <a:ea typeface="Calibri" pitchFamily="34" charset="-122"/>
                 <a:cs typeface="Calibri" pitchFamily="34" charset="-120"/>
               </a:rPr>
-              <a:t>"path, road, or direction"</a:t>
+              <a:t>"a path, direction or method"</a:t>
             </a:r>
             <a:endParaRPr lang="en-US" sz="2200" dirty="0"/>
           </a:p>
@@ -4279,7 +4279,7 @@
                 <a:ea typeface="Calibri" pitchFamily="34" charset="-122"/>
                 <a:cs typeface="Calibri" pitchFamily="34" charset="-120"/>
               </a:rPr>
-              <a:t>Origin: Old English: weg</a:t>
+              <a:t>Origin: Core English root</a:t>
             </a:r>
             <a:endParaRPr lang="en-US" sz="1300" dirty="0"/>
           </a:p>
@@ -5288,7 +5288,7 @@
                 <a:ea typeface="Calibri" pitchFamily="34" charset="-122"/>
                 <a:cs typeface="Calibri" pitchFamily="34" charset="-120"/>
               </a:rPr>
-              <a:t>Word Labs  •  wordlabs.app  •  Root: 'way' = path, road, or direction</a:t>
+              <a:t>Word Labs  •  wordlabs.app  •  Root: 'way' = a path, direction or method</a:t>
             </a:r>
             <a:endParaRPr lang="en-US" sz="800" dirty="0"/>
           </a:p>
@@ -5928,7 +5928,7 @@
                 <a:ea typeface="Calibri" pitchFamily="34" charset="-122"/>
                 <a:cs typeface="Calibri" pitchFamily="34" charset="-120"/>
               </a:rPr>
-              <a:t>Word Labs  •  wordlabs.app  •  Root: 'way' = path, road, or direction</a:t>
+              <a:t>Word Labs  •  wordlabs.app  •  Root: 'way' = a path, direction or method</a:t>
             </a:r>
             <a:endParaRPr lang="en-US" sz="800" dirty="0"/>
           </a:p>
@@ -6040,7 +6040,7 @@
                 <a:ea typeface="Calibri" pitchFamily="34" charset="-122"/>
                 <a:cs typeface="Calibri" pitchFamily="34" charset="-120"/>
               </a:rPr>
-              <a:t>The children ran through the </a:t>
+              <a:t>There are many </a:t>
             </a:r>
             <a:pPr algn="l" indent="0" marL="0">
               <a:buNone/>
@@ -6057,7 +6057,7 @@
                 <a:ea typeface="Calibri" pitchFamily="34" charset="-122"/>
                 <a:cs typeface="Calibri" pitchFamily="34" charset="-120"/>
               </a:rPr>
-              <a:t>gateway</a:t>
+              <a:t>ways</a:t>
             </a:r>
             <a:pPr algn="l" indent="0" marL="0">
               <a:buNone/>
@@ -6071,7 +6071,7 @@
                 <a:ea typeface="Calibri" pitchFamily="34" charset="-122"/>
                 <a:cs typeface="Calibri" pitchFamily="34" charset="-120"/>
               </a:rPr>
-              <a:t> and followed the winding </a:t>
+              <a:t> to solve this problem. We stopped for a rest </a:t>
             </a:r>
             <a:pPr algn="l" indent="0" marL="0">
               <a:buNone/>
@@ -6088,7 +6088,7 @@
                 <a:ea typeface="Calibri" pitchFamily="34" charset="-122"/>
                 <a:cs typeface="Calibri" pitchFamily="34" charset="-120"/>
               </a:rPr>
-              <a:t>pathway</a:t>
+              <a:t>midway</a:t>
             </a:r>
             <a:pPr algn="l" indent="0" marL="0">
               <a:buNone/>
@@ -6102,7 +6102,7 @@
                 <a:ea typeface="Calibri" pitchFamily="34" charset="-122"/>
                 <a:cs typeface="Calibri" pitchFamily="34" charset="-120"/>
               </a:rPr>
-              <a:t> into the garden.</a:t>
+              <a:t> through the hike.</a:t>
             </a:r>
             <a:endParaRPr lang="en-US" sz="1800" dirty="0"/>
           </a:p>
@@ -6257,7 +6257,7 @@
                 <a:ea typeface="Trebuchet MS" pitchFamily="34" charset="-122"/>
                 <a:cs typeface="Trebuchet MS" pitchFamily="34" charset="-120"/>
               </a:rPr>
-              <a:t>gateway</a:t>
+              <a:t>ways</a:t>
             </a:r>
             <a:endParaRPr lang="en-US" sz="1400" dirty="0"/>
           </a:p>
@@ -6385,7 +6385,7 @@
                 <a:ea typeface="Trebuchet MS" pitchFamily="34" charset="-122"/>
                 <a:cs typeface="Trebuchet MS" pitchFamily="34" charset="-120"/>
               </a:rPr>
-              <a:t>pathway</a:t>
+              <a:t>midway</a:t>
             </a:r>
             <a:endParaRPr lang="en-US" sz="1400" dirty="0"/>
           </a:p>
@@ -6716,7 +6716,7 @@
                 <a:ea typeface="Calibri" pitchFamily="34" charset="-122"/>
                 <a:cs typeface="Calibri" pitchFamily="34" charset="-120"/>
               </a:rPr>
-              <a:t>Word Labs  •  wordlabs.app  •  Root: 'way' = path, road, or direction</a:t>
+              <a:t>Word Labs  •  wordlabs.app  •  Root: 'way' = a path, direction or method</a:t>
             </a:r>
             <a:endParaRPr lang="en-US" sz="800" dirty="0"/>
           </a:p>
@@ -6855,7 +6855,7 @@
                 <a:ea typeface="Trebuchet MS" pitchFamily="34" charset="-122"/>
                 <a:cs typeface="Trebuchet MS" pitchFamily="34" charset="-120"/>
               </a:rPr>
-              <a:t>gateway</a:t>
+              <a:t>ways</a:t>
             </a:r>
             <a:endParaRPr lang="en-US" sz="2800" dirty="0"/>
           </a:p>
@@ -7543,7 +7543,7 @@
                 <a:ea typeface="Calibri" pitchFamily="34" charset="-122"/>
                 <a:cs typeface="Calibri" pitchFamily="34" charset="-120"/>
               </a:rPr>
-              <a:t>Word Labs  •  wordlabs.app  •  Root: 'way' = path, road, or direction</a:t>
+              <a:t>Word Labs  •  wordlabs.app  •  Root: 'way' = a path, direction or method</a:t>
             </a:r>
             <a:endParaRPr lang="en-US" sz="800" dirty="0"/>
           </a:p>
@@ -7682,7 +7682,7 @@
                 <a:ea typeface="Trebuchet MS" pitchFamily="34" charset="-122"/>
                 <a:cs typeface="Trebuchet MS" pitchFamily="34" charset="-120"/>
               </a:rPr>
-              <a:t>gateway</a:t>
+              <a:t>ways</a:t>
             </a:r>
             <a:endParaRPr lang="en-US" sz="2800" dirty="0"/>
           </a:p>
@@ -7771,11 +7771,11 @@
             </a:avLst>
           </a:prstGeom>
           <a:solidFill>
-            <a:srgbClr val="DDD6FE"/>
+            <a:srgbClr val="CCFBF1"/>
           </a:solidFill>
           <a:ln w="19050">
             <a:solidFill>
-              <a:srgbClr val="7C3AED"/>
+              <a:srgbClr val="0D9488"/>
             </a:solidFill>
             <a:prstDash val="solid"/>
           </a:ln>
@@ -7815,13 +7815,13 @@
             <a:r>
               <a:rPr lang="en-US" sz="1300" b="1" dirty="0">
                 <a:solidFill>
-                  <a:srgbClr val="4C1D95"/>
+                  <a:srgbClr val="0F766E"/>
                 </a:solidFill>
                 <a:latin typeface="Trebuchet MS" pitchFamily="34" charset="0"/>
                 <a:ea typeface="Trebuchet MS" pitchFamily="34" charset="-122"/>
                 <a:cs typeface="Trebuchet MS" pitchFamily="34" charset="-120"/>
               </a:rPr>
-              <a:t>gate</a:t>
+              <a:t>way</a:t>
             </a:r>
             <a:endParaRPr lang="en-US" sz="1300" dirty="0"/>
           </a:p>
@@ -7860,7 +7860,7 @@
                 <a:ea typeface="Calibri" pitchFamily="34" charset="-122"/>
                 <a:cs typeface="Calibri" pitchFamily="34" charset="-120"/>
               </a:rPr>
-              <a:t>an opening or entrance</a:t>
+              <a:t>a path, direction or method</a:t>
             </a:r>
             <a:endParaRPr lang="en-US" sz="850" dirty="0"/>
           </a:p>
@@ -7883,11 +7883,11 @@
             </a:avLst>
           </a:prstGeom>
           <a:solidFill>
-            <a:srgbClr val="CCFBF1"/>
+            <a:srgbClr val="FCE7F3"/>
           </a:solidFill>
           <a:ln w="19050">
             <a:solidFill>
-              <a:srgbClr val="0D9488"/>
+              <a:srgbClr val="DB2777"/>
             </a:solidFill>
             <a:prstDash val="solid"/>
           </a:ln>
@@ -7927,13 +7927,13 @@
             <a:r>
               <a:rPr lang="en-US" sz="1300" b="1" dirty="0">
                 <a:solidFill>
-                  <a:srgbClr val="0F766E"/>
+                  <a:srgbClr val="9D174D"/>
                 </a:solidFill>
                 <a:latin typeface="Trebuchet MS" pitchFamily="34" charset="0"/>
                 <a:ea typeface="Trebuchet MS" pitchFamily="34" charset="-122"/>
                 <a:cs typeface="Trebuchet MS" pitchFamily="34" charset="-120"/>
               </a:rPr>
-              <a:t>way</a:t>
+              <a:t>s</a:t>
             </a:r>
             <a:endParaRPr lang="en-US" sz="1300" dirty="0"/>
           </a:p>
@@ -7972,7 +7972,7 @@
                 <a:ea typeface="Calibri" pitchFamily="34" charset="-122"/>
                 <a:cs typeface="Calibri" pitchFamily="34" charset="-120"/>
               </a:rPr>
-              <a:t>path or route</a:t>
+              <a:t>plural or present tense</a:t>
             </a:r>
             <a:endParaRPr lang="en-US" sz="850" dirty="0"/>
           </a:p>
@@ -8528,7 +8528,7 @@
                 <a:ea typeface="Calibri" pitchFamily="34" charset="-122"/>
                 <a:cs typeface="Calibri" pitchFamily="34" charset="-120"/>
               </a:rPr>
-              <a:t>Word Labs  •  wordlabs.app  •  Root: 'way' = path, road, or direction</a:t>
+              <a:t>Word Labs  •  wordlabs.app  •  Root: 'way' = a path, direction or method</a:t>
             </a:r>
             <a:endParaRPr lang="en-US" sz="800" dirty="0"/>
           </a:p>
@@ -8667,7 +8667,7 @@
                 <a:ea typeface="Trebuchet MS" pitchFamily="34" charset="-122"/>
                 <a:cs typeface="Trebuchet MS" pitchFamily="34" charset="-120"/>
               </a:rPr>
-              <a:t>gateway</a:t>
+              <a:t>ways</a:t>
             </a:r>
             <a:endParaRPr lang="en-US" sz="2800" dirty="0"/>
           </a:p>
@@ -8756,11 +8756,11 @@
             </a:avLst>
           </a:prstGeom>
           <a:solidFill>
-            <a:srgbClr val="DDD6FE"/>
+            <a:srgbClr val="CCFBF1"/>
           </a:solidFill>
           <a:ln w="19050">
             <a:solidFill>
-              <a:srgbClr val="7C3AED"/>
+              <a:srgbClr val="0D9488"/>
             </a:solidFill>
             <a:prstDash val="solid"/>
           </a:ln>
@@ -8800,13 +8800,13 @@
             <a:r>
               <a:rPr lang="en-US" sz="1300" b="1" dirty="0">
                 <a:solidFill>
-                  <a:srgbClr val="4C1D95"/>
+                  <a:srgbClr val="0F766E"/>
                 </a:solidFill>
                 <a:latin typeface="Trebuchet MS" pitchFamily="34" charset="0"/>
                 <a:ea typeface="Trebuchet MS" pitchFamily="34" charset="-122"/>
                 <a:cs typeface="Trebuchet MS" pitchFamily="34" charset="-120"/>
               </a:rPr>
-              <a:t>gate</a:t>
+              <a:t>way</a:t>
             </a:r>
             <a:endParaRPr lang="en-US" sz="1300" dirty="0"/>
           </a:p>
@@ -8845,7 +8845,7 @@
                 <a:ea typeface="Calibri" pitchFamily="34" charset="-122"/>
                 <a:cs typeface="Calibri" pitchFamily="34" charset="-120"/>
               </a:rPr>
-              <a:t>an opening or entrance</a:t>
+              <a:t>a path, direction or method</a:t>
             </a:r>
             <a:endParaRPr lang="en-US" sz="850" dirty="0"/>
           </a:p>
@@ -8868,11 +8868,11 @@
             </a:avLst>
           </a:prstGeom>
           <a:solidFill>
-            <a:srgbClr val="CCFBF1"/>
+            <a:srgbClr val="FCE7F3"/>
           </a:solidFill>
           <a:ln w="19050">
             <a:solidFill>
-              <a:srgbClr val="0D9488"/>
+              <a:srgbClr val="DB2777"/>
             </a:solidFill>
             <a:prstDash val="solid"/>
           </a:ln>
@@ -8912,13 +8912,13 @@
             <a:r>
               <a:rPr lang="en-US" sz="1300" b="1" dirty="0">
                 <a:solidFill>
-                  <a:srgbClr val="0F766E"/>
+                  <a:srgbClr val="9D174D"/>
                 </a:solidFill>
                 <a:latin typeface="Trebuchet MS" pitchFamily="34" charset="0"/>
                 <a:ea typeface="Trebuchet MS" pitchFamily="34" charset="-122"/>
                 <a:cs typeface="Trebuchet MS" pitchFamily="34" charset="-120"/>
               </a:rPr>
-              <a:t>way</a:t>
+              <a:t>s</a:t>
             </a:r>
             <a:endParaRPr lang="en-US" sz="1300" dirty="0"/>
           </a:p>
@@ -8957,7 +8957,7 @@
                 <a:ea typeface="Calibri" pitchFamily="34" charset="-122"/>
                 <a:cs typeface="Calibri" pitchFamily="34" charset="-120"/>
               </a:rPr>
-              <a:t>path or route</a:t>
+              <a:t>plural or present tense</a:t>
             </a:r>
             <a:endParaRPr lang="en-US" sz="850" dirty="0"/>
           </a:p>
@@ -9064,7 +9064,7 @@
         </p:nvSpPr>
         <p:spPr>
           <a:xfrm>
-            <a:off x="2999232" y="3364992"/>
+            <a:off x="4370832" y="3364992"/>
             <a:ext cx="1645920" cy="475488"/>
           </a:xfrm>
           <a:prstGeom prst="rect">
@@ -9091,7 +9091,7 @@
         </p:nvSpPr>
         <p:spPr>
           <a:xfrm>
-            <a:off x="2999232" y="3364992"/>
+            <a:off x="4370832" y="3364992"/>
             <a:ext cx="1645920" cy="475488"/>
           </a:xfrm>
           <a:prstGeom prst="rect">
@@ -9116,7 +9116,7 @@
                 <a:ea typeface="Trebuchet MS" pitchFamily="34" charset="-122"/>
                 <a:cs typeface="Trebuchet MS" pitchFamily="34" charset="-120"/>
               </a:rPr>
-              <a:t>gate</a:t>
+              <a:t>ways</a:t>
             </a:r>
             <a:endParaRPr lang="en-US" sz="1400" dirty="0"/>
           </a:p>
@@ -9124,14 +9124,41 @@
       </p:sp>
       <p:sp>
         <p:nvSpPr>
-          <p:cNvPr id="27" name="Text 25"/>
-          <p:cNvSpPr/>
-          <p:nvPr/>
-        </p:nvSpPr>
-        <p:spPr>
-          <a:xfrm>
-            <a:off x="4645152" y="3364992"/>
-            <a:ext cx="1097280" cy="475488"/>
+          <p:cNvPr id="27" name="Shape 25"/>
+          <p:cNvSpPr/>
+          <p:nvPr/>
+        </p:nvSpPr>
+        <p:spPr>
+          <a:xfrm>
+            <a:off x="365760" y="4096512"/>
+            <a:ext cx="1371600" cy="804672"/>
+          </a:xfrm>
+          <a:prstGeom prst="rect">
+            <a:avLst>
+              <a:gd name="adj" fmla="val 6818"/>
+            </a:avLst>
+          </a:prstGeom>
+          <a:solidFill>
+            <a:srgbClr val="E2E8F0"/>
+          </a:solidFill>
+          <a:ln w="12700">
+            <a:solidFill>
+              <a:srgbClr val="E2E8F0"/>
+            </a:solidFill>
+            <a:prstDash val="solid"/>
+          </a:ln>
+        </p:spPr>
+      </p:sp>
+      <p:sp>
+        <p:nvSpPr>
+          <p:cNvPr id="28" name="Text 26"/>
+          <p:cNvSpPr/>
+          <p:nvPr/>
+        </p:nvSpPr>
+        <p:spPr>
+          <a:xfrm>
+            <a:off x="365760" y="4096512"/>
+            <a:ext cx="1371600" cy="804672"/>
           </a:xfrm>
           <a:prstGeom prst="rect">
             <a:avLst/>
@@ -9147,96 +9174,30 @@
               <a:buNone/>
             </a:pPr>
             <a:r>
-              <a:rPr lang="en-US" sz="1600" b="1" dirty="0">
-                <a:solidFill>
-                  <a:srgbClr val="0D9488"/>
+              <a:rPr lang="en-US" sz="1100" b="1" dirty="0">
+                <a:solidFill>
+                  <a:srgbClr val="475569"/>
                 </a:solidFill>
                 <a:latin typeface="Trebuchet MS" pitchFamily="34" charset="0"/>
                 <a:ea typeface="Trebuchet MS" pitchFamily="34" charset="-122"/>
                 <a:cs typeface="Trebuchet MS" pitchFamily="34" charset="-120"/>
               </a:rPr>
-              <a:t>·</a:t>
-            </a:r>
-            <a:endParaRPr lang="en-US" sz="1600" dirty="0"/>
-          </a:p>
-        </p:txBody>
-      </p:sp>
-      <p:sp>
-        <p:nvSpPr>
-          <p:cNvPr id="28" name="Shape 26"/>
-          <p:cNvSpPr/>
-          <p:nvPr/>
-        </p:nvSpPr>
-        <p:spPr>
-          <a:xfrm>
-            <a:off x="5742432" y="3364992"/>
-            <a:ext cx="1645920" cy="475488"/>
-          </a:xfrm>
-          <a:prstGeom prst="rect">
-            <a:avLst>
-              <a:gd name="adj" fmla="val 9615"/>
-            </a:avLst>
-          </a:prstGeom>
-          <a:solidFill>
-            <a:srgbClr val="FFFFFF"/>
-          </a:solidFill>
-          <a:ln w="12700">
-            <a:solidFill>
-              <a:srgbClr val="0D9488"/>
-            </a:solidFill>
-            <a:prstDash val="solid"/>
-          </a:ln>
-        </p:spPr>
-      </p:sp>
-      <p:sp>
-        <p:nvSpPr>
-          <p:cNvPr id="29" name="Text 27"/>
-          <p:cNvSpPr/>
-          <p:nvPr/>
-        </p:nvSpPr>
-        <p:spPr>
-          <a:xfrm>
-            <a:off x="5742432" y="3364992"/>
-            <a:ext cx="1645920" cy="475488"/>
-          </a:xfrm>
-          <a:prstGeom prst="rect">
-            <a:avLst/>
-          </a:prstGeom>
-          <a:noFill/>
-          <a:ln/>
-        </p:spPr>
-        <p:txBody>
-          <a:bodyPr wrap="square" lIns="0" tIns="0" rIns="0" bIns="0" rtlCol="0" anchor="ctr"/>
-          <a:lstStyle/>
-          <a:p>
-            <a:pPr algn="ctr" indent="0" marL="0">
-              <a:buNone/>
-            </a:pPr>
-            <a:r>
-              <a:rPr lang="en-US" sz="1400" b="1" dirty="0">
-                <a:solidFill>
-                  <a:srgbClr val="0D9488"/>
-                </a:solidFill>
-                <a:latin typeface="Trebuchet MS" pitchFamily="34" charset="0"/>
-                <a:ea typeface="Trebuchet MS" pitchFamily="34" charset="-122"/>
-                <a:cs typeface="Trebuchet MS" pitchFamily="34" charset="-120"/>
-              </a:rPr>
-              <a:t>way</a:t>
-            </a:r>
-            <a:endParaRPr lang="en-US" sz="1400" dirty="0"/>
-          </a:p>
-        </p:txBody>
-      </p:sp>
-      <p:sp>
-        <p:nvSpPr>
-          <p:cNvPr id="30" name="Shape 28"/>
-          <p:cNvSpPr/>
-          <p:nvPr/>
-        </p:nvSpPr>
-        <p:spPr>
-          <a:xfrm>
-            <a:off x="365760" y="4096512"/>
-            <a:ext cx="1371600" cy="804672"/>
+              <a:t>Phonemes</a:t>
+            </a:r>
+            <a:endParaRPr lang="en-US" sz="1100" dirty="0"/>
+          </a:p>
+        </p:txBody>
+      </p:sp>
+      <p:sp>
+        <p:nvSpPr>
+          <p:cNvPr id="29" name="Shape 27"/>
+          <p:cNvSpPr/>
+          <p:nvPr/>
+        </p:nvSpPr>
+        <p:spPr>
+          <a:xfrm>
+            <a:off x="1874520" y="4096512"/>
+            <a:ext cx="6903720" cy="804672"/>
           </a:xfrm>
           <a:prstGeom prst="rect">
             <a:avLst>
@@ -9244,85 +9205,19 @@
             </a:avLst>
           </a:prstGeom>
           <a:solidFill>
-            <a:srgbClr val="E2E8F0"/>
+            <a:srgbClr val="F8FAFC"/>
           </a:solidFill>
           <a:ln w="12700">
             <a:solidFill>
               <a:srgbClr val="E2E8F0"/>
             </a:solidFill>
-            <a:prstDash val="solid"/>
-          </a:ln>
-        </p:spPr>
-      </p:sp>
-      <p:sp>
-        <p:nvSpPr>
-          <p:cNvPr id="31" name="Text 29"/>
-          <p:cNvSpPr/>
-          <p:nvPr/>
-        </p:nvSpPr>
-        <p:spPr>
-          <a:xfrm>
-            <a:off x="365760" y="4096512"/>
-            <a:ext cx="1371600" cy="804672"/>
-          </a:xfrm>
-          <a:prstGeom prst="rect">
-            <a:avLst/>
-          </a:prstGeom>
-          <a:noFill/>
-          <a:ln/>
-        </p:spPr>
-        <p:txBody>
-          <a:bodyPr wrap="square" lIns="0" tIns="0" rIns="0" bIns="0" rtlCol="0" anchor="ctr"/>
-          <a:lstStyle/>
-          <a:p>
-            <a:pPr algn="ctr" indent="0" marL="0">
-              <a:buNone/>
-            </a:pPr>
-            <a:r>
-              <a:rPr lang="en-US" sz="1100" b="1" dirty="0">
-                <a:solidFill>
-                  <a:srgbClr val="475569"/>
-                </a:solidFill>
-                <a:latin typeface="Trebuchet MS" pitchFamily="34" charset="0"/>
-                <a:ea typeface="Trebuchet MS" pitchFamily="34" charset="-122"/>
-                <a:cs typeface="Trebuchet MS" pitchFamily="34" charset="-120"/>
-              </a:rPr>
-              <a:t>Phonemes</a:t>
-            </a:r>
-            <a:endParaRPr lang="en-US" sz="1100" dirty="0"/>
-          </a:p>
-        </p:txBody>
-      </p:sp>
-      <p:sp>
-        <p:nvSpPr>
-          <p:cNvPr id="32" name="Shape 30"/>
-          <p:cNvSpPr/>
-          <p:nvPr/>
-        </p:nvSpPr>
-        <p:spPr>
-          <a:xfrm>
-            <a:off x="1874520" y="4096512"/>
-            <a:ext cx="6903720" cy="804672"/>
-          </a:xfrm>
-          <a:prstGeom prst="rect">
-            <a:avLst>
-              <a:gd name="adj" fmla="val 6818"/>
-            </a:avLst>
-          </a:prstGeom>
-          <a:solidFill>
-            <a:srgbClr val="F8FAFC"/>
-          </a:solidFill>
-          <a:ln w="12700">
-            <a:solidFill>
-              <a:srgbClr val="E2E8F0"/>
-            </a:solidFill>
             <a:prstDash val="dash"/>
           </a:ln>
         </p:spPr>
       </p:sp>
       <p:sp>
         <p:nvSpPr>
-          <p:cNvPr id="33" name="Text 31"/>
+          <p:cNvPr id="30" name="Text 28"/>
           <p:cNvSpPr/>
           <p:nvPr/>
         </p:nvSpPr>
@@ -9645,7 +9540,7 @@
                 <a:ea typeface="Calibri" pitchFamily="34" charset="-122"/>
                 <a:cs typeface="Calibri" pitchFamily="34" charset="-120"/>
               </a:rPr>
-              <a:t>Word Labs  •  wordlabs.app  •  Root: 'way' = path, road, or direction</a:t>
+              <a:t>Word Labs  •  wordlabs.app  •  Root: 'way' = a path, direction or method</a:t>
             </a:r>
             <a:endParaRPr lang="en-US" sz="800" dirty="0"/>
           </a:p>
@@ -9784,7 +9679,7 @@
                 <a:ea typeface="Trebuchet MS" pitchFamily="34" charset="-122"/>
                 <a:cs typeface="Trebuchet MS" pitchFamily="34" charset="-120"/>
               </a:rPr>
-              <a:t>gateway</a:t>
+              <a:t>ways</a:t>
             </a:r>
             <a:endParaRPr lang="en-US" sz="2800" dirty="0"/>
           </a:p>
@@ -9873,11 +9768,11 @@
             </a:avLst>
           </a:prstGeom>
           <a:solidFill>
-            <a:srgbClr val="DDD6FE"/>
+            <a:srgbClr val="CCFBF1"/>
           </a:solidFill>
           <a:ln w="19050">
             <a:solidFill>
-              <a:srgbClr val="7C3AED"/>
+              <a:srgbClr val="0D9488"/>
             </a:solidFill>
             <a:prstDash val="solid"/>
           </a:ln>
@@ -9917,13 +9812,13 @@
             <a:r>
               <a:rPr lang="en-US" sz="1300" b="1" dirty="0">
                 <a:solidFill>
-                  <a:srgbClr val="4C1D95"/>
+                  <a:srgbClr val="0F766E"/>
                 </a:solidFill>
                 <a:latin typeface="Trebuchet MS" pitchFamily="34" charset="0"/>
                 <a:ea typeface="Trebuchet MS" pitchFamily="34" charset="-122"/>
                 <a:cs typeface="Trebuchet MS" pitchFamily="34" charset="-120"/>
               </a:rPr>
-              <a:t>gate</a:t>
+              <a:t>way</a:t>
             </a:r>
             <a:endParaRPr lang="en-US" sz="1300" dirty="0"/>
           </a:p>
@@ -9962,7 +9857,7 @@
                 <a:ea typeface="Calibri" pitchFamily="34" charset="-122"/>
                 <a:cs typeface="Calibri" pitchFamily="34" charset="-120"/>
               </a:rPr>
-              <a:t>an opening or entrance</a:t>
+              <a:t>a path, direction or method</a:t>
             </a:r>
             <a:endParaRPr lang="en-US" sz="850" dirty="0"/>
           </a:p>
@@ -9985,11 +9880,11 @@
             </a:avLst>
           </a:prstGeom>
           <a:solidFill>
-            <a:srgbClr val="CCFBF1"/>
+            <a:srgbClr val="FCE7F3"/>
           </a:solidFill>
           <a:ln w="19050">
             <a:solidFill>
-              <a:srgbClr val="0D9488"/>
+              <a:srgbClr val="DB2777"/>
             </a:solidFill>
             <a:prstDash val="solid"/>
           </a:ln>
@@ -10029,13 +9924,13 @@
             <a:r>
               <a:rPr lang="en-US" sz="1300" b="1" dirty="0">
                 <a:solidFill>
-                  <a:srgbClr val="0F766E"/>
+                  <a:srgbClr val="9D174D"/>
                 </a:solidFill>
                 <a:latin typeface="Trebuchet MS" pitchFamily="34" charset="0"/>
                 <a:ea typeface="Trebuchet MS" pitchFamily="34" charset="-122"/>
                 <a:cs typeface="Trebuchet MS" pitchFamily="34" charset="-120"/>
               </a:rPr>
-              <a:t>way</a:t>
+              <a:t>s</a:t>
             </a:r>
             <a:endParaRPr lang="en-US" sz="1300" dirty="0"/>
           </a:p>
@@ -10074,7 +9969,7 @@
                 <a:ea typeface="Calibri" pitchFamily="34" charset="-122"/>
                 <a:cs typeface="Calibri" pitchFamily="34" charset="-120"/>
               </a:rPr>
-              <a:t>path or route</a:t>
+              <a:t>plural or present tense</a:t>
             </a:r>
             <a:endParaRPr lang="en-US" sz="850" dirty="0"/>
           </a:p>
@@ -10181,7 +10076,7 @@
         </p:nvSpPr>
         <p:spPr>
           <a:xfrm>
-            <a:off x="2999232" y="3364992"/>
+            <a:off x="4370832" y="3364992"/>
             <a:ext cx="1645920" cy="475488"/>
           </a:xfrm>
           <a:prstGeom prst="rect">
@@ -10208,7 +10103,7 @@
         </p:nvSpPr>
         <p:spPr>
           <a:xfrm>
-            <a:off x="2999232" y="3364992"/>
+            <a:off x="4370832" y="3364992"/>
             <a:ext cx="1645920" cy="475488"/>
           </a:xfrm>
           <a:prstGeom prst="rect">
@@ -10233,7 +10128,7 @@
                 <a:ea typeface="Trebuchet MS" pitchFamily="34" charset="-122"/>
                 <a:cs typeface="Trebuchet MS" pitchFamily="34" charset="-120"/>
               </a:rPr>
-              <a:t>gate</a:t>
+              <a:t>ways</a:t>
             </a:r>
             <a:endParaRPr lang="en-US" sz="1400" dirty="0"/>
           </a:p>
@@ -10241,14 +10136,41 @@
       </p:sp>
       <p:sp>
         <p:nvSpPr>
-          <p:cNvPr id="27" name="Text 25"/>
-          <p:cNvSpPr/>
-          <p:nvPr/>
-        </p:nvSpPr>
-        <p:spPr>
-          <a:xfrm>
-            <a:off x="4645152" y="3364992"/>
-            <a:ext cx="1097280" cy="475488"/>
+          <p:cNvPr id="27" name="Shape 25"/>
+          <p:cNvSpPr/>
+          <p:nvPr/>
+        </p:nvSpPr>
+        <p:spPr>
+          <a:xfrm>
+            <a:off x="365760" y="4096512"/>
+            <a:ext cx="1371600" cy="804672"/>
+          </a:xfrm>
+          <a:prstGeom prst="rect">
+            <a:avLst>
+              <a:gd name="adj" fmla="val 6818"/>
+            </a:avLst>
+          </a:prstGeom>
+          <a:solidFill>
+            <a:srgbClr val="E2E8F0"/>
+          </a:solidFill>
+          <a:ln w="12700">
+            <a:solidFill>
+              <a:srgbClr val="E2E8F0"/>
+            </a:solidFill>
+            <a:prstDash val="solid"/>
+          </a:ln>
+        </p:spPr>
+      </p:sp>
+      <p:sp>
+        <p:nvSpPr>
+          <p:cNvPr id="28" name="Text 26"/>
+          <p:cNvSpPr/>
+          <p:nvPr/>
+        </p:nvSpPr>
+        <p:spPr>
+          <a:xfrm>
+            <a:off x="365760" y="4096512"/>
+            <a:ext cx="1371600" cy="804672"/>
           </a:xfrm>
           <a:prstGeom prst="rect">
             <a:avLst/>
@@ -10264,57 +10186,84 @@
               <a:buNone/>
             </a:pPr>
             <a:r>
-              <a:rPr lang="en-US" sz="1600" b="1" dirty="0">
-                <a:solidFill>
-                  <a:srgbClr val="0D9488"/>
+              <a:rPr lang="en-US" sz="1100" b="1" dirty="0">
+                <a:solidFill>
+                  <a:srgbClr val="475569"/>
                 </a:solidFill>
                 <a:latin typeface="Trebuchet MS" pitchFamily="34" charset="0"/>
                 <a:ea typeface="Trebuchet MS" pitchFamily="34" charset="-122"/>
                 <a:cs typeface="Trebuchet MS" pitchFamily="34" charset="-120"/>
               </a:rPr>
-              <a:t>·</a:t>
-            </a:r>
-            <a:endParaRPr lang="en-US" sz="1600" dirty="0"/>
-          </a:p>
-        </p:txBody>
-      </p:sp>
-      <p:sp>
-        <p:nvSpPr>
-          <p:cNvPr id="28" name="Shape 26"/>
-          <p:cNvSpPr/>
-          <p:nvPr/>
-        </p:nvSpPr>
-        <p:spPr>
-          <a:xfrm>
-            <a:off x="5742432" y="3364992"/>
-            <a:ext cx="1645920" cy="475488"/>
+              <a:t>Phonemes</a:t>
+            </a:r>
+            <a:endParaRPr lang="en-US" sz="1100" dirty="0"/>
+          </a:p>
+        </p:txBody>
+      </p:sp>
+      <p:sp>
+        <p:nvSpPr>
+          <p:cNvPr id="29" name="Shape 27"/>
+          <p:cNvSpPr/>
+          <p:nvPr/>
+        </p:nvSpPr>
+        <p:spPr>
+          <a:xfrm>
+            <a:off x="1874520" y="4096512"/>
+            <a:ext cx="6903720" cy="658368"/>
           </a:xfrm>
           <a:prstGeom prst="rect">
             <a:avLst>
-              <a:gd name="adj" fmla="val 9615"/>
+              <a:gd name="adj" fmla="val 8333"/>
             </a:avLst>
           </a:prstGeom>
           <a:solidFill>
+            <a:srgbClr val="FCE7F3"/>
+          </a:solidFill>
+          <a:ln w="12700">
+            <a:solidFill>
+              <a:srgbClr val="DB2777"/>
+            </a:solidFill>
+            <a:prstDash val="solid"/>
+          </a:ln>
+        </p:spPr>
+      </p:sp>
+      <p:sp>
+        <p:nvSpPr>
+          <p:cNvPr id="30" name="Shape 28"/>
+          <p:cNvSpPr/>
+          <p:nvPr/>
+        </p:nvSpPr>
+        <p:spPr>
+          <a:xfrm>
+            <a:off x="3033522" y="4169664"/>
+            <a:ext cx="685800" cy="475488"/>
+          </a:xfrm>
+          <a:prstGeom prst="rect">
+            <a:avLst>
+              <a:gd name="adj" fmla="val 7692"/>
+            </a:avLst>
+          </a:prstGeom>
+          <a:solidFill>
             <a:srgbClr val="FFFFFF"/>
           </a:solidFill>
           <a:ln w="12700">
             <a:solidFill>
-              <a:srgbClr val="0D9488"/>
-            </a:solidFill>
-            <a:prstDash val="solid"/>
-          </a:ln>
-        </p:spPr>
-      </p:sp>
-      <p:sp>
-        <p:nvSpPr>
-          <p:cNvPr id="29" name="Text 27"/>
-          <p:cNvSpPr/>
-          <p:nvPr/>
-        </p:nvSpPr>
-        <p:spPr>
-          <a:xfrm>
-            <a:off x="5742432" y="3364992"/>
-            <a:ext cx="1645920" cy="475488"/>
+              <a:srgbClr val="DB2777"/>
+            </a:solidFill>
+            <a:prstDash val="solid"/>
+          </a:ln>
+        </p:spPr>
+      </p:sp>
+      <p:sp>
+        <p:nvSpPr>
+          <p:cNvPr id="31" name="Text 29"/>
+          <p:cNvSpPr/>
+          <p:nvPr/>
+        </p:nvSpPr>
+        <p:spPr>
+          <a:xfrm>
+            <a:off x="3033522" y="4169664"/>
+            <a:ext cx="685800" cy="475488"/>
           </a:xfrm>
           <a:prstGeom prst="rect">
             <a:avLst/>
@@ -10330,57 +10279,57 @@
               <a:buNone/>
             </a:pPr>
             <a:r>
-              <a:rPr lang="en-US" sz="1400" b="1" dirty="0">
-                <a:solidFill>
-                  <a:srgbClr val="0D9488"/>
+              <a:rPr lang="en-US" sz="1000" b="1" dirty="0">
+                <a:solidFill>
+                  <a:srgbClr val="9D174D"/>
                 </a:solidFill>
                 <a:latin typeface="Trebuchet MS" pitchFamily="34" charset="0"/>
                 <a:ea typeface="Trebuchet MS" pitchFamily="34" charset="-122"/>
                 <a:cs typeface="Trebuchet MS" pitchFamily="34" charset="-120"/>
               </a:rPr>
-              <a:t>way</a:t>
-            </a:r>
-            <a:endParaRPr lang="en-US" sz="1400" dirty="0"/>
-          </a:p>
-        </p:txBody>
-      </p:sp>
-      <p:sp>
-        <p:nvSpPr>
-          <p:cNvPr id="30" name="Shape 28"/>
-          <p:cNvSpPr/>
-          <p:nvPr/>
-        </p:nvSpPr>
-        <p:spPr>
-          <a:xfrm>
-            <a:off x="365760" y="4096512"/>
-            <a:ext cx="1371600" cy="804672"/>
+              <a:t>w</a:t>
+            </a:r>
+            <a:endParaRPr lang="en-US" sz="1000" dirty="0"/>
+          </a:p>
+        </p:txBody>
+      </p:sp>
+      <p:sp>
+        <p:nvSpPr>
+          <p:cNvPr id="32" name="Shape 30"/>
+          <p:cNvSpPr/>
+          <p:nvPr/>
+        </p:nvSpPr>
+        <p:spPr>
+          <a:xfrm>
+            <a:off x="4850892" y="4169664"/>
+            <a:ext cx="685800" cy="475488"/>
           </a:xfrm>
           <a:prstGeom prst="rect">
             <a:avLst>
-              <a:gd name="adj" fmla="val 6818"/>
+              <a:gd name="adj" fmla="val 7692"/>
             </a:avLst>
           </a:prstGeom>
           <a:solidFill>
-            <a:srgbClr val="E2E8F0"/>
-          </a:solidFill>
-          <a:ln w="12700">
-            <a:solidFill>
-              <a:srgbClr val="E2E8F0"/>
-            </a:solidFill>
-            <a:prstDash val="solid"/>
-          </a:ln>
-        </p:spPr>
-      </p:sp>
-      <p:sp>
-        <p:nvSpPr>
-          <p:cNvPr id="31" name="Text 29"/>
-          <p:cNvSpPr/>
-          <p:nvPr/>
-        </p:nvSpPr>
-        <p:spPr>
-          <a:xfrm>
-            <a:off x="365760" y="4096512"/>
-            <a:ext cx="1371600" cy="804672"/>
+            <a:srgbClr val="FFFFFF"/>
+          </a:solidFill>
+          <a:ln w="12700">
+            <a:solidFill>
+              <a:srgbClr val="DB2777"/>
+            </a:solidFill>
+            <a:prstDash val="solid"/>
+          </a:ln>
+        </p:spPr>
+      </p:sp>
+      <p:sp>
+        <p:nvSpPr>
+          <p:cNvPr id="33" name="Text 31"/>
+          <p:cNvSpPr/>
+          <p:nvPr/>
+        </p:nvSpPr>
+        <p:spPr>
+          <a:xfrm>
+            <a:off x="4850892" y="4169664"/>
+            <a:ext cx="685800" cy="475488"/>
           </a:xfrm>
           <a:prstGeom prst="rect">
             <a:avLst/>
@@ -10396,56 +10345,29 @@
               <a:buNone/>
             </a:pPr>
             <a:r>
-              <a:rPr lang="en-US" sz="1100" b="1" dirty="0">
-                <a:solidFill>
-                  <a:srgbClr val="475569"/>
+              <a:rPr lang="en-US" sz="1000" b="1" dirty="0">
+                <a:solidFill>
+                  <a:srgbClr val="9D174D"/>
                 </a:solidFill>
                 <a:latin typeface="Trebuchet MS" pitchFamily="34" charset="0"/>
                 <a:ea typeface="Trebuchet MS" pitchFamily="34" charset="-122"/>
                 <a:cs typeface="Trebuchet MS" pitchFamily="34" charset="-120"/>
               </a:rPr>
-              <a:t>Phonemes</a:t>
-            </a:r>
-            <a:endParaRPr lang="en-US" sz="1100" dirty="0"/>
-          </a:p>
-        </p:txBody>
-      </p:sp>
-      <p:sp>
-        <p:nvSpPr>
-          <p:cNvPr id="32" name="Shape 30"/>
-          <p:cNvSpPr/>
-          <p:nvPr/>
-        </p:nvSpPr>
-        <p:spPr>
-          <a:xfrm>
-            <a:off x="1874520" y="4096512"/>
-            <a:ext cx="6903720" cy="658368"/>
-          </a:xfrm>
-          <a:prstGeom prst="rect">
-            <a:avLst>
-              <a:gd name="adj" fmla="val 8333"/>
-            </a:avLst>
-          </a:prstGeom>
-          <a:solidFill>
-            <a:srgbClr val="FCE7F3"/>
-          </a:solidFill>
-          <a:ln w="12700">
-            <a:solidFill>
-              <a:srgbClr val="DB2777"/>
-            </a:solidFill>
-            <a:prstDash val="solid"/>
-          </a:ln>
-        </p:spPr>
-      </p:sp>
-      <p:sp>
-        <p:nvSpPr>
-          <p:cNvPr id="33" name="Shape 31"/>
-          <p:cNvSpPr/>
-          <p:nvPr/>
-        </p:nvSpPr>
-        <p:spPr>
-          <a:xfrm>
-            <a:off x="2670048" y="4169664"/>
+              <a:t>ay</a:t>
+            </a:r>
+            <a:endParaRPr lang="en-US" sz="1000" dirty="0"/>
+          </a:p>
+        </p:txBody>
+      </p:sp>
+      <p:sp>
+        <p:nvSpPr>
+          <p:cNvPr id="34" name="Shape 32"/>
+          <p:cNvSpPr/>
+          <p:nvPr/>
+        </p:nvSpPr>
+        <p:spPr>
+          <a:xfrm>
+            <a:off x="6668262" y="4169664"/>
             <a:ext cx="685800" cy="475488"/>
           </a:xfrm>
           <a:prstGeom prst="rect">
@@ -10466,13 +10388,13 @@
       </p:sp>
       <p:sp>
         <p:nvSpPr>
-          <p:cNvPr id="34" name="Text 32"/>
-          <p:cNvSpPr/>
-          <p:nvPr/>
-        </p:nvSpPr>
-        <p:spPr>
-          <a:xfrm>
-            <a:off x="2670048" y="4169664"/>
+          <p:cNvPr id="35" name="Text 33"/>
+          <p:cNvSpPr/>
+          <p:nvPr/>
+        </p:nvSpPr>
+        <p:spPr>
+          <a:xfrm>
+            <a:off x="6668262" y="4169664"/>
             <a:ext cx="685800" cy="475488"/>
           </a:xfrm>
           <a:prstGeom prst="rect">
@@ -10489,7 +10411,7 @@
               <a:buNone/>
             </a:pPr>
             <a:r>
-              <a:rPr lang="en-US" sz="900" b="1" dirty="0">
+              <a:rPr lang="en-US" sz="1000" b="1" dirty="0">
                 <a:solidFill>
                   <a:srgbClr val="9D174D"/>
                 </a:solidFill>
@@ -10497,207 +10419,9 @@
                 <a:ea typeface="Trebuchet MS" pitchFamily="34" charset="-122"/>
                 <a:cs typeface="Trebuchet MS" pitchFamily="34" charset="-120"/>
               </a:rPr>
-              <a:t>g</a:t>
-            </a:r>
-            <a:endParaRPr lang="en-US" sz="900" dirty="0"/>
-          </a:p>
-        </p:txBody>
-      </p:sp>
-      <p:sp>
-        <p:nvSpPr>
-          <p:cNvPr id="35" name="Shape 33"/>
-          <p:cNvSpPr/>
-          <p:nvPr/>
-        </p:nvSpPr>
-        <p:spPr>
-          <a:xfrm>
-            <a:off x="4123944" y="4169664"/>
-            <a:ext cx="685800" cy="475488"/>
-          </a:xfrm>
-          <a:prstGeom prst="rect">
-            <a:avLst>
-              <a:gd name="adj" fmla="val 7692"/>
-            </a:avLst>
-          </a:prstGeom>
-          <a:solidFill>
-            <a:srgbClr val="FFFFFF"/>
-          </a:solidFill>
-          <a:ln w="12700">
-            <a:solidFill>
-              <a:srgbClr val="DB2777"/>
-            </a:solidFill>
-            <a:prstDash val="solid"/>
-          </a:ln>
-        </p:spPr>
-      </p:sp>
-      <p:sp>
-        <p:nvSpPr>
-          <p:cNvPr id="36" name="Text 34"/>
-          <p:cNvSpPr/>
-          <p:nvPr/>
-        </p:nvSpPr>
-        <p:spPr>
-          <a:xfrm>
-            <a:off x="4123944" y="4169664"/>
-            <a:ext cx="685800" cy="475488"/>
-          </a:xfrm>
-          <a:prstGeom prst="rect">
-            <a:avLst/>
-          </a:prstGeom>
-          <a:noFill/>
-          <a:ln/>
-        </p:spPr>
-        <p:txBody>
-          <a:bodyPr wrap="square" lIns="0" tIns="0" rIns="0" bIns="0" rtlCol="0" anchor="ctr"/>
-          <a:lstStyle/>
-          <a:p>
-            <a:pPr algn="ctr" indent="0" marL="0">
-              <a:buNone/>
-            </a:pPr>
-            <a:r>
-              <a:rPr lang="en-US" sz="900" b="1" dirty="0">
-                <a:solidFill>
-                  <a:srgbClr val="9D174D"/>
-                </a:solidFill>
-                <a:latin typeface="Trebuchet MS" pitchFamily="34" charset="0"/>
-                <a:ea typeface="Trebuchet MS" pitchFamily="34" charset="-122"/>
-                <a:cs typeface="Trebuchet MS" pitchFamily="34" charset="-120"/>
-              </a:rPr>
-              <a:t>ate</a:t>
-            </a:r>
-            <a:endParaRPr lang="en-US" sz="900" dirty="0"/>
-          </a:p>
-        </p:txBody>
-      </p:sp>
-      <p:sp>
-        <p:nvSpPr>
-          <p:cNvPr id="37" name="Shape 35"/>
-          <p:cNvSpPr/>
-          <p:nvPr/>
-        </p:nvSpPr>
-        <p:spPr>
-          <a:xfrm>
-            <a:off x="5577840" y="4169664"/>
-            <a:ext cx="685800" cy="475488"/>
-          </a:xfrm>
-          <a:prstGeom prst="rect">
-            <a:avLst>
-              <a:gd name="adj" fmla="val 7692"/>
-            </a:avLst>
-          </a:prstGeom>
-          <a:solidFill>
-            <a:srgbClr val="FFFFFF"/>
-          </a:solidFill>
-          <a:ln w="12700">
-            <a:solidFill>
-              <a:srgbClr val="DB2777"/>
-            </a:solidFill>
-            <a:prstDash val="solid"/>
-          </a:ln>
-        </p:spPr>
-      </p:sp>
-      <p:sp>
-        <p:nvSpPr>
-          <p:cNvPr id="38" name="Text 36"/>
-          <p:cNvSpPr/>
-          <p:nvPr/>
-        </p:nvSpPr>
-        <p:spPr>
-          <a:xfrm>
-            <a:off x="5577840" y="4169664"/>
-            <a:ext cx="685800" cy="475488"/>
-          </a:xfrm>
-          <a:prstGeom prst="rect">
-            <a:avLst/>
-          </a:prstGeom>
-          <a:noFill/>
-          <a:ln/>
-        </p:spPr>
-        <p:txBody>
-          <a:bodyPr wrap="square" lIns="0" tIns="0" rIns="0" bIns="0" rtlCol="0" anchor="ctr"/>
-          <a:lstStyle/>
-          <a:p>
-            <a:pPr algn="ctr" indent="0" marL="0">
-              <a:buNone/>
-            </a:pPr>
-            <a:r>
-              <a:rPr lang="en-US" sz="900" b="1" dirty="0">
-                <a:solidFill>
-                  <a:srgbClr val="9D174D"/>
-                </a:solidFill>
-                <a:latin typeface="Trebuchet MS" pitchFamily="34" charset="0"/>
-                <a:ea typeface="Trebuchet MS" pitchFamily="34" charset="-122"/>
-                <a:cs typeface="Trebuchet MS" pitchFamily="34" charset="-120"/>
-              </a:rPr>
-              <a:t>w</a:t>
-            </a:r>
-            <a:endParaRPr lang="en-US" sz="900" dirty="0"/>
-          </a:p>
-        </p:txBody>
-      </p:sp>
-      <p:sp>
-        <p:nvSpPr>
-          <p:cNvPr id="39" name="Shape 37"/>
-          <p:cNvSpPr/>
-          <p:nvPr/>
-        </p:nvSpPr>
-        <p:spPr>
-          <a:xfrm>
-            <a:off x="7031736" y="4169664"/>
-            <a:ext cx="685800" cy="475488"/>
-          </a:xfrm>
-          <a:prstGeom prst="rect">
-            <a:avLst>
-              <a:gd name="adj" fmla="val 7692"/>
-            </a:avLst>
-          </a:prstGeom>
-          <a:solidFill>
-            <a:srgbClr val="FFFFFF"/>
-          </a:solidFill>
-          <a:ln w="12700">
-            <a:solidFill>
-              <a:srgbClr val="DB2777"/>
-            </a:solidFill>
-            <a:prstDash val="solid"/>
-          </a:ln>
-        </p:spPr>
-      </p:sp>
-      <p:sp>
-        <p:nvSpPr>
-          <p:cNvPr id="40" name="Text 38"/>
-          <p:cNvSpPr/>
-          <p:nvPr/>
-        </p:nvSpPr>
-        <p:spPr>
-          <a:xfrm>
-            <a:off x="7031736" y="4169664"/>
-            <a:ext cx="685800" cy="475488"/>
-          </a:xfrm>
-          <a:prstGeom prst="rect">
-            <a:avLst/>
-          </a:prstGeom>
-          <a:noFill/>
-          <a:ln/>
-        </p:spPr>
-        <p:txBody>
-          <a:bodyPr wrap="square" lIns="0" tIns="0" rIns="0" bIns="0" rtlCol="0" anchor="ctr"/>
-          <a:lstStyle/>
-          <a:p>
-            <a:pPr algn="ctr" indent="0" marL="0">
-              <a:buNone/>
-            </a:pPr>
-            <a:r>
-              <a:rPr lang="en-US" sz="900" b="1" dirty="0">
-                <a:solidFill>
-                  <a:srgbClr val="9D174D"/>
-                </a:solidFill>
-                <a:latin typeface="Trebuchet MS" pitchFamily="34" charset="0"/>
-                <a:ea typeface="Trebuchet MS" pitchFamily="34" charset="-122"/>
-                <a:cs typeface="Trebuchet MS" pitchFamily="34" charset="-120"/>
-              </a:rPr>
-              <a:t>ay</a:t>
-            </a:r>
-            <a:endParaRPr lang="en-US" sz="900" dirty="0"/>
+              <a:t>s</a:t>
+            </a:r>
+            <a:endParaRPr lang="en-US" sz="1000" dirty="0"/>
           </a:p>
         </p:txBody>
       </p:sp>
@@ -10987,7 +10711,7 @@
                 <a:ea typeface="Calibri" pitchFamily="34" charset="-122"/>
                 <a:cs typeface="Calibri" pitchFamily="34" charset="-120"/>
               </a:rPr>
-              <a:t>Word Labs  •  wordlabs.app  •  Root: 'way' = path, road, or direction</a:t>
+              <a:t>Word Labs  •  wordlabs.app  •  Root: 'way' = a path, direction or method</a:t>
             </a:r>
             <a:endParaRPr lang="en-US" sz="800" dirty="0"/>
           </a:p>
@@ -11126,7 +10850,7 @@
                 <a:ea typeface="Trebuchet MS" pitchFamily="34" charset="-122"/>
                 <a:cs typeface="Trebuchet MS" pitchFamily="34" charset="-120"/>
               </a:rPr>
-              <a:t>pathway</a:t>
+              <a:t>midway</a:t>
             </a:r>
             <a:endParaRPr lang="en-US" sz="2800" dirty="0"/>
           </a:p>
@@ -11814,7 +11538,7 @@
                 <a:ea typeface="Calibri" pitchFamily="34" charset="-122"/>
                 <a:cs typeface="Calibri" pitchFamily="34" charset="-120"/>
               </a:rPr>
-              <a:t>Word Labs  •  wordlabs.app  •  Root: 'way' = path, road, or direction</a:t>
+              <a:t>Word Labs  •  wordlabs.app  •  Root: 'way' = a path, direction or method</a:t>
             </a:r>
             <a:endParaRPr lang="en-US" sz="800" dirty="0"/>
           </a:p>
@@ -11953,7 +11677,7 @@
                 <a:ea typeface="Trebuchet MS" pitchFamily="34" charset="-122"/>
                 <a:cs typeface="Trebuchet MS" pitchFamily="34" charset="-120"/>
               </a:rPr>
-              <a:t>pathway</a:t>
+              <a:t>midway</a:t>
             </a:r>
             <a:endParaRPr lang="en-US" sz="2800" dirty="0"/>
           </a:p>
@@ -12092,7 +11816,7 @@
                 <a:ea typeface="Trebuchet MS" pitchFamily="34" charset="-122"/>
                 <a:cs typeface="Trebuchet MS" pitchFamily="34" charset="-120"/>
               </a:rPr>
-              <a:t>path</a:t>
+              <a:t>mid</a:t>
             </a:r>
             <a:endParaRPr lang="en-US" sz="1300" dirty="0"/>
           </a:p>
@@ -12131,7 +11855,7 @@
                 <a:ea typeface="Calibri" pitchFamily="34" charset="-122"/>
                 <a:cs typeface="Calibri" pitchFamily="34" charset="-120"/>
               </a:rPr>
-              <a:t>a track to walk along</a:t>
+              <a:t>middle</a:t>
             </a:r>
             <a:endParaRPr lang="en-US" sz="850" dirty="0"/>
           </a:p>
@@ -12243,7 +11967,7 @@
                 <a:ea typeface="Calibri" pitchFamily="34" charset="-122"/>
                 <a:cs typeface="Calibri" pitchFamily="34" charset="-120"/>
               </a:rPr>
-              <a:t>path or route</a:t>
+              <a:t>a path, direction or method</a:t>
             </a:r>
             <a:endParaRPr lang="en-US" sz="850" dirty="0"/>
           </a:p>
@@ -12799,7 +12523,7 @@
                 <a:ea typeface="Calibri" pitchFamily="34" charset="-122"/>
                 <a:cs typeface="Calibri" pitchFamily="34" charset="-120"/>
               </a:rPr>
-              <a:t>Word Labs  •  wordlabs.app  •  Root: 'way' = path, road, or direction</a:t>
+              <a:t>Word Labs  •  wordlabs.app  •  Root: 'way' = a path, direction or method</a:t>
             </a:r>
             <a:endParaRPr lang="en-US" sz="800" dirty="0"/>
           </a:p>
@@ -12938,7 +12662,7 @@
                 <a:ea typeface="Trebuchet MS" pitchFamily="34" charset="-122"/>
                 <a:cs typeface="Trebuchet MS" pitchFamily="34" charset="-120"/>
               </a:rPr>
-              <a:t>pathway</a:t>
+              <a:t>midway</a:t>
             </a:r>
             <a:endParaRPr lang="en-US" sz="2800" dirty="0"/>
           </a:p>
@@ -13077,7 +12801,7 @@
                 <a:ea typeface="Trebuchet MS" pitchFamily="34" charset="-122"/>
                 <a:cs typeface="Trebuchet MS" pitchFamily="34" charset="-120"/>
               </a:rPr>
-              <a:t>path</a:t>
+              <a:t>mid</a:t>
             </a:r>
             <a:endParaRPr lang="en-US" sz="1300" dirty="0"/>
           </a:p>
@@ -13116,7 +12840,7 @@
                 <a:ea typeface="Calibri" pitchFamily="34" charset="-122"/>
                 <a:cs typeface="Calibri" pitchFamily="34" charset="-120"/>
               </a:rPr>
-              <a:t>a track to walk along</a:t>
+              <a:t>middle</a:t>
             </a:r>
             <a:endParaRPr lang="en-US" sz="850" dirty="0"/>
           </a:p>
@@ -13228,7 +12952,7 @@
                 <a:ea typeface="Calibri" pitchFamily="34" charset="-122"/>
                 <a:cs typeface="Calibri" pitchFamily="34" charset="-120"/>
               </a:rPr>
-              <a:t>path or route</a:t>
+              <a:t>a path, direction or method</a:t>
             </a:r>
             <a:endParaRPr lang="en-US" sz="850" dirty="0"/>
           </a:p>
@@ -13387,7 +13111,7 @@
                 <a:ea typeface="Trebuchet MS" pitchFamily="34" charset="-122"/>
                 <a:cs typeface="Trebuchet MS" pitchFamily="34" charset="-120"/>
               </a:rPr>
-              <a:t>path</a:t>
+              <a:t>mid</a:t>
             </a:r>
             <a:endParaRPr lang="en-US" sz="1400" dirty="0"/>
           </a:p>
@@ -13825,7 +13549,7 @@
                 <a:ea typeface="Calibri" pitchFamily="34" charset="-122"/>
                 <a:cs typeface="Calibri" pitchFamily="34" charset="-120"/>
               </a:rPr>
-              <a:t>Root 'way' — path, road, or direction</a:t>
+              <a:t>Root 'way' — a path, direction or method</a:t>
             </a:r>
             <a:endParaRPr lang="en-US" sz="1600" dirty="0"/>
           </a:p>
@@ -14181,7 +13905,7 @@
                 <a:ea typeface="Calibri" pitchFamily="34" charset="-122"/>
                 <a:cs typeface="Calibri" pitchFamily="34" charset="-120"/>
               </a:rPr>
-              <a:t>Word Labs  •  wordlabs.app  •  Root: 'way' = path, road, or direction</a:t>
+              <a:t>Word Labs  •  wordlabs.app  •  Root: 'way' = a path, direction or method</a:t>
             </a:r>
             <a:endParaRPr lang="en-US" sz="800" dirty="0"/>
           </a:p>
@@ -14320,7 +14044,7 @@
                 <a:ea typeface="Trebuchet MS" pitchFamily="34" charset="-122"/>
                 <a:cs typeface="Trebuchet MS" pitchFamily="34" charset="-120"/>
               </a:rPr>
-              <a:t>pathway</a:t>
+              <a:t>midway</a:t>
             </a:r>
             <a:endParaRPr lang="en-US" sz="2800" dirty="0"/>
           </a:p>
@@ -14459,7 +14183,7 @@
                 <a:ea typeface="Trebuchet MS" pitchFamily="34" charset="-122"/>
                 <a:cs typeface="Trebuchet MS" pitchFamily="34" charset="-120"/>
               </a:rPr>
-              <a:t>path</a:t>
+              <a:t>mid</a:t>
             </a:r>
             <a:endParaRPr lang="en-US" sz="1300" dirty="0"/>
           </a:p>
@@ -14498,7 +14222,7 @@
                 <a:ea typeface="Calibri" pitchFamily="34" charset="-122"/>
                 <a:cs typeface="Calibri" pitchFamily="34" charset="-120"/>
               </a:rPr>
-              <a:t>a track to walk along</a:t>
+              <a:t>middle</a:t>
             </a:r>
             <a:endParaRPr lang="en-US" sz="850" dirty="0"/>
           </a:p>
@@ -14610,7 +14334,7 @@
                 <a:ea typeface="Calibri" pitchFamily="34" charset="-122"/>
                 <a:cs typeface="Calibri" pitchFamily="34" charset="-120"/>
               </a:rPr>
-              <a:t>path or route</a:t>
+              <a:t>a path, direction or method</a:t>
             </a:r>
             <a:endParaRPr lang="en-US" sz="850" dirty="0"/>
           </a:p>
@@ -14769,7 +14493,7 @@
                 <a:ea typeface="Trebuchet MS" pitchFamily="34" charset="-122"/>
                 <a:cs typeface="Trebuchet MS" pitchFamily="34" charset="-120"/>
               </a:rPr>
-              <a:t>path</a:t>
+              <a:t>mid</a:t>
             </a:r>
             <a:endParaRPr lang="en-US" sz="1400" dirty="0"/>
           </a:p>
@@ -15033,7 +14757,7 @@
                 <a:ea typeface="Trebuchet MS" pitchFamily="34" charset="-122"/>
                 <a:cs typeface="Trebuchet MS" pitchFamily="34" charset="-120"/>
               </a:rPr>
-              <a:t>p</a:t>
+              <a:t>m</a:t>
             </a:r>
             <a:endParaRPr lang="en-US" sz="900" dirty="0"/>
           </a:p>
@@ -15099,7 +14823,7 @@
                 <a:ea typeface="Trebuchet MS" pitchFamily="34" charset="-122"/>
                 <a:cs typeface="Trebuchet MS" pitchFamily="34" charset="-120"/>
               </a:rPr>
-              <a:t>a</a:t>
+              <a:t>i</a:t>
             </a:r>
             <a:endParaRPr lang="en-US" sz="900" dirty="0"/>
           </a:p>
@@ -15165,7 +14889,7 @@
                 <a:ea typeface="Trebuchet MS" pitchFamily="34" charset="-122"/>
                 <a:cs typeface="Trebuchet MS" pitchFamily="34" charset="-120"/>
               </a:rPr>
-              <a:t>th</a:t>
+              <a:t>d</a:t>
             </a:r>
             <a:endParaRPr lang="en-US" sz="900" dirty="0"/>
           </a:p>
@@ -15871,7 +15595,7 @@
                 <a:ea typeface="Calibri" pitchFamily="34" charset="-122"/>
                 <a:cs typeface="Calibri" pitchFamily="34" charset="-120"/>
               </a:rPr>
-              <a:t>Word Labs  •  wordlabs.app  •  Root: 'way' = path, road, or direction</a:t>
+              <a:t>Word Labs  •  wordlabs.app  •  Root: 'way' = a path, direction or method</a:t>
             </a:r>
             <a:endParaRPr lang="en-US" sz="800" dirty="0"/>
           </a:p>
@@ -16205,7 +15929,7 @@
                 <a:ea typeface="Trebuchet MS" pitchFamily="34" charset="-122"/>
                 <a:cs typeface="Trebuchet MS" pitchFamily="34" charset="-120"/>
               </a:rPr>
-              <a:t>2</a:t>
+              <a:t>0</a:t>
             </a:r>
             <a:pPr algn="ctr" indent="0" marL="0">
               <a:buNone/>
@@ -16219,7 +15943,7 @@
                 <a:ea typeface="Trebuchet MS" pitchFamily="34" charset="-122"/>
                 <a:cs typeface="Trebuchet MS" pitchFamily="34" charset="-120"/>
               </a:rPr>
-              <a:t>  punctuation marks</a:t>
+              <a:t>  punctuation mark</a:t>
             </a:r>
             <a:endParaRPr lang="en-US" sz="2800" dirty="0"/>
           </a:p>
@@ -16511,7 +16235,7 @@
                 <a:ea typeface="Calibri" pitchFamily="34" charset="-122"/>
                 <a:cs typeface="Calibri" pitchFamily="34" charset="-120"/>
               </a:rPr>
-              <a:t>Word Labs  •  wordlabs.app  •  Root: 'way' = path, road, or direction</a:t>
+              <a:t>Word Labs  •  wordlabs.app  •  Root: 'way' = a path, direction or method</a:t>
             </a:r>
             <a:endParaRPr lang="en-US" sz="800" dirty="0"/>
           </a:p>
@@ -16623,7 +16347,7 @@
                 <a:ea typeface="Calibri" pitchFamily="34" charset="-122"/>
                 <a:cs typeface="Calibri" pitchFamily="34" charset="-120"/>
               </a:rPr>
-              <a:t>At the </a:t>
+              <a:t>We took the </a:t>
             </a:r>
             <a:pPr algn="l" indent="0" marL="0">
               <a:buNone/>
@@ -16640,7 +16364,7 @@
                 <a:ea typeface="Calibri" pitchFamily="34" charset="-122"/>
                 <a:cs typeface="Calibri" pitchFamily="34" charset="-120"/>
               </a:rPr>
-              <a:t>halfway</a:t>
+              <a:t>subway</a:t>
             </a:r>
             <a:pPr algn="l" indent="0" marL="0">
               <a:buNone/>
@@ -16654,7 +16378,7 @@
                 <a:ea typeface="Calibri" pitchFamily="34" charset="-122"/>
                 <a:cs typeface="Calibri" pitchFamily="34" charset="-120"/>
               </a:rPr>
-              <a:t> point, we stopped to rest near the </a:t>
+              <a:t> to get across the city quickly. Preparations for the school fair are already well </a:t>
             </a:r>
             <a:pPr algn="l" indent="0" marL="0">
               <a:buNone/>
@@ -16671,7 +16395,7 @@
                 <a:ea typeface="Calibri" pitchFamily="34" charset="-122"/>
                 <a:cs typeface="Calibri" pitchFamily="34" charset="-120"/>
               </a:rPr>
-              <a:t>doorway</a:t>
+              <a:t>underway</a:t>
             </a:r>
             <a:pPr algn="l" indent="0" marL="0">
               <a:buNone/>
@@ -16685,7 +16409,7 @@
                 <a:ea typeface="Calibri" pitchFamily="34" charset="-122"/>
                 <a:cs typeface="Calibri" pitchFamily="34" charset="-120"/>
               </a:rPr>
-              <a:t> of an old stone building, then continued down the </a:t>
+              <a:t>. The nearest beach is two kilometres </a:t>
             </a:r>
             <a:pPr algn="l" indent="0" marL="0">
               <a:buNone/>
@@ -16702,7 +16426,7 @@
                 <a:ea typeface="Calibri" pitchFamily="34" charset="-122"/>
                 <a:cs typeface="Calibri" pitchFamily="34" charset="-120"/>
               </a:rPr>
-              <a:t>freeway</a:t>
+              <a:t>away</a:t>
             </a:r>
             <a:pPr algn="l" indent="0" marL="0">
               <a:buNone/>
@@ -16716,7 +16440,7 @@
                 <a:ea typeface="Calibri" pitchFamily="34" charset="-122"/>
                 <a:cs typeface="Calibri" pitchFamily="34" charset="-120"/>
               </a:rPr>
-              <a:t>.</a:t>
+              <a:t> from our house.</a:t>
             </a:r>
             <a:endParaRPr lang="en-US" sz="1800" dirty="0"/>
           </a:p>
@@ -16871,7 +16595,7 @@
                 <a:ea typeface="Trebuchet MS" pitchFamily="34" charset="-122"/>
                 <a:cs typeface="Trebuchet MS" pitchFamily="34" charset="-120"/>
               </a:rPr>
-              <a:t>halfway</a:t>
+              <a:t>subway</a:t>
             </a:r>
             <a:endParaRPr lang="en-US" sz="1400" dirty="0"/>
           </a:p>
@@ -16999,7 +16723,7 @@
                 <a:ea typeface="Trebuchet MS" pitchFamily="34" charset="-122"/>
                 <a:cs typeface="Trebuchet MS" pitchFamily="34" charset="-120"/>
               </a:rPr>
-              <a:t>doorway</a:t>
+              <a:t>underway</a:t>
             </a:r>
             <a:endParaRPr lang="en-US" sz="1400" dirty="0"/>
           </a:p>
@@ -17127,7 +16851,7 @@
                 <a:ea typeface="Trebuchet MS" pitchFamily="34" charset="-122"/>
                 <a:cs typeface="Trebuchet MS" pitchFamily="34" charset="-120"/>
               </a:rPr>
-              <a:t>freeway</a:t>
+              <a:t>away</a:t>
             </a:r>
             <a:endParaRPr lang="en-US" sz="1400" dirty="0"/>
           </a:p>
@@ -17458,7 +17182,7 @@
                 <a:ea typeface="Calibri" pitchFamily="34" charset="-122"/>
                 <a:cs typeface="Calibri" pitchFamily="34" charset="-120"/>
               </a:rPr>
-              <a:t>Word Labs  •  wordlabs.app  •  Root: 'way' = path, road, or direction</a:t>
+              <a:t>Word Labs  •  wordlabs.app  •  Root: 'way' = a path, direction or method</a:t>
             </a:r>
             <a:endParaRPr lang="en-US" sz="800" dirty="0"/>
           </a:p>
@@ -17597,7 +17321,7 @@
                 <a:ea typeface="Trebuchet MS" pitchFamily="34" charset="-122"/>
                 <a:cs typeface="Trebuchet MS" pitchFamily="34" charset="-120"/>
               </a:rPr>
-              <a:t>halfway</a:t>
+              <a:t>subway</a:t>
             </a:r>
             <a:endParaRPr lang="en-US" sz="2800" dirty="0"/>
           </a:p>
@@ -18285,7 +18009,7 @@
                 <a:ea typeface="Calibri" pitchFamily="34" charset="-122"/>
                 <a:cs typeface="Calibri" pitchFamily="34" charset="-120"/>
               </a:rPr>
-              <a:t>Word Labs  •  wordlabs.app  •  Root: 'way' = path, road, or direction</a:t>
+              <a:t>Word Labs  •  wordlabs.app  •  Root: 'way' = a path, direction or method</a:t>
             </a:r>
             <a:endParaRPr lang="en-US" sz="800" dirty="0"/>
           </a:p>
@@ -18424,7 +18148,7 @@
                 <a:ea typeface="Trebuchet MS" pitchFamily="34" charset="-122"/>
                 <a:cs typeface="Trebuchet MS" pitchFamily="34" charset="-120"/>
               </a:rPr>
-              <a:t>halfway</a:t>
+              <a:t>subway</a:t>
             </a:r>
             <a:endParaRPr lang="en-US" sz="2800" dirty="0"/>
           </a:p>
@@ -18563,7 +18287,7 @@
                 <a:ea typeface="Trebuchet MS" pitchFamily="34" charset="-122"/>
                 <a:cs typeface="Trebuchet MS" pitchFamily="34" charset="-120"/>
               </a:rPr>
-              <a:t>half</a:t>
+              <a:t>sub</a:t>
             </a:r>
             <a:endParaRPr lang="en-US" sz="1300" dirty="0"/>
           </a:p>
@@ -18602,7 +18326,7 @@
                 <a:ea typeface="Calibri" pitchFamily="34" charset="-122"/>
                 <a:cs typeface="Calibri" pitchFamily="34" charset="-120"/>
               </a:rPr>
-              <a:t>one of two equal parts</a:t>
+              <a:t>under; below</a:t>
             </a:r>
             <a:endParaRPr lang="en-US" sz="850" dirty="0"/>
           </a:p>
@@ -18714,7 +18438,7 @@
                 <a:ea typeface="Calibri" pitchFamily="34" charset="-122"/>
                 <a:cs typeface="Calibri" pitchFamily="34" charset="-120"/>
               </a:rPr>
-              <a:t>path or route</a:t>
+              <a:t>a path, direction or method</a:t>
             </a:r>
             <a:endParaRPr lang="en-US" sz="850" dirty="0"/>
           </a:p>
@@ -19270,7 +18994,7 @@
                 <a:ea typeface="Calibri" pitchFamily="34" charset="-122"/>
                 <a:cs typeface="Calibri" pitchFamily="34" charset="-120"/>
               </a:rPr>
-              <a:t>Word Labs  •  wordlabs.app  •  Root: 'way' = path, road, or direction</a:t>
+              <a:t>Word Labs  •  wordlabs.app  •  Root: 'way' = a path, direction or method</a:t>
             </a:r>
             <a:endParaRPr lang="en-US" sz="800" dirty="0"/>
           </a:p>
@@ -19409,7 +19133,7 @@
                 <a:ea typeface="Trebuchet MS" pitchFamily="34" charset="-122"/>
                 <a:cs typeface="Trebuchet MS" pitchFamily="34" charset="-120"/>
               </a:rPr>
-              <a:t>halfway</a:t>
+              <a:t>subway</a:t>
             </a:r>
             <a:endParaRPr lang="en-US" sz="2800" dirty="0"/>
           </a:p>
@@ -19548,7 +19272,7 @@
                 <a:ea typeface="Trebuchet MS" pitchFamily="34" charset="-122"/>
                 <a:cs typeface="Trebuchet MS" pitchFamily="34" charset="-120"/>
               </a:rPr>
-              <a:t>half</a:t>
+              <a:t>sub</a:t>
             </a:r>
             <a:endParaRPr lang="en-US" sz="1300" dirty="0"/>
           </a:p>
@@ -19587,7 +19311,7 @@
                 <a:ea typeface="Calibri" pitchFamily="34" charset="-122"/>
                 <a:cs typeface="Calibri" pitchFamily="34" charset="-120"/>
               </a:rPr>
-              <a:t>one of two equal parts</a:t>
+              <a:t>under; below</a:t>
             </a:r>
             <a:endParaRPr lang="en-US" sz="850" dirty="0"/>
           </a:p>
@@ -19699,7 +19423,7 @@
                 <a:ea typeface="Calibri" pitchFamily="34" charset="-122"/>
                 <a:cs typeface="Calibri" pitchFamily="34" charset="-120"/>
               </a:rPr>
-              <a:t>path or route</a:t>
+              <a:t>a path, direction or method</a:t>
             </a:r>
             <a:endParaRPr lang="en-US" sz="850" dirty="0"/>
           </a:p>
@@ -19858,7 +19582,7 @@
                 <a:ea typeface="Trebuchet MS" pitchFamily="34" charset="-122"/>
                 <a:cs typeface="Trebuchet MS" pitchFamily="34" charset="-120"/>
               </a:rPr>
-              <a:t>half</a:t>
+              <a:t>sub</a:t>
             </a:r>
             <a:endParaRPr lang="en-US" sz="1400" dirty="0"/>
           </a:p>
@@ -20387,7 +20111,7 @@
                 <a:ea typeface="Calibri" pitchFamily="34" charset="-122"/>
                 <a:cs typeface="Calibri" pitchFamily="34" charset="-120"/>
               </a:rPr>
-              <a:t>Word Labs  •  wordlabs.app  •  Root: 'way' = path, road, or direction</a:t>
+              <a:t>Word Labs  •  wordlabs.app  •  Root: 'way' = a path, direction or method</a:t>
             </a:r>
             <a:endParaRPr lang="en-US" sz="800" dirty="0"/>
           </a:p>
@@ -20526,7 +20250,7 @@
                 <a:ea typeface="Trebuchet MS" pitchFamily="34" charset="-122"/>
                 <a:cs typeface="Trebuchet MS" pitchFamily="34" charset="-120"/>
               </a:rPr>
-              <a:t>halfway</a:t>
+              <a:t>subway</a:t>
             </a:r>
             <a:endParaRPr lang="en-US" sz="2800" dirty="0"/>
           </a:p>
@@ -20665,7 +20389,7 @@
                 <a:ea typeface="Trebuchet MS" pitchFamily="34" charset="-122"/>
                 <a:cs typeface="Trebuchet MS" pitchFamily="34" charset="-120"/>
               </a:rPr>
-              <a:t>half</a:t>
+              <a:t>sub</a:t>
             </a:r>
             <a:endParaRPr lang="en-US" sz="1300" dirty="0"/>
           </a:p>
@@ -20704,7 +20428,7 @@
                 <a:ea typeface="Calibri" pitchFamily="34" charset="-122"/>
                 <a:cs typeface="Calibri" pitchFamily="34" charset="-120"/>
               </a:rPr>
-              <a:t>one of two equal parts</a:t>
+              <a:t>under; below</a:t>
             </a:r>
             <a:endParaRPr lang="en-US" sz="850" dirty="0"/>
           </a:p>
@@ -20816,7 +20540,7 @@
                 <a:ea typeface="Calibri" pitchFamily="34" charset="-122"/>
                 <a:cs typeface="Calibri" pitchFamily="34" charset="-120"/>
               </a:rPr>
-              <a:t>path or route</a:t>
+              <a:t>a path, direction or method</a:t>
             </a:r>
             <a:endParaRPr lang="en-US" sz="850" dirty="0"/>
           </a:p>
@@ -20975,7 +20699,7 @@
                 <a:ea typeface="Trebuchet MS" pitchFamily="34" charset="-122"/>
                 <a:cs typeface="Trebuchet MS" pitchFamily="34" charset="-120"/>
               </a:rPr>
-              <a:t>half</a:t>
+              <a:t>sub</a:t>
             </a:r>
             <a:endParaRPr lang="en-US" sz="1400" dirty="0"/>
           </a:p>
@@ -21239,7 +20963,7 @@
                 <a:ea typeface="Trebuchet MS" pitchFamily="34" charset="-122"/>
                 <a:cs typeface="Trebuchet MS" pitchFamily="34" charset="-120"/>
               </a:rPr>
-              <a:t>h</a:t>
+              <a:t>s</a:t>
             </a:r>
             <a:endParaRPr lang="en-US" sz="900" dirty="0"/>
           </a:p>
@@ -21305,7 +21029,7 @@
                 <a:ea typeface="Trebuchet MS" pitchFamily="34" charset="-122"/>
                 <a:cs typeface="Trebuchet MS" pitchFamily="34" charset="-120"/>
               </a:rPr>
-              <a:t>a</a:t>
+              <a:t>u</a:t>
             </a:r>
             <a:endParaRPr lang="en-US" sz="900" dirty="0"/>
           </a:p>
@@ -21371,7 +21095,7 @@
                 <a:ea typeface="Trebuchet MS" pitchFamily="34" charset="-122"/>
                 <a:cs typeface="Trebuchet MS" pitchFamily="34" charset="-120"/>
               </a:rPr>
-              <a:t>lf</a:t>
+              <a:t>b</a:t>
             </a:r>
             <a:endParaRPr lang="en-US" sz="900" dirty="0"/>
           </a:p>
@@ -21795,7 +21519,7 @@
                 <a:ea typeface="Calibri" pitchFamily="34" charset="-122"/>
                 <a:cs typeface="Calibri" pitchFamily="34" charset="-120"/>
               </a:rPr>
-              <a:t>Word Labs  •  wordlabs.app  •  Root: 'way' = path, road, or direction</a:t>
+              <a:t>Word Labs  •  wordlabs.app  •  Root: 'way' = a path, direction or method</a:t>
             </a:r>
             <a:endParaRPr lang="en-US" sz="800" dirty="0"/>
           </a:p>
@@ -21934,7 +21658,7 @@
                 <a:ea typeface="Trebuchet MS" pitchFamily="34" charset="-122"/>
                 <a:cs typeface="Trebuchet MS" pitchFamily="34" charset="-120"/>
               </a:rPr>
-              <a:t>doorway</a:t>
+              <a:t>underway</a:t>
             </a:r>
             <a:endParaRPr lang="en-US" sz="2800" dirty="0"/>
           </a:p>
@@ -22622,7 +22346,7 @@
                 <a:ea typeface="Calibri" pitchFamily="34" charset="-122"/>
                 <a:cs typeface="Calibri" pitchFamily="34" charset="-120"/>
               </a:rPr>
-              <a:t>Word Labs  •  wordlabs.app  •  Root: 'way' = path, road, or direction</a:t>
+              <a:t>Word Labs  •  wordlabs.app  •  Root: 'way' = a path, direction or method</a:t>
             </a:r>
             <a:endParaRPr lang="en-US" sz="800" dirty="0"/>
           </a:p>
@@ -22761,7 +22485,7 @@
                 <a:ea typeface="Trebuchet MS" pitchFamily="34" charset="-122"/>
                 <a:cs typeface="Trebuchet MS" pitchFamily="34" charset="-120"/>
               </a:rPr>
-              <a:t>doorway</a:t>
+              <a:t>underway</a:t>
             </a:r>
             <a:endParaRPr lang="en-US" sz="2800" dirty="0"/>
           </a:p>
@@ -22900,7 +22624,7 @@
                 <a:ea typeface="Trebuchet MS" pitchFamily="34" charset="-122"/>
                 <a:cs typeface="Trebuchet MS" pitchFamily="34" charset="-120"/>
               </a:rPr>
-              <a:t>door</a:t>
+              <a:t>under</a:t>
             </a:r>
             <a:endParaRPr lang="en-US" sz="1300" dirty="0"/>
           </a:p>
@@ -22939,7 +22663,7 @@
                 <a:ea typeface="Calibri" pitchFamily="34" charset="-122"/>
                 <a:cs typeface="Calibri" pitchFamily="34" charset="-120"/>
               </a:rPr>
-              <a:t>an entrance or opening</a:t>
+              <a:t>below</a:t>
             </a:r>
             <a:endParaRPr lang="en-US" sz="850" dirty="0"/>
           </a:p>
@@ -23051,7 +22775,7 @@
                 <a:ea typeface="Calibri" pitchFamily="34" charset="-122"/>
                 <a:cs typeface="Calibri" pitchFamily="34" charset="-120"/>
               </a:rPr>
-              <a:t>path or route</a:t>
+              <a:t>a path, direction or method</a:t>
             </a:r>
             <a:endParaRPr lang="en-US" sz="850" dirty="0"/>
           </a:p>
@@ -23607,7 +23331,7 @@
                 <a:ea typeface="Calibri" pitchFamily="34" charset="-122"/>
                 <a:cs typeface="Calibri" pitchFamily="34" charset="-120"/>
               </a:rPr>
-              <a:t>Word Labs  •  wordlabs.app  •  Root: 'way' = path, road, or direction</a:t>
+              <a:t>Word Labs  •  wordlabs.app  •  Root: 'way' = a path, direction or method</a:t>
             </a:r>
             <a:endParaRPr lang="en-US" sz="800" dirty="0"/>
           </a:p>
@@ -23680,7 +23404,7 @@
                 <a:ea typeface="Trebuchet MS" pitchFamily="34" charset="-122"/>
                 <a:cs typeface="Trebuchet MS" pitchFamily="34" charset="-120"/>
               </a:rPr>
-              <a:t>We are learning that the root 'way' means 'path, road, or direction'.</a:t>
+              <a:t>We are learning that the root 'way' means 'a path, direction or method'.</a:t>
             </a:r>
             <a:endParaRPr lang="en-US" sz="2000" dirty="0"/>
           </a:p>
@@ -24326,7 +24050,7 @@
                 <a:ea typeface="Calibri" pitchFamily="34" charset="-122"/>
                 <a:cs typeface="Calibri" pitchFamily="34" charset="-120"/>
               </a:rPr>
-              <a:t>Word Labs  •  wordlabs.app  •  Root: 'way' = path, road, or direction</a:t>
+              <a:t>Word Labs  •  wordlabs.app  •  Root: 'way' = a path, direction or method</a:t>
             </a:r>
             <a:endParaRPr lang="en-US" sz="800" dirty="0"/>
           </a:p>
@@ -24465,7 +24189,7 @@
                 <a:ea typeface="Trebuchet MS" pitchFamily="34" charset="-122"/>
                 <a:cs typeface="Trebuchet MS" pitchFamily="34" charset="-120"/>
               </a:rPr>
-              <a:t>doorway</a:t>
+              <a:t>underway</a:t>
             </a:r>
             <a:endParaRPr lang="en-US" sz="2800" dirty="0"/>
           </a:p>
@@ -24604,7 +24328,7 @@
                 <a:ea typeface="Trebuchet MS" pitchFamily="34" charset="-122"/>
                 <a:cs typeface="Trebuchet MS" pitchFamily="34" charset="-120"/>
               </a:rPr>
-              <a:t>door</a:t>
+              <a:t>under</a:t>
             </a:r>
             <a:endParaRPr lang="en-US" sz="1300" dirty="0"/>
           </a:p>
@@ -24643,7 +24367,7 @@
                 <a:ea typeface="Calibri" pitchFamily="34" charset="-122"/>
                 <a:cs typeface="Calibri" pitchFamily="34" charset="-120"/>
               </a:rPr>
-              <a:t>an entrance or opening</a:t>
+              <a:t>below</a:t>
             </a:r>
             <a:endParaRPr lang="en-US" sz="850" dirty="0"/>
           </a:p>
@@ -24755,7 +24479,7 @@
                 <a:ea typeface="Calibri" pitchFamily="34" charset="-122"/>
                 <a:cs typeface="Calibri" pitchFamily="34" charset="-120"/>
               </a:rPr>
-              <a:t>path or route</a:t>
+              <a:t>a path, direction or method</a:t>
             </a:r>
             <a:endParaRPr lang="en-US" sz="850" dirty="0"/>
           </a:p>
@@ -24862,7 +24586,7 @@
         </p:nvSpPr>
         <p:spPr>
           <a:xfrm>
-            <a:off x="2999232" y="3364992"/>
+            <a:off x="2313432" y="3364992"/>
             <a:ext cx="1645920" cy="475488"/>
           </a:xfrm>
           <a:prstGeom prst="rect">
@@ -24889,7 +24613,7 @@
         </p:nvSpPr>
         <p:spPr>
           <a:xfrm>
-            <a:off x="2999232" y="3364992"/>
+            <a:off x="2313432" y="3364992"/>
             <a:ext cx="1645920" cy="475488"/>
           </a:xfrm>
           <a:prstGeom prst="rect">
@@ -24914,7 +24638,7 @@
                 <a:ea typeface="Trebuchet MS" pitchFamily="34" charset="-122"/>
                 <a:cs typeface="Trebuchet MS" pitchFamily="34" charset="-120"/>
               </a:rPr>
-              <a:t>door</a:t>
+              <a:t>un</a:t>
             </a:r>
             <a:endParaRPr lang="en-US" sz="1400" dirty="0"/>
           </a:p>
@@ -24928,8 +24652,8 @@
         </p:nvSpPr>
         <p:spPr>
           <a:xfrm>
-            <a:off x="4645152" y="3364992"/>
-            <a:ext cx="1097280" cy="475488"/>
+            <a:off x="3959352" y="3364992"/>
+            <a:ext cx="411480" cy="475488"/>
           </a:xfrm>
           <a:prstGeom prst="rect">
             <a:avLst/>
@@ -24967,7 +24691,7 @@
         </p:nvSpPr>
         <p:spPr>
           <a:xfrm>
-            <a:off x="5742432" y="3364992"/>
+            <a:off x="4370832" y="3364992"/>
             <a:ext cx="1645920" cy="475488"/>
           </a:xfrm>
           <a:prstGeom prst="rect">
@@ -24994,7 +24718,7 @@
         </p:nvSpPr>
         <p:spPr>
           <a:xfrm>
-            <a:off x="5742432" y="3364992"/>
+            <a:off x="4370832" y="3364992"/>
             <a:ext cx="1645920" cy="475488"/>
           </a:xfrm>
           <a:prstGeom prst="rect">
@@ -25019,6 +24743,111 @@
                 <a:ea typeface="Trebuchet MS" pitchFamily="34" charset="-122"/>
                 <a:cs typeface="Trebuchet MS" pitchFamily="34" charset="-120"/>
               </a:rPr>
+              <a:t>der</a:t>
+            </a:r>
+            <a:endParaRPr lang="en-US" sz="1400" dirty="0"/>
+          </a:p>
+        </p:txBody>
+      </p:sp>
+      <p:sp>
+        <p:nvSpPr>
+          <p:cNvPr id="30" name="Text 28"/>
+          <p:cNvSpPr/>
+          <p:nvPr/>
+        </p:nvSpPr>
+        <p:spPr>
+          <a:xfrm>
+            <a:off x="6016752" y="3364992"/>
+            <a:ext cx="411480" cy="475488"/>
+          </a:xfrm>
+          <a:prstGeom prst="rect">
+            <a:avLst/>
+          </a:prstGeom>
+          <a:noFill/>
+          <a:ln/>
+        </p:spPr>
+        <p:txBody>
+          <a:bodyPr wrap="square" lIns="0" tIns="0" rIns="0" bIns="0" rtlCol="0" anchor="ctr"/>
+          <a:lstStyle/>
+          <a:p>
+            <a:pPr algn="ctr" indent="0" marL="0">
+              <a:buNone/>
+            </a:pPr>
+            <a:r>
+              <a:rPr lang="en-US" sz="1600" b="1" dirty="0">
+                <a:solidFill>
+                  <a:srgbClr val="0D9488"/>
+                </a:solidFill>
+                <a:latin typeface="Trebuchet MS" pitchFamily="34" charset="0"/>
+                <a:ea typeface="Trebuchet MS" pitchFamily="34" charset="-122"/>
+                <a:cs typeface="Trebuchet MS" pitchFamily="34" charset="-120"/>
+              </a:rPr>
+              <a:t>·</a:t>
+            </a:r>
+            <a:endParaRPr lang="en-US" sz="1600" dirty="0"/>
+          </a:p>
+        </p:txBody>
+      </p:sp>
+      <p:sp>
+        <p:nvSpPr>
+          <p:cNvPr id="31" name="Shape 29"/>
+          <p:cNvSpPr/>
+          <p:nvPr/>
+        </p:nvSpPr>
+        <p:spPr>
+          <a:xfrm>
+            <a:off x="6428232" y="3364992"/>
+            <a:ext cx="1645920" cy="475488"/>
+          </a:xfrm>
+          <a:prstGeom prst="rect">
+            <a:avLst>
+              <a:gd name="adj" fmla="val 9615"/>
+            </a:avLst>
+          </a:prstGeom>
+          <a:solidFill>
+            <a:srgbClr val="FFFFFF"/>
+          </a:solidFill>
+          <a:ln w="12700">
+            <a:solidFill>
+              <a:srgbClr val="0D9488"/>
+            </a:solidFill>
+            <a:prstDash val="solid"/>
+          </a:ln>
+        </p:spPr>
+      </p:sp>
+      <p:sp>
+        <p:nvSpPr>
+          <p:cNvPr id="32" name="Text 30"/>
+          <p:cNvSpPr/>
+          <p:nvPr/>
+        </p:nvSpPr>
+        <p:spPr>
+          <a:xfrm>
+            <a:off x="6428232" y="3364992"/>
+            <a:ext cx="1645920" cy="475488"/>
+          </a:xfrm>
+          <a:prstGeom prst="rect">
+            <a:avLst/>
+          </a:prstGeom>
+          <a:noFill/>
+          <a:ln/>
+        </p:spPr>
+        <p:txBody>
+          <a:bodyPr wrap="square" lIns="0" tIns="0" rIns="0" bIns="0" rtlCol="0" anchor="ctr"/>
+          <a:lstStyle/>
+          <a:p>
+            <a:pPr algn="ctr" indent="0" marL="0">
+              <a:buNone/>
+            </a:pPr>
+            <a:r>
+              <a:rPr lang="en-US" sz="1400" b="1" dirty="0">
+                <a:solidFill>
+                  <a:srgbClr val="0D9488"/>
+                </a:solidFill>
+                <a:latin typeface="Trebuchet MS" pitchFamily="34" charset="0"/>
+                <a:ea typeface="Trebuchet MS" pitchFamily="34" charset="-122"/>
+                <a:cs typeface="Trebuchet MS" pitchFamily="34" charset="-120"/>
+              </a:rPr>
               <a:t>way</a:t>
             </a:r>
             <a:endParaRPr lang="en-US" sz="1400" dirty="0"/>
@@ -25027,7 +24856,7 @@
       </p:sp>
       <p:sp>
         <p:nvSpPr>
-          <p:cNvPr id="30" name="Shape 28"/>
+          <p:cNvPr id="33" name="Shape 31"/>
           <p:cNvSpPr/>
           <p:nvPr/>
         </p:nvSpPr>
@@ -25054,7 +24883,7 @@
       </p:sp>
       <p:sp>
         <p:nvSpPr>
-          <p:cNvPr id="31" name="Text 29"/>
+          <p:cNvPr id="34" name="Text 32"/>
           <p:cNvSpPr/>
           <p:nvPr/>
         </p:nvSpPr>
@@ -25093,7 +24922,7 @@
       </p:sp>
       <p:sp>
         <p:nvSpPr>
-          <p:cNvPr id="32" name="Shape 30"/>
+          <p:cNvPr id="35" name="Shape 33"/>
           <p:cNvSpPr/>
           <p:nvPr/>
         </p:nvSpPr>
@@ -25120,7 +24949,7 @@
       </p:sp>
       <p:sp>
         <p:nvSpPr>
-          <p:cNvPr id="33" name="Text 31"/>
+          <p:cNvPr id="36" name="Text 34"/>
           <p:cNvSpPr/>
           <p:nvPr/>
         </p:nvSpPr>
@@ -25443,7 +25272,7 @@
                 <a:ea typeface="Calibri" pitchFamily="34" charset="-122"/>
                 <a:cs typeface="Calibri" pitchFamily="34" charset="-120"/>
               </a:rPr>
-              <a:t>Word Labs  •  wordlabs.app  •  Root: 'way' = path, road, or direction</a:t>
+              <a:t>Word Labs  •  wordlabs.app  •  Root: 'way' = a path, direction or method</a:t>
             </a:r>
             <a:endParaRPr lang="en-US" sz="800" dirty="0"/>
           </a:p>
@@ -25582,7 +25411,7 @@
                 <a:ea typeface="Trebuchet MS" pitchFamily="34" charset="-122"/>
                 <a:cs typeface="Trebuchet MS" pitchFamily="34" charset="-120"/>
               </a:rPr>
-              <a:t>doorway</a:t>
+              <a:t>underway</a:t>
             </a:r>
             <a:endParaRPr lang="en-US" sz="2800" dirty="0"/>
           </a:p>
@@ -25721,7 +25550,7 @@
                 <a:ea typeface="Trebuchet MS" pitchFamily="34" charset="-122"/>
                 <a:cs typeface="Trebuchet MS" pitchFamily="34" charset="-120"/>
               </a:rPr>
-              <a:t>door</a:t>
+              <a:t>under</a:t>
             </a:r>
             <a:endParaRPr lang="en-US" sz="1300" dirty="0"/>
           </a:p>
@@ -25760,7 +25589,7 @@
                 <a:ea typeface="Calibri" pitchFamily="34" charset="-122"/>
                 <a:cs typeface="Calibri" pitchFamily="34" charset="-120"/>
               </a:rPr>
-              <a:t>an entrance or opening</a:t>
+              <a:t>below</a:t>
             </a:r>
             <a:endParaRPr lang="en-US" sz="850" dirty="0"/>
           </a:p>
@@ -25872,7 +25701,7 @@
                 <a:ea typeface="Calibri" pitchFamily="34" charset="-122"/>
                 <a:cs typeface="Calibri" pitchFamily="34" charset="-120"/>
               </a:rPr>
-              <a:t>path or route</a:t>
+              <a:t>a path, direction or method</a:t>
             </a:r>
             <a:endParaRPr lang="en-US" sz="850" dirty="0"/>
           </a:p>
@@ -25979,7 +25808,7 @@
         </p:nvSpPr>
         <p:spPr>
           <a:xfrm>
-            <a:off x="2999232" y="3364992"/>
+            <a:off x="2313432" y="3364992"/>
             <a:ext cx="1645920" cy="475488"/>
           </a:xfrm>
           <a:prstGeom prst="rect">
@@ -26006,7 +25835,7 @@
         </p:nvSpPr>
         <p:spPr>
           <a:xfrm>
-            <a:off x="2999232" y="3364992"/>
+            <a:off x="2313432" y="3364992"/>
             <a:ext cx="1645920" cy="475488"/>
           </a:xfrm>
           <a:prstGeom prst="rect">
@@ -26031,7 +25860,7 @@
                 <a:ea typeface="Trebuchet MS" pitchFamily="34" charset="-122"/>
                 <a:cs typeface="Trebuchet MS" pitchFamily="34" charset="-120"/>
               </a:rPr>
-              <a:t>door</a:t>
+              <a:t>un</a:t>
             </a:r>
             <a:endParaRPr lang="en-US" sz="1400" dirty="0"/>
           </a:p>
@@ -26045,8 +25874,8 @@
         </p:nvSpPr>
         <p:spPr>
           <a:xfrm>
-            <a:off x="4645152" y="3364992"/>
-            <a:ext cx="1097280" cy="475488"/>
+            <a:off x="3959352" y="3364992"/>
+            <a:ext cx="411480" cy="475488"/>
           </a:xfrm>
           <a:prstGeom prst="rect">
             <a:avLst/>
@@ -26084,7 +25913,7 @@
         </p:nvSpPr>
         <p:spPr>
           <a:xfrm>
-            <a:off x="5742432" y="3364992"/>
+            <a:off x="4370832" y="3364992"/>
             <a:ext cx="1645920" cy="475488"/>
           </a:xfrm>
           <a:prstGeom prst="rect">
@@ -26111,7 +25940,7 @@
         </p:nvSpPr>
         <p:spPr>
           <a:xfrm>
-            <a:off x="5742432" y="3364992"/>
+            <a:off x="4370832" y="3364992"/>
             <a:ext cx="1645920" cy="475488"/>
           </a:xfrm>
           <a:prstGeom prst="rect">
@@ -26136,6 +25965,111 @@
                 <a:ea typeface="Trebuchet MS" pitchFamily="34" charset="-122"/>
                 <a:cs typeface="Trebuchet MS" pitchFamily="34" charset="-120"/>
               </a:rPr>
+              <a:t>der</a:t>
+            </a:r>
+            <a:endParaRPr lang="en-US" sz="1400" dirty="0"/>
+          </a:p>
+        </p:txBody>
+      </p:sp>
+      <p:sp>
+        <p:nvSpPr>
+          <p:cNvPr id="30" name="Text 28"/>
+          <p:cNvSpPr/>
+          <p:nvPr/>
+        </p:nvSpPr>
+        <p:spPr>
+          <a:xfrm>
+            <a:off x="6016752" y="3364992"/>
+            <a:ext cx="411480" cy="475488"/>
+          </a:xfrm>
+          <a:prstGeom prst="rect">
+            <a:avLst/>
+          </a:prstGeom>
+          <a:noFill/>
+          <a:ln/>
+        </p:spPr>
+        <p:txBody>
+          <a:bodyPr wrap="square" lIns="0" tIns="0" rIns="0" bIns="0" rtlCol="0" anchor="ctr"/>
+          <a:lstStyle/>
+          <a:p>
+            <a:pPr algn="ctr" indent="0" marL="0">
+              <a:buNone/>
+            </a:pPr>
+            <a:r>
+              <a:rPr lang="en-US" sz="1600" b="1" dirty="0">
+                <a:solidFill>
+                  <a:srgbClr val="0D9488"/>
+                </a:solidFill>
+                <a:latin typeface="Trebuchet MS" pitchFamily="34" charset="0"/>
+                <a:ea typeface="Trebuchet MS" pitchFamily="34" charset="-122"/>
+                <a:cs typeface="Trebuchet MS" pitchFamily="34" charset="-120"/>
+              </a:rPr>
+              <a:t>·</a:t>
+            </a:r>
+            <a:endParaRPr lang="en-US" sz="1600" dirty="0"/>
+          </a:p>
+        </p:txBody>
+      </p:sp>
+      <p:sp>
+        <p:nvSpPr>
+          <p:cNvPr id="31" name="Shape 29"/>
+          <p:cNvSpPr/>
+          <p:nvPr/>
+        </p:nvSpPr>
+        <p:spPr>
+          <a:xfrm>
+            <a:off x="6428232" y="3364992"/>
+            <a:ext cx="1645920" cy="475488"/>
+          </a:xfrm>
+          <a:prstGeom prst="rect">
+            <a:avLst>
+              <a:gd name="adj" fmla="val 9615"/>
+            </a:avLst>
+          </a:prstGeom>
+          <a:solidFill>
+            <a:srgbClr val="FFFFFF"/>
+          </a:solidFill>
+          <a:ln w="12700">
+            <a:solidFill>
+              <a:srgbClr val="0D9488"/>
+            </a:solidFill>
+            <a:prstDash val="solid"/>
+          </a:ln>
+        </p:spPr>
+      </p:sp>
+      <p:sp>
+        <p:nvSpPr>
+          <p:cNvPr id="32" name="Text 30"/>
+          <p:cNvSpPr/>
+          <p:nvPr/>
+        </p:nvSpPr>
+        <p:spPr>
+          <a:xfrm>
+            <a:off x="6428232" y="3364992"/>
+            <a:ext cx="1645920" cy="475488"/>
+          </a:xfrm>
+          <a:prstGeom prst="rect">
+            <a:avLst/>
+          </a:prstGeom>
+          <a:noFill/>
+          <a:ln/>
+        </p:spPr>
+        <p:txBody>
+          <a:bodyPr wrap="square" lIns="0" tIns="0" rIns="0" bIns="0" rtlCol="0" anchor="ctr"/>
+          <a:lstStyle/>
+          <a:p>
+            <a:pPr algn="ctr" indent="0" marL="0">
+              <a:buNone/>
+            </a:pPr>
+            <a:r>
+              <a:rPr lang="en-US" sz="1400" b="1" dirty="0">
+                <a:solidFill>
+                  <a:srgbClr val="0D9488"/>
+                </a:solidFill>
+                <a:latin typeface="Trebuchet MS" pitchFamily="34" charset="0"/>
+                <a:ea typeface="Trebuchet MS" pitchFamily="34" charset="-122"/>
+                <a:cs typeface="Trebuchet MS" pitchFamily="34" charset="-120"/>
+              </a:rPr>
               <a:t>way</a:t>
             </a:r>
             <a:endParaRPr lang="en-US" sz="1400" dirty="0"/>
@@ -26144,7 +26078,7 @@
       </p:sp>
       <p:sp>
         <p:nvSpPr>
-          <p:cNvPr id="30" name="Shape 28"/>
+          <p:cNvPr id="33" name="Shape 31"/>
           <p:cNvSpPr/>
           <p:nvPr/>
         </p:nvSpPr>
@@ -26171,7 +26105,7 @@
       </p:sp>
       <p:sp>
         <p:nvSpPr>
-          <p:cNvPr id="31" name="Text 29"/>
+          <p:cNvPr id="34" name="Text 32"/>
           <p:cNvSpPr/>
           <p:nvPr/>
         </p:nvSpPr>
@@ -26210,7 +26144,7 @@
       </p:sp>
       <p:sp>
         <p:nvSpPr>
-          <p:cNvPr id="32" name="Shape 30"/>
+          <p:cNvPr id="35" name="Shape 33"/>
           <p:cNvSpPr/>
           <p:nvPr/>
         </p:nvSpPr>
@@ -26237,13 +26171,13 @@
       </p:sp>
       <p:sp>
         <p:nvSpPr>
-          <p:cNvPr id="33" name="Shape 31"/>
-          <p:cNvSpPr/>
-          <p:nvPr/>
-        </p:nvSpPr>
-        <p:spPr>
-          <a:xfrm>
-            <a:off x="2427732" y="4169664"/>
+          <p:cNvPr id="36" name="Shape 34"/>
+          <p:cNvSpPr/>
+          <p:nvPr/>
+        </p:nvSpPr>
+        <p:spPr>
+          <a:xfrm>
+            <a:off x="2254649" y="4169664"/>
             <a:ext cx="685800" cy="475488"/>
           </a:xfrm>
           <a:prstGeom prst="rect">
@@ -26264,13 +26198,13 @@
       </p:sp>
       <p:sp>
         <p:nvSpPr>
-          <p:cNvPr id="34" name="Text 32"/>
-          <p:cNvSpPr/>
-          <p:nvPr/>
-        </p:nvSpPr>
-        <p:spPr>
-          <a:xfrm>
-            <a:off x="2427732" y="4169664"/>
+          <p:cNvPr id="37" name="Text 35"/>
+          <p:cNvSpPr/>
+          <p:nvPr/>
+        </p:nvSpPr>
+        <p:spPr>
+          <a:xfrm>
+            <a:off x="2254649" y="4169664"/>
             <a:ext cx="685800" cy="475488"/>
           </a:xfrm>
           <a:prstGeom prst="rect">
@@ -26295,7 +26229,7 @@
                 <a:ea typeface="Trebuchet MS" pitchFamily="34" charset="-122"/>
                 <a:cs typeface="Trebuchet MS" pitchFamily="34" charset="-120"/>
               </a:rPr>
-              <a:t>d</a:t>
+              <a:t>u</a:t>
             </a:r>
             <a:endParaRPr lang="en-US" sz="900" dirty="0"/>
           </a:p>
@@ -26303,13 +26237,13 @@
       </p:sp>
       <p:sp>
         <p:nvSpPr>
-          <p:cNvPr id="35" name="Shape 33"/>
-          <p:cNvSpPr/>
-          <p:nvPr/>
-        </p:nvSpPr>
-        <p:spPr>
-          <a:xfrm>
-            <a:off x="3639312" y="4169664"/>
+          <p:cNvPr id="38" name="Shape 36"/>
+          <p:cNvSpPr/>
+          <p:nvPr/>
+        </p:nvSpPr>
+        <p:spPr>
+          <a:xfrm>
+            <a:off x="3293146" y="4169664"/>
             <a:ext cx="685800" cy="475488"/>
           </a:xfrm>
           <a:prstGeom prst="rect">
@@ -26330,13 +26264,13 @@
       </p:sp>
       <p:sp>
         <p:nvSpPr>
-          <p:cNvPr id="36" name="Text 34"/>
-          <p:cNvSpPr/>
-          <p:nvPr/>
-        </p:nvSpPr>
-        <p:spPr>
-          <a:xfrm>
-            <a:off x="3639312" y="4169664"/>
+          <p:cNvPr id="39" name="Text 37"/>
+          <p:cNvSpPr/>
+          <p:nvPr/>
+        </p:nvSpPr>
+        <p:spPr>
+          <a:xfrm>
+            <a:off x="3293146" y="4169664"/>
             <a:ext cx="685800" cy="475488"/>
           </a:xfrm>
           <a:prstGeom prst="rect">
@@ -26361,7 +26295,7 @@
                 <a:ea typeface="Trebuchet MS" pitchFamily="34" charset="-122"/>
                 <a:cs typeface="Trebuchet MS" pitchFamily="34" charset="-120"/>
               </a:rPr>
-              <a:t>oo</a:t>
+              <a:t>n</a:t>
             </a:r>
             <a:endParaRPr lang="en-US" sz="900" dirty="0"/>
           </a:p>
@@ -26369,13 +26303,13 @@
       </p:sp>
       <p:sp>
         <p:nvSpPr>
-          <p:cNvPr id="37" name="Shape 35"/>
-          <p:cNvSpPr/>
-          <p:nvPr/>
-        </p:nvSpPr>
-        <p:spPr>
-          <a:xfrm>
-            <a:off x="4850892" y="4169664"/>
+          <p:cNvPr id="40" name="Shape 38"/>
+          <p:cNvSpPr/>
+          <p:nvPr/>
+        </p:nvSpPr>
+        <p:spPr>
+          <a:xfrm>
+            <a:off x="4331643" y="4169664"/>
             <a:ext cx="685800" cy="475488"/>
           </a:xfrm>
           <a:prstGeom prst="rect">
@@ -26396,13 +26330,13 @@
       </p:sp>
       <p:sp>
         <p:nvSpPr>
-          <p:cNvPr id="38" name="Text 36"/>
-          <p:cNvSpPr/>
-          <p:nvPr/>
-        </p:nvSpPr>
-        <p:spPr>
-          <a:xfrm>
-            <a:off x="4850892" y="4169664"/>
+          <p:cNvPr id="41" name="Text 39"/>
+          <p:cNvSpPr/>
+          <p:nvPr/>
+        </p:nvSpPr>
+        <p:spPr>
+          <a:xfrm>
+            <a:off x="4331643" y="4169664"/>
             <a:ext cx="685800" cy="475488"/>
           </a:xfrm>
           <a:prstGeom prst="rect">
@@ -26427,7 +26361,7 @@
                 <a:ea typeface="Trebuchet MS" pitchFamily="34" charset="-122"/>
                 <a:cs typeface="Trebuchet MS" pitchFamily="34" charset="-120"/>
               </a:rPr>
-              <a:t>r</a:t>
+              <a:t>d</a:t>
             </a:r>
             <a:endParaRPr lang="en-US" sz="900" dirty="0"/>
           </a:p>
@@ -26435,13 +26369,13 @@
       </p:sp>
       <p:sp>
         <p:nvSpPr>
-          <p:cNvPr id="39" name="Shape 37"/>
-          <p:cNvSpPr/>
-          <p:nvPr/>
-        </p:nvSpPr>
-        <p:spPr>
-          <a:xfrm>
-            <a:off x="6062472" y="4169664"/>
+          <p:cNvPr id="42" name="Shape 40"/>
+          <p:cNvSpPr/>
+          <p:nvPr/>
+        </p:nvSpPr>
+        <p:spPr>
+          <a:xfrm>
+            <a:off x="5370141" y="4169664"/>
             <a:ext cx="685800" cy="475488"/>
           </a:xfrm>
           <a:prstGeom prst="rect">
@@ -26462,13 +26396,13 @@
       </p:sp>
       <p:sp>
         <p:nvSpPr>
-          <p:cNvPr id="40" name="Text 38"/>
-          <p:cNvSpPr/>
-          <p:nvPr/>
-        </p:nvSpPr>
-        <p:spPr>
-          <a:xfrm>
-            <a:off x="6062472" y="4169664"/>
+          <p:cNvPr id="43" name="Text 41"/>
+          <p:cNvSpPr/>
+          <p:nvPr/>
+        </p:nvSpPr>
+        <p:spPr>
+          <a:xfrm>
+            <a:off x="5370141" y="4169664"/>
             <a:ext cx="685800" cy="475488"/>
           </a:xfrm>
           <a:prstGeom prst="rect">
@@ -26493,7 +26427,7 @@
                 <a:ea typeface="Trebuchet MS" pitchFamily="34" charset="-122"/>
                 <a:cs typeface="Trebuchet MS" pitchFamily="34" charset="-120"/>
               </a:rPr>
-              <a:t>w</a:t>
+              <a:t>er</a:t>
             </a:r>
             <a:endParaRPr lang="en-US" sz="900" dirty="0"/>
           </a:p>
@@ -26501,13 +26435,13 @@
       </p:sp>
       <p:sp>
         <p:nvSpPr>
-          <p:cNvPr id="41" name="Shape 39"/>
-          <p:cNvSpPr/>
-          <p:nvPr/>
-        </p:nvSpPr>
-        <p:spPr>
-          <a:xfrm>
-            <a:off x="7274052" y="4169664"/>
+          <p:cNvPr id="44" name="Shape 42"/>
+          <p:cNvSpPr/>
+          <p:nvPr/>
+        </p:nvSpPr>
+        <p:spPr>
+          <a:xfrm>
+            <a:off x="6408638" y="4169664"/>
             <a:ext cx="685800" cy="475488"/>
           </a:xfrm>
           <a:prstGeom prst="rect">
@@ -26528,13 +26462,79 @@
       </p:sp>
       <p:sp>
         <p:nvSpPr>
-          <p:cNvPr id="42" name="Text 40"/>
-          <p:cNvSpPr/>
-          <p:nvPr/>
-        </p:nvSpPr>
-        <p:spPr>
-          <a:xfrm>
-            <a:off x="7274052" y="4169664"/>
+          <p:cNvPr id="45" name="Text 43"/>
+          <p:cNvSpPr/>
+          <p:nvPr/>
+        </p:nvSpPr>
+        <p:spPr>
+          <a:xfrm>
+            <a:off x="6408638" y="4169664"/>
+            <a:ext cx="685800" cy="475488"/>
+          </a:xfrm>
+          <a:prstGeom prst="rect">
+            <a:avLst/>
+          </a:prstGeom>
+          <a:noFill/>
+          <a:ln/>
+        </p:spPr>
+        <p:txBody>
+          <a:bodyPr wrap="square" lIns="0" tIns="0" rIns="0" bIns="0" rtlCol="0" anchor="ctr"/>
+          <a:lstStyle/>
+          <a:p>
+            <a:pPr algn="ctr" indent="0" marL="0">
+              <a:buNone/>
+            </a:pPr>
+            <a:r>
+              <a:rPr lang="en-US" sz="900" b="1" dirty="0">
+                <a:solidFill>
+                  <a:srgbClr val="9D174D"/>
+                </a:solidFill>
+                <a:latin typeface="Trebuchet MS" pitchFamily="34" charset="0"/>
+                <a:ea typeface="Trebuchet MS" pitchFamily="34" charset="-122"/>
+                <a:cs typeface="Trebuchet MS" pitchFamily="34" charset="-120"/>
+              </a:rPr>
+              <a:t>w</a:t>
+            </a:r>
+            <a:endParaRPr lang="en-US" sz="900" dirty="0"/>
+          </a:p>
+        </p:txBody>
+      </p:sp>
+      <p:sp>
+        <p:nvSpPr>
+          <p:cNvPr id="46" name="Shape 44"/>
+          <p:cNvSpPr/>
+          <p:nvPr/>
+        </p:nvSpPr>
+        <p:spPr>
+          <a:xfrm>
+            <a:off x="7447135" y="4169664"/>
+            <a:ext cx="685800" cy="475488"/>
+          </a:xfrm>
+          <a:prstGeom prst="rect">
+            <a:avLst>
+              <a:gd name="adj" fmla="val 7692"/>
+            </a:avLst>
+          </a:prstGeom>
+          <a:solidFill>
+            <a:srgbClr val="FFFFFF"/>
+          </a:solidFill>
+          <a:ln w="12700">
+            <a:solidFill>
+              <a:srgbClr val="DB2777"/>
+            </a:solidFill>
+            <a:prstDash val="solid"/>
+          </a:ln>
+        </p:spPr>
+      </p:sp>
+      <p:sp>
+        <p:nvSpPr>
+          <p:cNvPr id="47" name="Text 45"/>
+          <p:cNvSpPr/>
+          <p:nvPr/>
+        </p:nvSpPr>
+        <p:spPr>
+          <a:xfrm>
+            <a:off x="7447135" y="4169664"/>
             <a:ext cx="685800" cy="475488"/>
           </a:xfrm>
           <a:prstGeom prst="rect">
@@ -26851,7 +26851,7 @@
                 <a:ea typeface="Calibri" pitchFamily="34" charset="-122"/>
                 <a:cs typeface="Calibri" pitchFamily="34" charset="-120"/>
               </a:rPr>
-              <a:t>Word Labs  •  wordlabs.app  •  Root: 'way' = path, road, or direction</a:t>
+              <a:t>Word Labs  •  wordlabs.app  •  Root: 'way' = a path, direction or method</a:t>
             </a:r>
             <a:endParaRPr lang="en-US" sz="800" dirty="0"/>
           </a:p>
@@ -26990,7 +26990,7 @@
                 <a:ea typeface="Trebuchet MS" pitchFamily="34" charset="-122"/>
                 <a:cs typeface="Trebuchet MS" pitchFamily="34" charset="-120"/>
               </a:rPr>
-              <a:t>freeway</a:t>
+              <a:t>away</a:t>
             </a:r>
             <a:endParaRPr lang="en-US" sz="2800" dirty="0"/>
           </a:p>
@@ -27678,7 +27678,7 @@
                 <a:ea typeface="Calibri" pitchFamily="34" charset="-122"/>
                 <a:cs typeface="Calibri" pitchFamily="34" charset="-120"/>
               </a:rPr>
-              <a:t>Word Labs  •  wordlabs.app  •  Root: 'way' = path, road, or direction</a:t>
+              <a:t>Word Labs  •  wordlabs.app  •  Root: 'way' = a path, direction or method</a:t>
             </a:r>
             <a:endParaRPr lang="en-US" sz="800" dirty="0"/>
           </a:p>
@@ -27817,7 +27817,7 @@
                 <a:ea typeface="Trebuchet MS" pitchFamily="34" charset="-122"/>
                 <a:cs typeface="Trebuchet MS" pitchFamily="34" charset="-120"/>
               </a:rPr>
-              <a:t>freeway</a:t>
+              <a:t>away</a:t>
             </a:r>
             <a:endParaRPr lang="en-US" sz="2800" dirty="0"/>
           </a:p>
@@ -27956,7 +27956,7 @@
                 <a:ea typeface="Trebuchet MS" pitchFamily="34" charset="-122"/>
                 <a:cs typeface="Trebuchet MS" pitchFamily="34" charset="-120"/>
               </a:rPr>
-              <a:t>free</a:t>
+              <a:t>a</a:t>
             </a:r>
             <a:endParaRPr lang="en-US" sz="1300" dirty="0"/>
           </a:p>
@@ -27995,7 +27995,7 @@
                 <a:ea typeface="Calibri" pitchFamily="34" charset="-122"/>
                 <a:cs typeface="Calibri" pitchFamily="34" charset="-120"/>
               </a:rPr>
-              <a:t>open and without stopping</a:t>
+              <a:t>not; without</a:t>
             </a:r>
             <a:endParaRPr lang="en-US" sz="850" dirty="0"/>
           </a:p>
@@ -28107,7 +28107,7 @@
                 <a:ea typeface="Calibri" pitchFamily="34" charset="-122"/>
                 <a:cs typeface="Calibri" pitchFamily="34" charset="-120"/>
               </a:rPr>
-              <a:t>path or route</a:t>
+              <a:t>a path, direction or method</a:t>
             </a:r>
             <a:endParaRPr lang="en-US" sz="850" dirty="0"/>
           </a:p>
@@ -28663,7 +28663,7 @@
                 <a:ea typeface="Calibri" pitchFamily="34" charset="-122"/>
                 <a:cs typeface="Calibri" pitchFamily="34" charset="-120"/>
               </a:rPr>
-              <a:t>Word Labs  •  wordlabs.app  •  Root: 'way' = path, road, or direction</a:t>
+              <a:t>Word Labs  •  wordlabs.app  •  Root: 'way' = a path, direction or method</a:t>
             </a:r>
             <a:endParaRPr lang="en-US" sz="800" dirty="0"/>
           </a:p>
@@ -28802,7 +28802,7 @@
                 <a:ea typeface="Trebuchet MS" pitchFamily="34" charset="-122"/>
                 <a:cs typeface="Trebuchet MS" pitchFamily="34" charset="-120"/>
               </a:rPr>
-              <a:t>freeway</a:t>
+              <a:t>away</a:t>
             </a:r>
             <a:endParaRPr lang="en-US" sz="2800" dirty="0"/>
           </a:p>
@@ -28941,7 +28941,7 @@
                 <a:ea typeface="Trebuchet MS" pitchFamily="34" charset="-122"/>
                 <a:cs typeface="Trebuchet MS" pitchFamily="34" charset="-120"/>
               </a:rPr>
-              <a:t>free</a:t>
+              <a:t>a</a:t>
             </a:r>
             <a:endParaRPr lang="en-US" sz="1300" dirty="0"/>
           </a:p>
@@ -28980,7 +28980,7 @@
                 <a:ea typeface="Calibri" pitchFamily="34" charset="-122"/>
                 <a:cs typeface="Calibri" pitchFamily="34" charset="-120"/>
               </a:rPr>
-              <a:t>open and without stopping</a:t>
+              <a:t>not; without</a:t>
             </a:r>
             <a:endParaRPr lang="en-US" sz="850" dirty="0"/>
           </a:p>
@@ -29092,7 +29092,7 @@
                 <a:ea typeface="Calibri" pitchFamily="34" charset="-122"/>
                 <a:cs typeface="Calibri" pitchFamily="34" charset="-120"/>
               </a:rPr>
-              <a:t>path or route</a:t>
+              <a:t>a path, direction or method</a:t>
             </a:r>
             <a:endParaRPr lang="en-US" sz="850" dirty="0"/>
           </a:p>
@@ -29251,7 +29251,7 @@
                 <a:ea typeface="Trebuchet MS" pitchFamily="34" charset="-122"/>
                 <a:cs typeface="Trebuchet MS" pitchFamily="34" charset="-120"/>
               </a:rPr>
-              <a:t>free</a:t>
+              <a:t>a</a:t>
             </a:r>
             <a:endParaRPr lang="en-US" sz="1400" dirty="0"/>
           </a:p>
@@ -29780,7 +29780,7 @@
                 <a:ea typeface="Calibri" pitchFamily="34" charset="-122"/>
                 <a:cs typeface="Calibri" pitchFamily="34" charset="-120"/>
               </a:rPr>
-              <a:t>Word Labs  •  wordlabs.app  •  Root: 'way' = path, road, or direction</a:t>
+              <a:t>Word Labs  •  wordlabs.app  •  Root: 'way' = a path, direction or method</a:t>
             </a:r>
             <a:endParaRPr lang="en-US" sz="800" dirty="0"/>
           </a:p>
@@ -29919,7 +29919,7 @@
                 <a:ea typeface="Trebuchet MS" pitchFamily="34" charset="-122"/>
                 <a:cs typeface="Trebuchet MS" pitchFamily="34" charset="-120"/>
               </a:rPr>
-              <a:t>freeway</a:t>
+              <a:t>away</a:t>
             </a:r>
             <a:endParaRPr lang="en-US" sz="2800" dirty="0"/>
           </a:p>
@@ -30058,7 +30058,7 @@
                 <a:ea typeface="Trebuchet MS" pitchFamily="34" charset="-122"/>
                 <a:cs typeface="Trebuchet MS" pitchFamily="34" charset="-120"/>
               </a:rPr>
-              <a:t>free</a:t>
+              <a:t>a</a:t>
             </a:r>
             <a:endParaRPr lang="en-US" sz="1300" dirty="0"/>
           </a:p>
@@ -30097,7 +30097,7 @@
                 <a:ea typeface="Calibri" pitchFamily="34" charset="-122"/>
                 <a:cs typeface="Calibri" pitchFamily="34" charset="-120"/>
               </a:rPr>
-              <a:t>open and without stopping</a:t>
+              <a:t>not; without</a:t>
             </a:r>
             <a:endParaRPr lang="en-US" sz="850" dirty="0"/>
           </a:p>
@@ -30209,7 +30209,7 @@
                 <a:ea typeface="Calibri" pitchFamily="34" charset="-122"/>
                 <a:cs typeface="Calibri" pitchFamily="34" charset="-120"/>
               </a:rPr>
-              <a:t>path or route</a:t>
+              <a:t>a path, direction or method</a:t>
             </a:r>
             <a:endParaRPr lang="en-US" sz="850" dirty="0"/>
           </a:p>
@@ -30368,7 +30368,7 @@
                 <a:ea typeface="Trebuchet MS" pitchFamily="34" charset="-122"/>
                 <a:cs typeface="Trebuchet MS" pitchFamily="34" charset="-120"/>
               </a:rPr>
-              <a:t>free</a:t>
+              <a:t>a</a:t>
             </a:r>
             <a:endParaRPr lang="en-US" sz="1400" dirty="0"/>
           </a:p>
@@ -30580,7 +30580,7 @@
         </p:nvSpPr>
         <p:spPr>
           <a:xfrm>
-            <a:off x="2427732" y="4169664"/>
+            <a:off x="3033522" y="4169664"/>
             <a:ext cx="685800" cy="475488"/>
           </a:xfrm>
           <a:prstGeom prst="rect">
@@ -30607,7 +30607,7 @@
         </p:nvSpPr>
         <p:spPr>
           <a:xfrm>
-            <a:off x="2427732" y="4169664"/>
+            <a:off x="3033522" y="4169664"/>
             <a:ext cx="685800" cy="475488"/>
           </a:xfrm>
           <a:prstGeom prst="rect">
@@ -30624,7 +30624,7 @@
               <a:buNone/>
             </a:pPr>
             <a:r>
-              <a:rPr lang="en-US" sz="900" b="1" dirty="0">
+              <a:rPr lang="en-US" sz="1000" b="1" dirty="0">
                 <a:solidFill>
                   <a:srgbClr val="9D174D"/>
                 </a:solidFill>
@@ -30632,9 +30632,9 @@
                 <a:ea typeface="Trebuchet MS" pitchFamily="34" charset="-122"/>
                 <a:cs typeface="Trebuchet MS" pitchFamily="34" charset="-120"/>
               </a:rPr>
-              <a:t>f</a:t>
-            </a:r>
-            <a:endParaRPr lang="en-US" sz="900" dirty="0"/>
+              <a:t>a</a:t>
+            </a:r>
+            <a:endParaRPr lang="en-US" sz="1000" dirty="0"/>
           </a:p>
         </p:txBody>
       </p:sp>
@@ -30646,7 +30646,7 @@
         </p:nvSpPr>
         <p:spPr>
           <a:xfrm>
-            <a:off x="3639312" y="4169664"/>
+            <a:off x="4850892" y="4169664"/>
             <a:ext cx="685800" cy="475488"/>
           </a:xfrm>
           <a:prstGeom prst="rect">
@@ -30673,7 +30673,7 @@
         </p:nvSpPr>
         <p:spPr>
           <a:xfrm>
-            <a:off x="3639312" y="4169664"/>
+            <a:off x="4850892" y="4169664"/>
             <a:ext cx="685800" cy="475488"/>
           </a:xfrm>
           <a:prstGeom prst="rect">
@@ -30690,7 +30690,7 @@
               <a:buNone/>
             </a:pPr>
             <a:r>
-              <a:rPr lang="en-US" sz="900" b="1" dirty="0">
+              <a:rPr lang="en-US" sz="1000" b="1" dirty="0">
                 <a:solidFill>
                   <a:srgbClr val="9D174D"/>
                 </a:solidFill>
@@ -30698,9 +30698,9 @@
                 <a:ea typeface="Trebuchet MS" pitchFamily="34" charset="-122"/>
                 <a:cs typeface="Trebuchet MS" pitchFamily="34" charset="-120"/>
               </a:rPr>
-              <a:t>r</a:t>
-            </a:r>
-            <a:endParaRPr lang="en-US" sz="900" dirty="0"/>
+              <a:t>w</a:t>
+            </a:r>
+            <a:endParaRPr lang="en-US" sz="1000" dirty="0"/>
           </a:p>
         </p:txBody>
       </p:sp>
@@ -30712,7 +30712,7 @@
         </p:nvSpPr>
         <p:spPr>
           <a:xfrm>
-            <a:off x="4850892" y="4169664"/>
+            <a:off x="6668262" y="4169664"/>
             <a:ext cx="685800" cy="475488"/>
           </a:xfrm>
           <a:prstGeom prst="rect">
@@ -30739,7 +30739,7 @@
         </p:nvSpPr>
         <p:spPr>
           <a:xfrm>
-            <a:off x="4850892" y="4169664"/>
+            <a:off x="6668262" y="4169664"/>
             <a:ext cx="685800" cy="475488"/>
           </a:xfrm>
           <a:prstGeom prst="rect">
@@ -30756,7 +30756,7 @@
               <a:buNone/>
             </a:pPr>
             <a:r>
-              <a:rPr lang="en-US" sz="900" b="1" dirty="0">
+              <a:rPr lang="en-US" sz="1000" b="1" dirty="0">
                 <a:solidFill>
                   <a:srgbClr val="9D174D"/>
                 </a:solidFill>
@@ -30764,141 +30764,9 @@
                 <a:ea typeface="Trebuchet MS" pitchFamily="34" charset="-122"/>
                 <a:cs typeface="Trebuchet MS" pitchFamily="34" charset="-120"/>
               </a:rPr>
-              <a:t>ee</a:t>
-            </a:r>
-            <a:endParaRPr lang="en-US" sz="900" dirty="0"/>
-          </a:p>
-        </p:txBody>
-      </p:sp>
-      <p:sp>
-        <p:nvSpPr>
-          <p:cNvPr id="39" name="Shape 37"/>
-          <p:cNvSpPr/>
-          <p:nvPr/>
-        </p:nvSpPr>
-        <p:spPr>
-          <a:xfrm>
-            <a:off x="6062472" y="4169664"/>
-            <a:ext cx="685800" cy="475488"/>
-          </a:xfrm>
-          <a:prstGeom prst="rect">
-            <a:avLst>
-              <a:gd name="adj" fmla="val 7692"/>
-            </a:avLst>
-          </a:prstGeom>
-          <a:solidFill>
-            <a:srgbClr val="FFFFFF"/>
-          </a:solidFill>
-          <a:ln w="12700">
-            <a:solidFill>
-              <a:srgbClr val="DB2777"/>
-            </a:solidFill>
-            <a:prstDash val="solid"/>
-          </a:ln>
-        </p:spPr>
-      </p:sp>
-      <p:sp>
-        <p:nvSpPr>
-          <p:cNvPr id="40" name="Text 38"/>
-          <p:cNvSpPr/>
-          <p:nvPr/>
-        </p:nvSpPr>
-        <p:spPr>
-          <a:xfrm>
-            <a:off x="6062472" y="4169664"/>
-            <a:ext cx="685800" cy="475488"/>
-          </a:xfrm>
-          <a:prstGeom prst="rect">
-            <a:avLst/>
-          </a:prstGeom>
-          <a:noFill/>
-          <a:ln/>
-        </p:spPr>
-        <p:txBody>
-          <a:bodyPr wrap="square" lIns="0" tIns="0" rIns="0" bIns="0" rtlCol="0" anchor="ctr"/>
-          <a:lstStyle/>
-          <a:p>
-            <a:pPr algn="ctr" indent="0" marL="0">
-              <a:buNone/>
-            </a:pPr>
-            <a:r>
-              <a:rPr lang="en-US" sz="900" b="1" dirty="0">
-                <a:solidFill>
-                  <a:srgbClr val="9D174D"/>
-                </a:solidFill>
-                <a:latin typeface="Trebuchet MS" pitchFamily="34" charset="0"/>
-                <a:ea typeface="Trebuchet MS" pitchFamily="34" charset="-122"/>
-                <a:cs typeface="Trebuchet MS" pitchFamily="34" charset="-120"/>
-              </a:rPr>
-              <a:t>w</a:t>
-            </a:r>
-            <a:endParaRPr lang="en-US" sz="900" dirty="0"/>
-          </a:p>
-        </p:txBody>
-      </p:sp>
-      <p:sp>
-        <p:nvSpPr>
-          <p:cNvPr id="41" name="Shape 39"/>
-          <p:cNvSpPr/>
-          <p:nvPr/>
-        </p:nvSpPr>
-        <p:spPr>
-          <a:xfrm>
-            <a:off x="7274052" y="4169664"/>
-            <a:ext cx="685800" cy="475488"/>
-          </a:xfrm>
-          <a:prstGeom prst="rect">
-            <a:avLst>
-              <a:gd name="adj" fmla="val 7692"/>
-            </a:avLst>
-          </a:prstGeom>
-          <a:solidFill>
-            <a:srgbClr val="FFFFFF"/>
-          </a:solidFill>
-          <a:ln w="12700">
-            <a:solidFill>
-              <a:srgbClr val="DB2777"/>
-            </a:solidFill>
-            <a:prstDash val="solid"/>
-          </a:ln>
-        </p:spPr>
-      </p:sp>
-      <p:sp>
-        <p:nvSpPr>
-          <p:cNvPr id="42" name="Text 40"/>
-          <p:cNvSpPr/>
-          <p:nvPr/>
-        </p:nvSpPr>
-        <p:spPr>
-          <a:xfrm>
-            <a:off x="7274052" y="4169664"/>
-            <a:ext cx="685800" cy="475488"/>
-          </a:xfrm>
-          <a:prstGeom prst="rect">
-            <a:avLst/>
-          </a:prstGeom>
-          <a:noFill/>
-          <a:ln/>
-        </p:spPr>
-        <p:txBody>
-          <a:bodyPr wrap="square" lIns="0" tIns="0" rIns="0" bIns="0" rtlCol="0" anchor="ctr"/>
-          <a:lstStyle/>
-          <a:p>
-            <a:pPr algn="ctr" indent="0" marL="0">
-              <a:buNone/>
-            </a:pPr>
-            <a:r>
-              <a:rPr lang="en-US" sz="900" b="1" dirty="0">
-                <a:solidFill>
-                  <a:srgbClr val="9D174D"/>
-                </a:solidFill>
-                <a:latin typeface="Trebuchet MS" pitchFamily="34" charset="0"/>
-                <a:ea typeface="Trebuchet MS" pitchFamily="34" charset="-122"/>
-                <a:cs typeface="Trebuchet MS" pitchFamily="34" charset="-120"/>
-              </a:rPr>
               <a:t>ay</a:t>
             </a:r>
-            <a:endParaRPr lang="en-US" sz="900" dirty="0"/>
+            <a:endParaRPr lang="en-US" sz="1000" dirty="0"/>
           </a:p>
         </p:txBody>
       </p:sp>
@@ -31188,7 +31056,7 @@
                 <a:ea typeface="Calibri" pitchFamily="34" charset="-122"/>
                 <a:cs typeface="Calibri" pitchFamily="34" charset="-120"/>
               </a:rPr>
-              <a:t>Word Labs  •  wordlabs.app  •  Root: 'way' = path, road, or direction</a:t>
+              <a:t>Word Labs  •  wordlabs.app  •  Root: 'way' = a path, direction or method</a:t>
             </a:r>
             <a:endParaRPr lang="en-US" sz="800" dirty="0"/>
           </a:p>
@@ -32357,7 +32225,7 @@
                 <a:ea typeface="Calibri" pitchFamily="34" charset="-122"/>
                 <a:cs typeface="Calibri" pitchFamily="34" charset="-120"/>
               </a:rPr>
-              <a:t>Word Labs  •  wordlabs.app  •  Root: 'way' = path, road, or direction</a:t>
+              <a:t>Word Labs  •  wordlabs.app  •  Root: 'way' = a path, direction or method</a:t>
             </a:r>
             <a:endParaRPr lang="en-US" sz="800" dirty="0"/>
           </a:p>
@@ -32658,7 +32526,7 @@
                 <a:ea typeface="Trebuchet MS" pitchFamily="34" charset="-122"/>
                 <a:cs typeface="Trebuchet MS" pitchFamily="34" charset="-120"/>
               </a:rPr>
-              <a:t>gate-</a:t>
+              <a:t>a-</a:t>
             </a:r>
             <a:endParaRPr lang="en-US" sz="1300" dirty="0"/>
           </a:p>
@@ -32786,7 +32654,7 @@
                 <a:ea typeface="Trebuchet MS" pitchFamily="34" charset="-122"/>
                 <a:cs typeface="Trebuchet MS" pitchFamily="34" charset="-120"/>
               </a:rPr>
-              <a:t>--s</a:t>
+              <a:t>-s</a:t>
             </a:r>
             <a:endParaRPr lang="en-US" sz="1300" dirty="0"/>
           </a:p>
@@ -32850,7 +32718,7 @@
                 <a:ea typeface="Trebuchet MS" pitchFamily="34" charset="-122"/>
                 <a:cs typeface="Trebuchet MS" pitchFamily="34" charset="-120"/>
               </a:rPr>
-              <a:t>door-</a:t>
+              <a:t>mid-</a:t>
             </a:r>
             <a:endParaRPr lang="en-US" sz="1300" dirty="0"/>
           </a:p>
@@ -32896,7 +32764,7 @@
             <a:avLst/>
           </a:prstGeom>
           <a:solidFill>
-            <a:srgbClr val="FCE7F3"/>
+            <a:srgbClr val="F1F5F9"/>
           </a:solidFill>
           <a:ln w="12700">
             <a:solidFill>
@@ -32908,14 +32776,39 @@
       </p:sp>
       <p:sp>
         <p:nvSpPr>
-          <p:cNvPr id="27" name="Text 25"/>
-          <p:cNvSpPr/>
-          <p:nvPr/>
-        </p:nvSpPr>
-        <p:spPr>
-          <a:xfrm>
-            <a:off x="5943600" y="1984248"/>
-            <a:ext cx="2834640" cy="402336"/>
+          <p:cNvPr id="27" name="Shape 25"/>
+          <p:cNvSpPr/>
+          <p:nvPr/>
+        </p:nvSpPr>
+        <p:spPr>
+          <a:xfrm>
+            <a:off x="365760" y="2404872"/>
+            <a:ext cx="2468880" cy="402336"/>
+          </a:xfrm>
+          <a:prstGeom prst="rect">
+            <a:avLst/>
+          </a:prstGeom>
+          <a:solidFill>
+            <a:srgbClr val="DDD6FE"/>
+          </a:solidFill>
+          <a:ln w="12700">
+            <a:solidFill>
+              <a:srgbClr val="E2E8F0"/>
+            </a:solidFill>
+            <a:prstDash val="solid"/>
+          </a:ln>
+        </p:spPr>
+      </p:sp>
+      <p:sp>
+        <p:nvSpPr>
+          <p:cNvPr id="28" name="Text 26"/>
+          <p:cNvSpPr/>
+          <p:nvPr/>
+        </p:nvSpPr>
+        <p:spPr>
+          <a:xfrm>
+            <a:off x="365760" y="2404872"/>
+            <a:ext cx="2468880" cy="402336"/>
           </a:xfrm>
           <a:prstGeom prst="rect">
             <a:avLst/>
@@ -32933,13 +32826,13 @@
             <a:r>
               <a:rPr lang="en-US" sz="1300" b="1" dirty="0">
                 <a:solidFill>
-                  <a:srgbClr val="9D174D"/>
+                  <a:srgbClr val="4C1D95"/>
                 </a:solidFill>
                 <a:latin typeface="Trebuchet MS" pitchFamily="34" charset="0"/>
                 <a:ea typeface="Trebuchet MS" pitchFamily="34" charset="-122"/>
                 <a:cs typeface="Trebuchet MS" pitchFamily="34" charset="-120"/>
               </a:rPr>
-              <a:t>--ed</a:t>
+              <a:t>sub-</a:t>
             </a:r>
             <a:endParaRPr lang="en-US" sz="1300" dirty="0"/>
           </a:p>
@@ -32947,13 +32840,63 @@
       </p:sp>
       <p:sp>
         <p:nvSpPr>
-          <p:cNvPr id="28" name="Shape 26"/>
-          <p:cNvSpPr/>
-          <p:nvPr/>
-        </p:nvSpPr>
-        <p:spPr>
-          <a:xfrm>
-            <a:off x="365760" y="2404872"/>
+          <p:cNvPr id="29" name="Shape 27"/>
+          <p:cNvSpPr/>
+          <p:nvPr/>
+        </p:nvSpPr>
+        <p:spPr>
+          <a:xfrm>
+            <a:off x="2971800" y="2404872"/>
+            <a:ext cx="2834640" cy="402336"/>
+          </a:xfrm>
+          <a:prstGeom prst="rect">
+            <a:avLst/>
+          </a:prstGeom>
+          <a:solidFill>
+            <a:srgbClr val="F8FAFC"/>
+          </a:solidFill>
+          <a:ln w="12700">
+            <a:solidFill>
+              <a:srgbClr val="E2E8F0"/>
+            </a:solidFill>
+            <a:prstDash val="solid"/>
+          </a:ln>
+        </p:spPr>
+      </p:sp>
+      <p:sp>
+        <p:nvSpPr>
+          <p:cNvPr id="30" name="Shape 28"/>
+          <p:cNvSpPr/>
+          <p:nvPr/>
+        </p:nvSpPr>
+        <p:spPr>
+          <a:xfrm>
+            <a:off x="5943600" y="2404872"/>
+            <a:ext cx="2834640" cy="402336"/>
+          </a:xfrm>
+          <a:prstGeom prst="rect">
+            <a:avLst/>
+          </a:prstGeom>
+          <a:solidFill>
+            <a:srgbClr val="F8FAFC"/>
+          </a:solidFill>
+          <a:ln w="12700">
+            <a:solidFill>
+              <a:srgbClr val="E2E8F0"/>
+            </a:solidFill>
+            <a:prstDash val="solid"/>
+          </a:ln>
+        </p:spPr>
+      </p:sp>
+      <p:sp>
+        <p:nvSpPr>
+          <p:cNvPr id="31" name="Shape 29"/>
+          <p:cNvSpPr/>
+          <p:nvPr/>
+        </p:nvSpPr>
+        <p:spPr>
+          <a:xfrm>
+            <a:off x="365760" y="2825496"/>
             <a:ext cx="2468880" cy="402336"/>
           </a:xfrm>
           <a:prstGeom prst="rect">
@@ -32972,13 +32915,13 @@
       </p:sp>
       <p:sp>
         <p:nvSpPr>
-          <p:cNvPr id="29" name="Text 27"/>
-          <p:cNvSpPr/>
-          <p:nvPr/>
-        </p:nvSpPr>
-        <p:spPr>
-          <a:xfrm>
-            <a:off x="365760" y="2404872"/>
+          <p:cNvPr id="32" name="Text 30"/>
+          <p:cNvSpPr/>
+          <p:nvPr/>
+        </p:nvSpPr>
+        <p:spPr>
+          <a:xfrm>
+            <a:off x="365760" y="2825496"/>
             <a:ext cx="2468880" cy="402336"/>
           </a:xfrm>
           <a:prstGeom prst="rect">
@@ -33003,7 +32946,7 @@
                 <a:ea typeface="Trebuchet MS" pitchFamily="34" charset="-122"/>
                 <a:cs typeface="Trebuchet MS" pitchFamily="34" charset="-120"/>
               </a:rPr>
-              <a:t>path-</a:t>
+              <a:t>under-</a:t>
             </a:r>
             <a:endParaRPr lang="en-US" sz="1300" dirty="0"/>
           </a:p>
@@ -33011,20 +32954,20 @@
       </p:sp>
       <p:sp>
         <p:nvSpPr>
-          <p:cNvPr id="30" name="Shape 28"/>
-          <p:cNvSpPr/>
-          <p:nvPr/>
-        </p:nvSpPr>
-        <p:spPr>
-          <a:xfrm>
-            <a:off x="2971800" y="2404872"/>
+          <p:cNvPr id="33" name="Shape 31"/>
+          <p:cNvSpPr/>
+          <p:nvPr/>
+        </p:nvSpPr>
+        <p:spPr>
+          <a:xfrm>
+            <a:off x="2971800" y="2825496"/>
             <a:ext cx="2834640" cy="402336"/>
           </a:xfrm>
           <a:prstGeom prst="rect">
             <a:avLst/>
           </a:prstGeom>
           <a:solidFill>
-            <a:srgbClr val="F8FAFC"/>
+            <a:srgbClr val="F1F5F9"/>
           </a:solidFill>
           <a:ln w="12700">
             <a:solidFill>
@@ -33036,20 +32979,20 @@
       </p:sp>
       <p:sp>
         <p:nvSpPr>
-          <p:cNvPr id="31" name="Shape 29"/>
-          <p:cNvSpPr/>
-          <p:nvPr/>
-        </p:nvSpPr>
-        <p:spPr>
-          <a:xfrm>
-            <a:off x="5943600" y="2404872"/>
+          <p:cNvPr id="34" name="Shape 32"/>
+          <p:cNvSpPr/>
+          <p:nvPr/>
+        </p:nvSpPr>
+        <p:spPr>
+          <a:xfrm>
+            <a:off x="5943600" y="2825496"/>
             <a:ext cx="2834640" cy="402336"/>
           </a:xfrm>
           <a:prstGeom prst="rect">
             <a:avLst/>
           </a:prstGeom>
           <a:solidFill>
-            <a:srgbClr val="FCE7F3"/>
+            <a:srgbClr val="F1F5F9"/>
           </a:solidFill>
           <a:ln w="12700">
             <a:solidFill>
@@ -33061,14 +33004,14 @@
       </p:sp>
       <p:sp>
         <p:nvSpPr>
-          <p:cNvPr id="32" name="Text 30"/>
-          <p:cNvSpPr/>
-          <p:nvPr/>
-        </p:nvSpPr>
-        <p:spPr>
-          <a:xfrm>
-            <a:off x="5943600" y="2404872"/>
-            <a:ext cx="2834640" cy="402336"/>
+          <p:cNvPr id="35" name="Text 33"/>
+          <p:cNvSpPr/>
+          <p:nvPr/>
+        </p:nvSpPr>
+        <p:spPr>
+          <a:xfrm>
+            <a:off x="365760" y="3611880"/>
+            <a:ext cx="1828800" cy="347472"/>
           </a:xfrm>
           <a:prstGeom prst="rect">
             <a:avLst/>
@@ -33080,59 +33023,61 @@
           <a:bodyPr wrap="square" lIns="0" tIns="0" rIns="0" bIns="0" rtlCol="0" anchor="ctr"/>
           <a:lstStyle/>
           <a:p>
-            <a:pPr algn="ctr" indent="0" marL="0">
-              <a:buNone/>
-            </a:pPr>
-            <a:r>
-              <a:rPr lang="en-US" sz="1300" b="1" dirty="0">
-                <a:solidFill>
-                  <a:srgbClr val="9D174D"/>
+            <a:pPr algn="l" indent="0" marL="0">
+              <a:buNone/>
+            </a:pPr>
+            <a:r>
+              <a:rPr lang="en-US" sz="1200" b="1" dirty="0">
+                <a:solidFill>
+                  <a:srgbClr val="0F172A"/>
                 </a:solidFill>
                 <a:latin typeface="Trebuchet MS" pitchFamily="34" charset="0"/>
                 <a:ea typeface="Trebuchet MS" pitchFamily="34" charset="-122"/>
                 <a:cs typeface="Trebuchet MS" pitchFamily="34" charset="-120"/>
               </a:rPr>
-              <a:t>--ing</a:t>
-            </a:r>
-            <a:endParaRPr lang="en-US" sz="1300" dirty="0"/>
-          </a:p>
-        </p:txBody>
-      </p:sp>
-      <p:sp>
-        <p:nvSpPr>
-          <p:cNvPr id="33" name="Shape 31"/>
-          <p:cNvSpPr/>
-          <p:nvPr/>
-        </p:nvSpPr>
-        <p:spPr>
-          <a:xfrm>
-            <a:off x="365760" y="2825496"/>
-            <a:ext cx="2468880" cy="402336"/>
-          </a:xfrm>
-          <a:prstGeom prst="rect">
-            <a:avLst/>
-          </a:prstGeom>
-          <a:solidFill>
-            <a:srgbClr val="DDD6FE"/>
-          </a:solidFill>
-          <a:ln w="12700">
-            <a:solidFill>
-              <a:srgbClr val="E2E8F0"/>
-            </a:solidFill>
-            <a:prstDash val="solid"/>
-          </a:ln>
-        </p:spPr>
-      </p:sp>
-      <p:sp>
-        <p:nvSpPr>
-          <p:cNvPr id="34" name="Text 32"/>
-          <p:cNvSpPr/>
-          <p:nvPr/>
-        </p:nvSpPr>
-        <p:spPr>
-          <a:xfrm>
-            <a:off x="365760" y="2825496"/>
-            <a:ext cx="2468880" cy="402336"/>
+              <a:t>Sample words:</a:t>
+            </a:r>
+            <a:endParaRPr lang="en-US" sz="1200" dirty="0"/>
+          </a:p>
+        </p:txBody>
+      </p:sp>
+      <p:sp>
+        <p:nvSpPr>
+          <p:cNvPr id="36" name="Shape 34"/>
+          <p:cNvSpPr/>
+          <p:nvPr/>
+        </p:nvSpPr>
+        <p:spPr>
+          <a:xfrm>
+            <a:off x="365760" y="4023360"/>
+            <a:ext cx="2011680" cy="402336"/>
+          </a:xfrm>
+          <a:prstGeom prst="rect">
+            <a:avLst>
+              <a:gd name="adj" fmla="val 13636"/>
+            </a:avLst>
+          </a:prstGeom>
+          <a:solidFill>
+            <a:srgbClr val="EEF2FF"/>
+          </a:solidFill>
+          <a:ln w="12700">
+            <a:solidFill>
+              <a:srgbClr val="6366F1"/>
+            </a:solidFill>
+            <a:prstDash val="solid"/>
+          </a:ln>
+        </p:spPr>
+      </p:sp>
+      <p:sp>
+        <p:nvSpPr>
+          <p:cNvPr id="37" name="Text 35"/>
+          <p:cNvSpPr/>
+          <p:nvPr/>
+        </p:nvSpPr>
+        <p:spPr>
+          <a:xfrm>
+            <a:off x="365760" y="4023360"/>
+            <a:ext cx="2011680" cy="402336"/>
           </a:xfrm>
           <a:prstGeom prst="rect">
             <a:avLst/>
@@ -33148,824 +33093,15 @@
               <a:buNone/>
             </a:pPr>
             <a:r>
-              <a:rPr lang="en-US" sz="1300" b="1" dirty="0">
-                <a:solidFill>
-                  <a:srgbClr val="4C1D95"/>
+              <a:rPr lang="en-US" sz="1200" b="1" dirty="0">
+                <a:solidFill>
+                  <a:srgbClr val="4338CA"/>
                 </a:solidFill>
                 <a:latin typeface="Trebuchet MS" pitchFamily="34" charset="0"/>
                 <a:ea typeface="Trebuchet MS" pitchFamily="34" charset="-122"/>
                 <a:cs typeface="Trebuchet MS" pitchFamily="34" charset="-120"/>
               </a:rPr>
-              <a:t>pass-</a:t>
-            </a:r>
-            <a:endParaRPr lang="en-US" sz="1300" dirty="0"/>
-          </a:p>
-        </p:txBody>
-      </p:sp>
-      <p:sp>
-        <p:nvSpPr>
-          <p:cNvPr id="35" name="Shape 33"/>
-          <p:cNvSpPr/>
-          <p:nvPr/>
-        </p:nvSpPr>
-        <p:spPr>
-          <a:xfrm>
-            <a:off x="2971800" y="2825496"/>
-            <a:ext cx="2834640" cy="402336"/>
-          </a:xfrm>
-          <a:prstGeom prst="rect">
-            <a:avLst/>
-          </a:prstGeom>
-          <a:solidFill>
-            <a:srgbClr val="F1F5F9"/>
-          </a:solidFill>
-          <a:ln w="12700">
-            <a:solidFill>
-              <a:srgbClr val="E2E8F0"/>
-            </a:solidFill>
-            <a:prstDash val="solid"/>
-          </a:ln>
-        </p:spPr>
-      </p:sp>
-      <p:sp>
-        <p:nvSpPr>
-          <p:cNvPr id="36" name="Shape 34"/>
-          <p:cNvSpPr/>
-          <p:nvPr/>
-        </p:nvSpPr>
-        <p:spPr>
-          <a:xfrm>
-            <a:off x="5943600" y="2825496"/>
-            <a:ext cx="2834640" cy="402336"/>
-          </a:xfrm>
-          <a:prstGeom prst="rect">
-            <a:avLst/>
-          </a:prstGeom>
-          <a:solidFill>
-            <a:srgbClr val="FCE7F3"/>
-          </a:solidFill>
-          <a:ln w="12700">
-            <a:solidFill>
-              <a:srgbClr val="E2E8F0"/>
-            </a:solidFill>
-            <a:prstDash val="solid"/>
-          </a:ln>
-        </p:spPr>
-      </p:sp>
-      <p:sp>
-        <p:nvSpPr>
-          <p:cNvPr id="37" name="Text 35"/>
-          <p:cNvSpPr/>
-          <p:nvPr/>
-        </p:nvSpPr>
-        <p:spPr>
-          <a:xfrm>
-            <a:off x="5943600" y="2825496"/>
-            <a:ext cx="2834640" cy="402336"/>
-          </a:xfrm>
-          <a:prstGeom prst="rect">
-            <a:avLst/>
-          </a:prstGeom>
-          <a:noFill/>
-          <a:ln/>
-        </p:spPr>
-        <p:txBody>
-          <a:bodyPr wrap="square" lIns="0" tIns="0" rIns="0" bIns="0" rtlCol="0" anchor="ctr"/>
-          <a:lstStyle/>
-          <a:p>
-            <a:pPr algn="ctr" indent="0" marL="0">
-              <a:buNone/>
-            </a:pPr>
-            <a:r>
-              <a:rPr lang="en-US" sz="1300" b="1" dirty="0">
-                <a:solidFill>
-                  <a:srgbClr val="9D174D"/>
-                </a:solidFill>
-                <a:latin typeface="Trebuchet MS" pitchFamily="34" charset="0"/>
-                <a:ea typeface="Trebuchet MS" pitchFamily="34" charset="-122"/>
-                <a:cs typeface="Trebuchet MS" pitchFamily="34" charset="-120"/>
-              </a:rPr>
-              <a:t>--ward</a:t>
-            </a:r>
-            <a:endParaRPr lang="en-US" sz="1300" dirty="0"/>
-          </a:p>
-        </p:txBody>
-      </p:sp>
-      <p:sp>
-        <p:nvSpPr>
-          <p:cNvPr id="38" name="Shape 36"/>
-          <p:cNvSpPr/>
-          <p:nvPr/>
-        </p:nvSpPr>
-        <p:spPr>
-          <a:xfrm>
-            <a:off x="365760" y="3246120"/>
-            <a:ext cx="2468880" cy="402336"/>
-          </a:xfrm>
-          <a:prstGeom prst="rect">
-            <a:avLst/>
-          </a:prstGeom>
-          <a:solidFill>
-            <a:srgbClr val="DDD6FE"/>
-          </a:solidFill>
-          <a:ln w="12700">
-            <a:solidFill>
-              <a:srgbClr val="E2E8F0"/>
-            </a:solidFill>
-            <a:prstDash val="solid"/>
-          </a:ln>
-        </p:spPr>
-      </p:sp>
-      <p:sp>
-        <p:nvSpPr>
-          <p:cNvPr id="39" name="Text 37"/>
-          <p:cNvSpPr/>
-          <p:nvPr/>
-        </p:nvSpPr>
-        <p:spPr>
-          <a:xfrm>
-            <a:off x="365760" y="3246120"/>
-            <a:ext cx="2468880" cy="402336"/>
-          </a:xfrm>
-          <a:prstGeom prst="rect">
-            <a:avLst/>
-          </a:prstGeom>
-          <a:noFill/>
-          <a:ln/>
-        </p:spPr>
-        <p:txBody>
-          <a:bodyPr wrap="square" lIns="0" tIns="0" rIns="0" bIns="0" rtlCol="0" anchor="ctr"/>
-          <a:lstStyle/>
-          <a:p>
-            <a:pPr algn="ctr" indent="0" marL="0">
-              <a:buNone/>
-            </a:pPr>
-            <a:r>
-              <a:rPr lang="en-US" sz="1300" b="1" dirty="0">
-                <a:solidFill>
-                  <a:srgbClr val="4C1D95"/>
-                </a:solidFill>
-                <a:latin typeface="Trebuchet MS" pitchFamily="34" charset="0"/>
-                <a:ea typeface="Trebuchet MS" pitchFamily="34" charset="-122"/>
-                <a:cs typeface="Trebuchet MS" pitchFamily="34" charset="-120"/>
-              </a:rPr>
-              <a:t>sub-</a:t>
-            </a:r>
-            <a:endParaRPr lang="en-US" sz="1300" dirty="0"/>
-          </a:p>
-        </p:txBody>
-      </p:sp>
-      <p:sp>
-        <p:nvSpPr>
-          <p:cNvPr id="40" name="Shape 38"/>
-          <p:cNvSpPr/>
-          <p:nvPr/>
-        </p:nvSpPr>
-        <p:spPr>
-          <a:xfrm>
-            <a:off x="2971800" y="3246120"/>
-            <a:ext cx="2834640" cy="402336"/>
-          </a:xfrm>
-          <a:prstGeom prst="rect">
-            <a:avLst/>
-          </a:prstGeom>
-          <a:solidFill>
-            <a:srgbClr val="F8FAFC"/>
-          </a:solidFill>
-          <a:ln w="12700">
-            <a:solidFill>
-              <a:srgbClr val="E2E8F0"/>
-            </a:solidFill>
-            <a:prstDash val="solid"/>
-          </a:ln>
-        </p:spPr>
-      </p:sp>
-      <p:sp>
-        <p:nvSpPr>
-          <p:cNvPr id="41" name="Shape 39"/>
-          <p:cNvSpPr/>
-          <p:nvPr/>
-        </p:nvSpPr>
-        <p:spPr>
-          <a:xfrm>
-            <a:off x="5943600" y="3246120"/>
-            <a:ext cx="2834640" cy="402336"/>
-          </a:xfrm>
-          <a:prstGeom prst="rect">
-            <a:avLst/>
-          </a:prstGeom>
-          <a:solidFill>
-            <a:srgbClr val="FCE7F3"/>
-          </a:solidFill>
-          <a:ln w="12700">
-            <a:solidFill>
-              <a:srgbClr val="E2E8F0"/>
-            </a:solidFill>
-            <a:prstDash val="solid"/>
-          </a:ln>
-        </p:spPr>
-      </p:sp>
-      <p:sp>
-        <p:nvSpPr>
-          <p:cNvPr id="42" name="Text 40"/>
-          <p:cNvSpPr/>
-          <p:nvPr/>
-        </p:nvSpPr>
-        <p:spPr>
-          <a:xfrm>
-            <a:off x="5943600" y="3246120"/>
-            <a:ext cx="2834640" cy="402336"/>
-          </a:xfrm>
-          <a:prstGeom prst="rect">
-            <a:avLst/>
-          </a:prstGeom>
-          <a:noFill/>
-          <a:ln/>
-        </p:spPr>
-        <p:txBody>
-          <a:bodyPr wrap="square" lIns="0" tIns="0" rIns="0" bIns="0" rtlCol="0" anchor="ctr"/>
-          <a:lstStyle/>
-          <a:p>
-            <a:pPr algn="ctr" indent="0" marL="0">
-              <a:buNone/>
-            </a:pPr>
-            <a:r>
-              <a:rPr lang="en-US" sz="1300" b="1" dirty="0">
-                <a:solidFill>
-                  <a:srgbClr val="9D174D"/>
-                </a:solidFill>
-                <a:latin typeface="Trebuchet MS" pitchFamily="34" charset="0"/>
-                <a:ea typeface="Trebuchet MS" pitchFamily="34" charset="-122"/>
-                <a:cs typeface="Trebuchet MS" pitchFamily="34" charset="-120"/>
-              </a:rPr>
-              <a:t>--farer</a:t>
-            </a:r>
-            <a:endParaRPr lang="en-US" sz="1300" dirty="0"/>
-          </a:p>
-        </p:txBody>
-      </p:sp>
-      <p:sp>
-        <p:nvSpPr>
-          <p:cNvPr id="43" name="Text 41"/>
-          <p:cNvSpPr/>
-          <p:nvPr/>
-        </p:nvSpPr>
-        <p:spPr>
-          <a:xfrm>
-            <a:off x="365760" y="3611880"/>
-            <a:ext cx="1828800" cy="347472"/>
-          </a:xfrm>
-          <a:prstGeom prst="rect">
-            <a:avLst/>
-          </a:prstGeom>
-          <a:noFill/>
-          <a:ln/>
-        </p:spPr>
-        <p:txBody>
-          <a:bodyPr wrap="square" lIns="0" tIns="0" rIns="0" bIns="0" rtlCol="0" anchor="ctr"/>
-          <a:lstStyle/>
-          <a:p>
-            <a:pPr algn="l" indent="0" marL="0">
-              <a:buNone/>
-            </a:pPr>
-            <a:r>
-              <a:rPr lang="en-US" sz="1200" b="1" dirty="0">
-                <a:solidFill>
-                  <a:srgbClr val="0F172A"/>
-                </a:solidFill>
-                <a:latin typeface="Trebuchet MS" pitchFamily="34" charset="0"/>
-                <a:ea typeface="Trebuchet MS" pitchFamily="34" charset="-122"/>
-                <a:cs typeface="Trebuchet MS" pitchFamily="34" charset="-120"/>
-              </a:rPr>
-              <a:t>Sample words:</a:t>
-            </a:r>
-            <a:endParaRPr lang="en-US" sz="1200" dirty="0"/>
-          </a:p>
-        </p:txBody>
-      </p:sp>
-      <p:sp>
-        <p:nvSpPr>
-          <p:cNvPr id="44" name="Shape 42"/>
-          <p:cNvSpPr/>
-          <p:nvPr/>
-        </p:nvSpPr>
-        <p:spPr>
-          <a:xfrm>
-            <a:off x="365760" y="4023360"/>
-            <a:ext cx="2011680" cy="402336"/>
-          </a:xfrm>
-          <a:prstGeom prst="rect">
-            <a:avLst>
-              <a:gd name="adj" fmla="val 13636"/>
-            </a:avLst>
-          </a:prstGeom>
-          <a:solidFill>
-            <a:srgbClr val="EEF2FF"/>
-          </a:solidFill>
-          <a:ln w="12700">
-            <a:solidFill>
-              <a:srgbClr val="6366F1"/>
-            </a:solidFill>
-            <a:prstDash val="solid"/>
-          </a:ln>
-        </p:spPr>
-      </p:sp>
-      <p:sp>
-        <p:nvSpPr>
-          <p:cNvPr id="45" name="Text 43"/>
-          <p:cNvSpPr/>
-          <p:nvPr/>
-        </p:nvSpPr>
-        <p:spPr>
-          <a:xfrm>
-            <a:off x="365760" y="4023360"/>
-            <a:ext cx="2011680" cy="402336"/>
-          </a:xfrm>
-          <a:prstGeom prst="rect">
-            <a:avLst/>
-          </a:prstGeom>
-          <a:noFill/>
-          <a:ln/>
-        </p:spPr>
-        <p:txBody>
-          <a:bodyPr wrap="square" lIns="0" tIns="0" rIns="0" bIns="0" rtlCol="0" anchor="ctr"/>
-          <a:lstStyle/>
-          <a:p>
-            <a:pPr algn="ctr" indent="0" marL="0">
-              <a:buNone/>
-            </a:pPr>
-            <a:r>
-              <a:rPr lang="en-US" sz="1200" b="1" dirty="0">
-                <a:solidFill>
-                  <a:srgbClr val="4338CA"/>
-                </a:solidFill>
-                <a:latin typeface="Trebuchet MS" pitchFamily="34" charset="0"/>
-                <a:ea typeface="Trebuchet MS" pitchFamily="34" charset="-122"/>
-                <a:cs typeface="Trebuchet MS" pitchFamily="34" charset="-120"/>
-              </a:rPr>
-              <a:t>pathway</a:t>
-            </a:r>
-            <a:endParaRPr lang="en-US" sz="1200" dirty="0"/>
-          </a:p>
-        </p:txBody>
-      </p:sp>
-      <p:sp>
-        <p:nvSpPr>
-          <p:cNvPr id="46" name="Shape 44"/>
-          <p:cNvSpPr/>
-          <p:nvPr/>
-        </p:nvSpPr>
-        <p:spPr>
-          <a:xfrm>
-            <a:off x="2542032" y="4023360"/>
-            <a:ext cx="2011680" cy="402336"/>
-          </a:xfrm>
-          <a:prstGeom prst="rect">
-            <a:avLst>
-              <a:gd name="adj" fmla="val 13636"/>
-            </a:avLst>
-          </a:prstGeom>
-          <a:solidFill>
-            <a:srgbClr val="EEF2FF"/>
-          </a:solidFill>
-          <a:ln w="12700">
-            <a:solidFill>
-              <a:srgbClr val="6366F1"/>
-            </a:solidFill>
-            <a:prstDash val="solid"/>
-          </a:ln>
-        </p:spPr>
-      </p:sp>
-      <p:sp>
-        <p:nvSpPr>
-          <p:cNvPr id="47" name="Text 45"/>
-          <p:cNvSpPr/>
-          <p:nvPr/>
-        </p:nvSpPr>
-        <p:spPr>
-          <a:xfrm>
-            <a:off x="2542032" y="4023360"/>
-            <a:ext cx="2011680" cy="402336"/>
-          </a:xfrm>
-          <a:prstGeom prst="rect">
-            <a:avLst/>
-          </a:prstGeom>
-          <a:noFill/>
-          <a:ln/>
-        </p:spPr>
-        <p:txBody>
-          <a:bodyPr wrap="square" lIns="0" tIns="0" rIns="0" bIns="0" rtlCol="0" anchor="ctr"/>
-          <a:lstStyle/>
-          <a:p>
-            <a:pPr algn="ctr" indent="0" marL="0">
-              <a:buNone/>
-            </a:pPr>
-            <a:r>
-              <a:rPr lang="en-US" sz="1200" b="1" dirty="0">
-                <a:solidFill>
-                  <a:srgbClr val="4338CA"/>
-                </a:solidFill>
-                <a:latin typeface="Trebuchet MS" pitchFamily="34" charset="0"/>
-                <a:ea typeface="Trebuchet MS" pitchFamily="34" charset="-122"/>
-                <a:cs typeface="Trebuchet MS" pitchFamily="34" charset="-120"/>
-              </a:rPr>
-              <a:t>gateway</a:t>
-            </a:r>
-            <a:endParaRPr lang="en-US" sz="1200" dirty="0"/>
-          </a:p>
-        </p:txBody>
-      </p:sp>
-      <p:sp>
-        <p:nvSpPr>
-          <p:cNvPr id="48" name="Shape 46"/>
-          <p:cNvSpPr/>
-          <p:nvPr/>
-        </p:nvSpPr>
-        <p:spPr>
-          <a:xfrm>
-            <a:off x="4718304" y="4023360"/>
-            <a:ext cx="2011680" cy="402336"/>
-          </a:xfrm>
-          <a:prstGeom prst="rect">
-            <a:avLst>
-              <a:gd name="adj" fmla="val 13636"/>
-            </a:avLst>
-          </a:prstGeom>
-          <a:solidFill>
-            <a:srgbClr val="EEF2FF"/>
-          </a:solidFill>
-          <a:ln w="12700">
-            <a:solidFill>
-              <a:srgbClr val="6366F1"/>
-            </a:solidFill>
-            <a:prstDash val="solid"/>
-          </a:ln>
-        </p:spPr>
-      </p:sp>
-      <p:sp>
-        <p:nvSpPr>
-          <p:cNvPr id="49" name="Text 47"/>
-          <p:cNvSpPr/>
-          <p:nvPr/>
-        </p:nvSpPr>
-        <p:spPr>
-          <a:xfrm>
-            <a:off x="4718304" y="4023360"/>
-            <a:ext cx="2011680" cy="402336"/>
-          </a:xfrm>
-          <a:prstGeom prst="rect">
-            <a:avLst/>
-          </a:prstGeom>
-          <a:noFill/>
-          <a:ln/>
-        </p:spPr>
-        <p:txBody>
-          <a:bodyPr wrap="square" lIns="0" tIns="0" rIns="0" bIns="0" rtlCol="0" anchor="ctr"/>
-          <a:lstStyle/>
-          <a:p>
-            <a:pPr algn="ctr" indent="0" marL="0">
-              <a:buNone/>
-            </a:pPr>
-            <a:r>
-              <a:rPr lang="en-US" sz="1200" b="1" dirty="0">
-                <a:solidFill>
-                  <a:srgbClr val="4338CA"/>
-                </a:solidFill>
-                <a:latin typeface="Trebuchet MS" pitchFamily="34" charset="0"/>
-                <a:ea typeface="Trebuchet MS" pitchFamily="34" charset="-122"/>
-                <a:cs typeface="Trebuchet MS" pitchFamily="34" charset="-120"/>
-              </a:rPr>
-              <a:t>subway</a:t>
-            </a:r>
-            <a:endParaRPr lang="en-US" sz="1200" dirty="0"/>
-          </a:p>
-        </p:txBody>
-      </p:sp>
-      <p:sp>
-        <p:nvSpPr>
-          <p:cNvPr id="50" name="Shape 48"/>
-          <p:cNvSpPr/>
-          <p:nvPr/>
-        </p:nvSpPr>
-        <p:spPr>
-          <a:xfrm>
-            <a:off x="6894576" y="4023360"/>
-            <a:ext cx="2011680" cy="402336"/>
-          </a:xfrm>
-          <a:prstGeom prst="rect">
-            <a:avLst>
-              <a:gd name="adj" fmla="val 13636"/>
-            </a:avLst>
-          </a:prstGeom>
-          <a:solidFill>
-            <a:srgbClr val="EEF2FF"/>
-          </a:solidFill>
-          <a:ln w="12700">
-            <a:solidFill>
-              <a:srgbClr val="6366F1"/>
-            </a:solidFill>
-            <a:prstDash val="solid"/>
-          </a:ln>
-        </p:spPr>
-      </p:sp>
-      <p:sp>
-        <p:nvSpPr>
-          <p:cNvPr id="51" name="Text 49"/>
-          <p:cNvSpPr/>
-          <p:nvPr/>
-        </p:nvSpPr>
-        <p:spPr>
-          <a:xfrm>
-            <a:off x="6894576" y="4023360"/>
-            <a:ext cx="2011680" cy="402336"/>
-          </a:xfrm>
-          <a:prstGeom prst="rect">
-            <a:avLst/>
-          </a:prstGeom>
-          <a:noFill/>
-          <a:ln/>
-        </p:spPr>
-        <p:txBody>
-          <a:bodyPr wrap="square" lIns="0" tIns="0" rIns="0" bIns="0" rtlCol="0" anchor="ctr"/>
-          <a:lstStyle/>
-          <a:p>
-            <a:pPr algn="ctr" indent="0" marL="0">
-              <a:buNone/>
-            </a:pPr>
-            <a:r>
-              <a:rPr lang="en-US" sz="1200" b="1" dirty="0">
-                <a:solidFill>
-                  <a:srgbClr val="4338CA"/>
-                </a:solidFill>
-                <a:latin typeface="Trebuchet MS" pitchFamily="34" charset="0"/>
-                <a:ea typeface="Trebuchet MS" pitchFamily="34" charset="-122"/>
-                <a:cs typeface="Trebuchet MS" pitchFamily="34" charset="-120"/>
-              </a:rPr>
-              <a:t>halfway</a:t>
-            </a:r>
-            <a:endParaRPr lang="en-US" sz="1200" dirty="0"/>
-          </a:p>
-        </p:txBody>
-      </p:sp>
-      <p:sp>
-        <p:nvSpPr>
-          <p:cNvPr id="52" name="Shape 50"/>
-          <p:cNvSpPr/>
-          <p:nvPr/>
-        </p:nvSpPr>
-        <p:spPr>
-          <a:xfrm>
-            <a:off x="365760" y="4498848"/>
-            <a:ext cx="2011680" cy="402336"/>
-          </a:xfrm>
-          <a:prstGeom prst="rect">
-            <a:avLst>
-              <a:gd name="adj" fmla="val 13636"/>
-            </a:avLst>
-          </a:prstGeom>
-          <a:solidFill>
-            <a:srgbClr val="EEF2FF"/>
-          </a:solidFill>
-          <a:ln w="12700">
-            <a:solidFill>
-              <a:srgbClr val="6366F1"/>
-            </a:solidFill>
-            <a:prstDash val="solid"/>
-          </a:ln>
-        </p:spPr>
-      </p:sp>
-      <p:sp>
-        <p:nvSpPr>
-          <p:cNvPr id="53" name="Text 51"/>
-          <p:cNvSpPr/>
-          <p:nvPr/>
-        </p:nvSpPr>
-        <p:spPr>
-          <a:xfrm>
-            <a:off x="365760" y="4498848"/>
-            <a:ext cx="2011680" cy="402336"/>
-          </a:xfrm>
-          <a:prstGeom prst="rect">
-            <a:avLst/>
-          </a:prstGeom>
-          <a:noFill/>
-          <a:ln/>
-        </p:spPr>
-        <p:txBody>
-          <a:bodyPr wrap="square" lIns="0" tIns="0" rIns="0" bIns="0" rtlCol="0" anchor="ctr"/>
-          <a:lstStyle/>
-          <a:p>
-            <a:pPr algn="ctr" indent="0" marL="0">
-              <a:buNone/>
-            </a:pPr>
-            <a:r>
-              <a:rPr lang="en-US" sz="1200" b="1" dirty="0">
-                <a:solidFill>
-                  <a:srgbClr val="4338CA"/>
-                </a:solidFill>
-                <a:latin typeface="Trebuchet MS" pitchFamily="34" charset="0"/>
-                <a:ea typeface="Trebuchet MS" pitchFamily="34" charset="-122"/>
-                <a:cs typeface="Trebuchet MS" pitchFamily="34" charset="-120"/>
-              </a:rPr>
-              <a:t>doorway</a:t>
-            </a:r>
-            <a:endParaRPr lang="en-US" sz="1200" dirty="0"/>
-          </a:p>
-        </p:txBody>
-      </p:sp>
-      <p:sp>
-        <p:nvSpPr>
-          <p:cNvPr id="54" name="Shape 52"/>
-          <p:cNvSpPr/>
-          <p:nvPr/>
-        </p:nvSpPr>
-        <p:spPr>
-          <a:xfrm>
-            <a:off x="2542032" y="4498848"/>
-            <a:ext cx="2011680" cy="402336"/>
-          </a:xfrm>
-          <a:prstGeom prst="rect">
-            <a:avLst>
-              <a:gd name="adj" fmla="val 13636"/>
-            </a:avLst>
-          </a:prstGeom>
-          <a:solidFill>
-            <a:srgbClr val="EEF2FF"/>
-          </a:solidFill>
-          <a:ln w="12700">
-            <a:solidFill>
-              <a:srgbClr val="6366F1"/>
-            </a:solidFill>
-            <a:prstDash val="solid"/>
-          </a:ln>
-        </p:spPr>
-      </p:sp>
-      <p:sp>
-        <p:nvSpPr>
-          <p:cNvPr id="55" name="Text 53"/>
-          <p:cNvSpPr/>
-          <p:nvPr/>
-        </p:nvSpPr>
-        <p:spPr>
-          <a:xfrm>
-            <a:off x="2542032" y="4498848"/>
-            <a:ext cx="2011680" cy="402336"/>
-          </a:xfrm>
-          <a:prstGeom prst="rect">
-            <a:avLst/>
-          </a:prstGeom>
-          <a:noFill/>
-          <a:ln/>
-        </p:spPr>
-        <p:txBody>
-          <a:bodyPr wrap="square" lIns="0" tIns="0" rIns="0" bIns="0" rtlCol="0" anchor="ctr"/>
-          <a:lstStyle/>
-          <a:p>
-            <a:pPr algn="ctr" indent="0" marL="0">
-              <a:buNone/>
-            </a:pPr>
-            <a:r>
-              <a:rPr lang="en-US" sz="1200" b="1" dirty="0">
-                <a:solidFill>
-                  <a:srgbClr val="4338CA"/>
-                </a:solidFill>
-                <a:latin typeface="Trebuchet MS" pitchFamily="34" charset="0"/>
-                <a:ea typeface="Trebuchet MS" pitchFamily="34" charset="-122"/>
-                <a:cs typeface="Trebuchet MS" pitchFamily="34" charset="-120"/>
-              </a:rPr>
-              <a:t>runway</a:t>
-            </a:r>
-            <a:endParaRPr lang="en-US" sz="1200" dirty="0"/>
-          </a:p>
-        </p:txBody>
-      </p:sp>
-      <p:sp>
-        <p:nvSpPr>
-          <p:cNvPr id="56" name="Shape 54"/>
-          <p:cNvSpPr/>
-          <p:nvPr/>
-        </p:nvSpPr>
-        <p:spPr>
-          <a:xfrm>
-            <a:off x="4718304" y="4498848"/>
-            <a:ext cx="2011680" cy="402336"/>
-          </a:xfrm>
-          <a:prstGeom prst="rect">
-            <a:avLst>
-              <a:gd name="adj" fmla="val 13636"/>
-            </a:avLst>
-          </a:prstGeom>
-          <a:solidFill>
-            <a:srgbClr val="EEF2FF"/>
-          </a:solidFill>
-          <a:ln w="12700">
-            <a:solidFill>
-              <a:srgbClr val="6366F1"/>
-            </a:solidFill>
-            <a:prstDash val="solid"/>
-          </a:ln>
-        </p:spPr>
-      </p:sp>
-      <p:sp>
-        <p:nvSpPr>
-          <p:cNvPr id="57" name="Text 55"/>
-          <p:cNvSpPr/>
-          <p:nvPr/>
-        </p:nvSpPr>
-        <p:spPr>
-          <a:xfrm>
-            <a:off x="4718304" y="4498848"/>
-            <a:ext cx="2011680" cy="402336"/>
-          </a:xfrm>
-          <a:prstGeom prst="rect">
-            <a:avLst/>
-          </a:prstGeom>
-          <a:noFill/>
-          <a:ln/>
-        </p:spPr>
-        <p:txBody>
-          <a:bodyPr wrap="square" lIns="0" tIns="0" rIns="0" bIns="0" rtlCol="0" anchor="ctr"/>
-          <a:lstStyle/>
-          <a:p>
-            <a:pPr algn="ctr" indent="0" marL="0">
-              <a:buNone/>
-            </a:pPr>
-            <a:r>
-              <a:rPr lang="en-US" sz="1200" b="1" dirty="0">
-                <a:solidFill>
-                  <a:srgbClr val="4338CA"/>
-                </a:solidFill>
-                <a:latin typeface="Trebuchet MS" pitchFamily="34" charset="0"/>
-                <a:ea typeface="Trebuchet MS" pitchFamily="34" charset="-122"/>
-                <a:cs typeface="Trebuchet MS" pitchFamily="34" charset="-120"/>
-              </a:rPr>
-              <a:t>freeway</a:t>
-            </a:r>
-            <a:endParaRPr lang="en-US" sz="1200" dirty="0"/>
-          </a:p>
-        </p:txBody>
-      </p:sp>
-      <p:sp>
-        <p:nvSpPr>
-          <p:cNvPr id="58" name="Shape 56"/>
-          <p:cNvSpPr/>
-          <p:nvPr/>
-        </p:nvSpPr>
-        <p:spPr>
-          <a:xfrm>
-            <a:off x="6894576" y="4498848"/>
-            <a:ext cx="2011680" cy="402336"/>
-          </a:xfrm>
-          <a:prstGeom prst="rect">
-            <a:avLst>
-              <a:gd name="adj" fmla="val 13636"/>
-            </a:avLst>
-          </a:prstGeom>
-          <a:solidFill>
-            <a:srgbClr val="EEF2FF"/>
-          </a:solidFill>
-          <a:ln w="12700">
-            <a:solidFill>
-              <a:srgbClr val="6366F1"/>
-            </a:solidFill>
-            <a:prstDash val="solid"/>
-          </a:ln>
-        </p:spPr>
-      </p:sp>
-      <p:sp>
-        <p:nvSpPr>
-          <p:cNvPr id="59" name="Text 57"/>
-          <p:cNvSpPr/>
-          <p:nvPr/>
-        </p:nvSpPr>
-        <p:spPr>
-          <a:xfrm>
-            <a:off x="6894576" y="4498848"/>
-            <a:ext cx="2011680" cy="402336"/>
-          </a:xfrm>
-          <a:prstGeom prst="rect">
-            <a:avLst/>
-          </a:prstGeom>
-          <a:noFill/>
-          <a:ln/>
-        </p:spPr>
-        <p:txBody>
-          <a:bodyPr wrap="square" lIns="0" tIns="0" rIns="0" bIns="0" rtlCol="0" anchor="ctr"/>
-          <a:lstStyle/>
-          <a:p>
-            <a:pPr algn="ctr" indent="0" marL="0">
-              <a:buNone/>
-            </a:pPr>
-            <a:r>
-              <a:rPr lang="en-US" sz="1200" b="1" dirty="0">
-                <a:solidFill>
-                  <a:srgbClr val="4338CA"/>
-                </a:solidFill>
-                <a:latin typeface="Trebuchet MS" pitchFamily="34" charset="0"/>
-                <a:ea typeface="Trebuchet MS" pitchFamily="34" charset="-122"/>
-                <a:cs typeface="Trebuchet MS" pitchFamily="34" charset="-120"/>
-              </a:rPr>
-              <a:t>stairway</a:t>
+              <a:t>way</a:t>
             </a:r>
             <a:endParaRPr lang="en-US" sz="1200" dirty="0"/>
           </a:p>
@@ -34257,7 +33393,7 @@
                 <a:ea typeface="Calibri" pitchFamily="34" charset="-122"/>
                 <a:cs typeface="Calibri" pitchFamily="34" charset="-120"/>
               </a:rPr>
-              <a:t>Word Labs  •  wordlabs.app  •  Root: 'way' = path, road, or direction</a:t>
+              <a:t>Word Labs  •  wordlabs.app  •  Root: 'way' = a path, direction or method</a:t>
             </a:r>
             <a:endParaRPr lang="en-US" sz="800" dirty="0"/>
           </a:p>
@@ -34421,7 +33557,7 @@
                 <a:ea typeface="Calibri" pitchFamily="34" charset="-122"/>
                 <a:cs typeface="Calibri" pitchFamily="34" charset="-120"/>
               </a:rPr>
-              <a:t>The core part of a word carrying its basic meaning. For example, 'way' means 'path, road, or direction'.</a:t>
+              <a:t>The core part of a word carrying its basic meaning. For example, 'way' means 'a path, direction or method'.</a:t>
             </a:r>
             <a:endParaRPr lang="en-US" sz="1350" dirty="0"/>
           </a:p>
@@ -35041,7 +34177,7 @@
                 <a:ea typeface="Calibri" pitchFamily="34" charset="-122"/>
                 <a:cs typeface="Calibri" pitchFamily="34" charset="-120"/>
               </a:rPr>
-              <a:t>Word Labs  •  wordlabs.app  •  Root: 'way' = path, road, or direction</a:t>
+              <a:t>Word Labs  •  wordlabs.app  •  Root: 'way' = a path, direction or method</a:t>
             </a:r>
             <a:endParaRPr lang="en-US" sz="800" dirty="0"/>
           </a:p>
@@ -35153,7 +34289,7 @@
                 <a:ea typeface="Calibri" pitchFamily="34" charset="-122"/>
                 <a:cs typeface="Calibri" pitchFamily="34" charset="-120"/>
               </a:rPr>
-              <a:t>1.  A gateway is a type of entrance or opening you can pass through.</a:t>
+              <a:t>1.  'way' means 'a method, road, or direction for doing something or getting somewhere'.</a:t>
             </a:r>
             <a:endParaRPr lang="en-US" sz="1300" dirty="0"/>
           </a:p>
@@ -35292,7 +34428,7 @@
                 <a:ea typeface="Calibri" pitchFamily="34" charset="-122"/>
                 <a:cs typeface="Calibri" pitchFamily="34" charset="-120"/>
               </a:rPr>
-              <a:t>2.  The morpheme 'way' comes from the Latin word 'via' meaning road.</a:t>
+              <a:t>2.  'way' means 'a musical sound made by singing'.</a:t>
             </a:r>
             <a:endParaRPr lang="en-US" sz="1300" dirty="0"/>
           </a:p>
@@ -35431,7 +34567,7 @@
                 <a:ea typeface="Calibri" pitchFamily="34" charset="-122"/>
                 <a:cs typeface="Calibri" pitchFamily="34" charset="-120"/>
               </a:rPr>
-              <a:t>3.  The word 'halfway' means you have travelled the full distance to your destination.</a:t>
+              <a:t>3.  'way' means 'a path, direction or method'.</a:t>
             </a:r>
             <a:endParaRPr lang="en-US" sz="1300" dirty="0"/>
           </a:p>
@@ -35454,11 +34590,11 @@
             </a:avLst>
           </a:prstGeom>
           <a:solidFill>
-            <a:srgbClr val="FEE2E2"/>
-          </a:solidFill>
-          <a:ln w="12700">
-            <a:solidFill>
-              <a:srgbClr val="DC2626"/>
+            <a:srgbClr val="DCFCE7"/>
+          </a:solidFill>
+          <a:ln w="12700">
+            <a:solidFill>
+              <a:srgbClr val="16A34A"/>
             </a:solidFill>
             <a:prstDash val="solid"/>
           </a:ln>
@@ -35473,284 +34609,6 @@
         <p:spPr>
           <a:xfrm>
             <a:off x="7772400" y="2596896"/>
-            <a:ext cx="1005840" cy="566928"/>
-          </a:xfrm>
-          <a:prstGeom prst="rect">
-            <a:avLst/>
-          </a:prstGeom>
-          <a:noFill/>
-          <a:ln/>
-        </p:spPr>
-        <p:txBody>
-          <a:bodyPr wrap="square" lIns="0" tIns="0" rIns="0" bIns="0" rtlCol="0" anchor="ctr"/>
-          <a:lstStyle/>
-          <a:p>
-            <a:pPr algn="ctr" indent="0" marL="0">
-              <a:buNone/>
-            </a:pPr>
-            <a:r>
-              <a:rPr lang="en-US" sz="1100" b="1" dirty="0">
-                <a:solidFill>
-                  <a:srgbClr val="DC2626"/>
-                </a:solidFill>
-                <a:latin typeface="Trebuchet MS" pitchFamily="34" charset="0"/>
-                <a:ea typeface="Trebuchet MS" pitchFamily="34" charset="-122"/>
-                <a:cs typeface="Trebuchet MS" pitchFamily="34" charset="-120"/>
-              </a:rPr>
-              <a:t>FALSE</a:t>
-            </a:r>
-            <a:endParaRPr lang="en-US" sz="1100" dirty="0"/>
-          </a:p>
-        </p:txBody>
-      </p:sp>
-      <p:sp>
-        <p:nvSpPr>
-          <p:cNvPr id="23" name="Shape 21"/>
-          <p:cNvSpPr/>
-          <p:nvPr/>
-        </p:nvSpPr>
-        <p:spPr>
-          <a:xfrm>
-            <a:off x="365760" y="3291840"/>
-            <a:ext cx="7315200" cy="566928"/>
-          </a:xfrm>
-          <a:prstGeom prst="rect">
-            <a:avLst>
-              <a:gd name="adj" fmla="val 12903"/>
-            </a:avLst>
-          </a:prstGeom>
-          <a:solidFill>
-            <a:srgbClr val="F8FAFC"/>
-          </a:solidFill>
-          <a:ln w="12700">
-            <a:solidFill>
-              <a:srgbClr val="E2E8F0"/>
-            </a:solidFill>
-            <a:prstDash val="solid"/>
-          </a:ln>
-          <a:effectLst>
-            <a:outerShdw sx="100000" sy="100000" kx="0" ky="0" algn="bl" rotWithShape="0" blurRad="101600" dist="38100" dir="8100000">
-              <a:srgbClr val="000000">
-                <a:alpha val="12000"/>
-              </a:srgbClr>
-            </a:outerShdw>
-          </a:effectLst>
-        </p:spPr>
-      </p:sp>
-      <p:sp>
-        <p:nvSpPr>
-          <p:cNvPr id="24" name="Text 22"/>
-          <p:cNvSpPr/>
-          <p:nvPr/>
-        </p:nvSpPr>
-        <p:spPr>
-          <a:xfrm>
-            <a:off x="548640" y="3291840"/>
-            <a:ext cx="6949440" cy="566928"/>
-          </a:xfrm>
-          <a:prstGeom prst="rect">
-            <a:avLst/>
-          </a:prstGeom>
-          <a:noFill/>
-          <a:ln/>
-        </p:spPr>
-        <p:txBody>
-          <a:bodyPr wrap="square" rtlCol="0" anchor="ctr"/>
-          <a:lstStyle/>
-          <a:p>
-            <a:pPr algn="l" indent="0" marL="0">
-              <a:buNone/>
-            </a:pPr>
-            <a:r>
-              <a:rPr lang="en-US" sz="1300" dirty="0">
-                <a:solidFill>
-                  <a:srgbClr val="0F172A"/>
-                </a:solidFill>
-                <a:latin typeface="Calibri" pitchFamily="34" charset="0"/>
-                <a:ea typeface="Calibri" pitchFamily="34" charset="-122"/>
-                <a:cs typeface="Calibri" pitchFamily="34" charset="-120"/>
-              </a:rPr>
-              <a:t>4.  A runway is a path used by aeroplanes when taking off or landing.</a:t>
-            </a:r>
-            <a:endParaRPr lang="en-US" sz="1300" dirty="0"/>
-          </a:p>
-        </p:txBody>
-      </p:sp>
-      <p:sp>
-        <p:nvSpPr>
-          <p:cNvPr id="25" name="Shape 23"/>
-          <p:cNvSpPr/>
-          <p:nvPr/>
-        </p:nvSpPr>
-        <p:spPr>
-          <a:xfrm>
-            <a:off x="7772400" y="3291840"/>
-            <a:ext cx="1005840" cy="566928"/>
-          </a:xfrm>
-          <a:prstGeom prst="rect">
-            <a:avLst>
-              <a:gd name="adj" fmla="val 12903"/>
-            </a:avLst>
-          </a:prstGeom>
-          <a:solidFill>
-            <a:srgbClr val="DCFCE7"/>
-          </a:solidFill>
-          <a:ln w="12700">
-            <a:solidFill>
-              <a:srgbClr val="16A34A"/>
-            </a:solidFill>
-            <a:prstDash val="solid"/>
-          </a:ln>
-        </p:spPr>
-      </p:sp>
-      <p:sp>
-        <p:nvSpPr>
-          <p:cNvPr id="26" name="Text 24"/>
-          <p:cNvSpPr/>
-          <p:nvPr/>
-        </p:nvSpPr>
-        <p:spPr>
-          <a:xfrm>
-            <a:off x="7772400" y="3291840"/>
-            <a:ext cx="1005840" cy="566928"/>
-          </a:xfrm>
-          <a:prstGeom prst="rect">
-            <a:avLst/>
-          </a:prstGeom>
-          <a:noFill/>
-          <a:ln/>
-        </p:spPr>
-        <p:txBody>
-          <a:bodyPr wrap="square" lIns="0" tIns="0" rIns="0" bIns="0" rtlCol="0" anchor="ctr"/>
-          <a:lstStyle/>
-          <a:p>
-            <a:pPr algn="ctr" indent="0" marL="0">
-              <a:buNone/>
-            </a:pPr>
-            <a:r>
-              <a:rPr lang="en-US" sz="1100" b="1" dirty="0">
-                <a:solidFill>
-                  <a:srgbClr val="16A34A"/>
-                </a:solidFill>
-                <a:latin typeface="Trebuchet MS" pitchFamily="34" charset="0"/>
-                <a:ea typeface="Trebuchet MS" pitchFamily="34" charset="-122"/>
-                <a:cs typeface="Trebuchet MS" pitchFamily="34" charset="-120"/>
-              </a:rPr>
-              <a:t>TRUE</a:t>
-            </a:r>
-            <a:endParaRPr lang="en-US" sz="1100" dirty="0"/>
-          </a:p>
-        </p:txBody>
-      </p:sp>
-      <p:sp>
-        <p:nvSpPr>
-          <p:cNvPr id="27" name="Shape 25"/>
-          <p:cNvSpPr/>
-          <p:nvPr/>
-        </p:nvSpPr>
-        <p:spPr>
-          <a:xfrm>
-            <a:off x="365760" y="3986784"/>
-            <a:ext cx="7315200" cy="566928"/>
-          </a:xfrm>
-          <a:prstGeom prst="rect">
-            <a:avLst>
-              <a:gd name="adj" fmla="val 12903"/>
-            </a:avLst>
-          </a:prstGeom>
-          <a:solidFill>
-            <a:srgbClr val="F8FAFC"/>
-          </a:solidFill>
-          <a:ln w="12700">
-            <a:solidFill>
-              <a:srgbClr val="E2E8F0"/>
-            </a:solidFill>
-            <a:prstDash val="solid"/>
-          </a:ln>
-          <a:effectLst>
-            <a:outerShdw sx="100000" sy="100000" kx="0" ky="0" algn="bl" rotWithShape="0" blurRad="101600" dist="38100" dir="8100000">
-              <a:srgbClr val="000000">
-                <a:alpha val="12000"/>
-              </a:srgbClr>
-            </a:outerShdw>
-          </a:effectLst>
-        </p:spPr>
-      </p:sp>
-      <p:sp>
-        <p:nvSpPr>
-          <p:cNvPr id="28" name="Text 26"/>
-          <p:cNvSpPr/>
-          <p:nvPr/>
-        </p:nvSpPr>
-        <p:spPr>
-          <a:xfrm>
-            <a:off x="548640" y="3986784"/>
-            <a:ext cx="6949440" cy="566928"/>
-          </a:xfrm>
-          <a:prstGeom prst="rect">
-            <a:avLst/>
-          </a:prstGeom>
-          <a:noFill/>
-          <a:ln/>
-        </p:spPr>
-        <p:txBody>
-          <a:bodyPr wrap="square" rtlCol="0" anchor="ctr"/>
-          <a:lstStyle/>
-          <a:p>
-            <a:pPr algn="l" indent="0" marL="0">
-              <a:buNone/>
-            </a:pPr>
-            <a:r>
-              <a:rPr lang="en-US" sz="1300" dirty="0">
-                <a:solidFill>
-                  <a:srgbClr val="0F172A"/>
-                </a:solidFill>
-                <a:latin typeface="Calibri" pitchFamily="34" charset="0"/>
-                <a:ea typeface="Calibri" pitchFamily="34" charset="-122"/>
-                <a:cs typeface="Calibri" pitchFamily="34" charset="-120"/>
-              </a:rPr>
-              <a:t>5.  The word 'subway' contains the root 'way' meaning path or route.</a:t>
-            </a:r>
-            <a:endParaRPr lang="en-US" sz="1300" dirty="0"/>
-          </a:p>
-        </p:txBody>
-      </p:sp>
-      <p:sp>
-        <p:nvSpPr>
-          <p:cNvPr id="29" name="Shape 27"/>
-          <p:cNvSpPr/>
-          <p:nvPr/>
-        </p:nvSpPr>
-        <p:spPr>
-          <a:xfrm>
-            <a:off x="7772400" y="3986784"/>
-            <a:ext cx="1005840" cy="566928"/>
-          </a:xfrm>
-          <a:prstGeom prst="rect">
-            <a:avLst>
-              <a:gd name="adj" fmla="val 12903"/>
-            </a:avLst>
-          </a:prstGeom>
-          <a:solidFill>
-            <a:srgbClr val="DCFCE7"/>
-          </a:solidFill>
-          <a:ln w="12700">
-            <a:solidFill>
-              <a:srgbClr val="16A34A"/>
-            </a:solidFill>
-            <a:prstDash val="solid"/>
-          </a:ln>
-        </p:spPr>
-      </p:sp>
-      <p:sp>
-        <p:nvSpPr>
-          <p:cNvPr id="30" name="Text 28"/>
-          <p:cNvSpPr/>
-          <p:nvPr/>
-        </p:nvSpPr>
-        <p:spPr>
-          <a:xfrm>
-            <a:off x="7772400" y="3986784"/>
             <a:ext cx="1005840" cy="566928"/>
           </a:xfrm>
           <a:prstGeom prst="rect">
@@ -36067,7 +34925,7 @@
                 <a:ea typeface="Calibri" pitchFamily="34" charset="-122"/>
                 <a:cs typeface="Calibri" pitchFamily="34" charset="-120"/>
               </a:rPr>
-              <a:t>Word Labs  •  wordlabs.app  •  Root: 'way' = path, road, or direction</a:t>
+              <a:t>Word Labs  •  wordlabs.app  •  Root: 'way' = a path, direction or method</a:t>
             </a:r>
             <a:endParaRPr lang="en-US" sz="800" dirty="0"/>
           </a:p>
@@ -36204,7 +35062,7 @@
                 <a:ea typeface="Trebuchet MS" pitchFamily="34" charset="-122"/>
                 <a:cs typeface="Trebuchet MS" pitchFamily="34" charset="-120"/>
               </a:rPr>
-              <a:t>path, road, or direction</a:t>
+              <a:t>a path, direction or method</a:t>
             </a:r>
             <a:endParaRPr lang="en-US" sz="2000" dirty="0"/>
           </a:p>
@@ -36243,7 +35101,7 @@
                 <a:ea typeface="Calibri" pitchFamily="34" charset="-122"/>
                 <a:cs typeface="Calibri" pitchFamily="34" charset="-120"/>
               </a:rPr>
-              <a:t>Origin: Old English: weg</a:t>
+              <a:t>Origin: Core English root</a:t>
             </a:r>
             <a:endParaRPr lang="en-US" sz="1100" dirty="0"/>
           </a:p>
@@ -36348,403 +35206,7 @@
                 <a:ea typeface="Trebuchet MS" pitchFamily="34" charset="-122"/>
                 <a:cs typeface="Trebuchet MS" pitchFamily="34" charset="-120"/>
               </a:rPr>
-              <a:t>pathway</a:t>
-            </a:r>
-            <a:endParaRPr lang="en-US" sz="1300" dirty="0"/>
-          </a:p>
-        </p:txBody>
-      </p:sp>
-      <p:sp>
-        <p:nvSpPr>
-          <p:cNvPr id="18" name="Shape 16"/>
-          <p:cNvSpPr/>
-          <p:nvPr/>
-        </p:nvSpPr>
-        <p:spPr>
-          <a:xfrm>
-            <a:off x="2514600" y="2743200"/>
-            <a:ext cx="2011680" cy="502920"/>
-          </a:xfrm>
-          <a:prstGeom prst="rect">
-            <a:avLst>
-              <a:gd name="adj" fmla="val 14545"/>
-            </a:avLst>
-          </a:prstGeom>
-          <a:solidFill>
-            <a:srgbClr val="EEF2FF"/>
-          </a:solidFill>
-          <a:ln w="12700">
-            <a:solidFill>
-              <a:srgbClr val="6366F1"/>
-            </a:solidFill>
-            <a:prstDash val="solid"/>
-          </a:ln>
-        </p:spPr>
-      </p:sp>
-      <p:sp>
-        <p:nvSpPr>
-          <p:cNvPr id="19" name="Text 17"/>
-          <p:cNvSpPr/>
-          <p:nvPr/>
-        </p:nvSpPr>
-        <p:spPr>
-          <a:xfrm>
-            <a:off x="2514600" y="2743200"/>
-            <a:ext cx="2011680" cy="502920"/>
-          </a:xfrm>
-          <a:prstGeom prst="rect">
-            <a:avLst/>
-          </a:prstGeom>
-          <a:noFill/>
-          <a:ln/>
-        </p:spPr>
-        <p:txBody>
-          <a:bodyPr wrap="square" lIns="0" tIns="0" rIns="0" bIns="0" rtlCol="0" anchor="ctr"/>
-          <a:lstStyle/>
-          <a:p>
-            <a:pPr algn="ctr" indent="0" marL="0">
-              <a:buNone/>
-            </a:pPr>
-            <a:r>
-              <a:rPr lang="en-US" sz="1300" b="1" dirty="0">
-                <a:solidFill>
-                  <a:srgbClr val="4338CA"/>
-                </a:solidFill>
-                <a:latin typeface="Trebuchet MS" pitchFamily="34" charset="0"/>
-                <a:ea typeface="Trebuchet MS" pitchFamily="34" charset="-122"/>
-                <a:cs typeface="Trebuchet MS" pitchFamily="34" charset="-120"/>
-              </a:rPr>
-              <a:t>gateway</a:t>
-            </a:r>
-            <a:endParaRPr lang="en-US" sz="1300" dirty="0"/>
-          </a:p>
-        </p:txBody>
-      </p:sp>
-      <p:sp>
-        <p:nvSpPr>
-          <p:cNvPr id="20" name="Shape 18"/>
-          <p:cNvSpPr/>
-          <p:nvPr/>
-        </p:nvSpPr>
-        <p:spPr>
-          <a:xfrm>
-            <a:off x="4663440" y="2743200"/>
-            <a:ext cx="2011680" cy="502920"/>
-          </a:xfrm>
-          <a:prstGeom prst="rect">
-            <a:avLst>
-              <a:gd name="adj" fmla="val 14545"/>
-            </a:avLst>
-          </a:prstGeom>
-          <a:solidFill>
-            <a:srgbClr val="EEF2FF"/>
-          </a:solidFill>
-          <a:ln w="12700">
-            <a:solidFill>
-              <a:srgbClr val="6366F1"/>
-            </a:solidFill>
-            <a:prstDash val="solid"/>
-          </a:ln>
-        </p:spPr>
-      </p:sp>
-      <p:sp>
-        <p:nvSpPr>
-          <p:cNvPr id="21" name="Text 19"/>
-          <p:cNvSpPr/>
-          <p:nvPr/>
-        </p:nvSpPr>
-        <p:spPr>
-          <a:xfrm>
-            <a:off x="4663440" y="2743200"/>
-            <a:ext cx="2011680" cy="502920"/>
-          </a:xfrm>
-          <a:prstGeom prst="rect">
-            <a:avLst/>
-          </a:prstGeom>
-          <a:noFill/>
-          <a:ln/>
-        </p:spPr>
-        <p:txBody>
-          <a:bodyPr wrap="square" lIns="0" tIns="0" rIns="0" bIns="0" rtlCol="0" anchor="ctr"/>
-          <a:lstStyle/>
-          <a:p>
-            <a:pPr algn="ctr" indent="0" marL="0">
-              <a:buNone/>
-            </a:pPr>
-            <a:r>
-              <a:rPr lang="en-US" sz="1300" b="1" dirty="0">
-                <a:solidFill>
-                  <a:srgbClr val="4338CA"/>
-                </a:solidFill>
-                <a:latin typeface="Trebuchet MS" pitchFamily="34" charset="0"/>
-                <a:ea typeface="Trebuchet MS" pitchFamily="34" charset="-122"/>
-                <a:cs typeface="Trebuchet MS" pitchFamily="34" charset="-120"/>
-              </a:rPr>
-              <a:t>subway</a:t>
-            </a:r>
-            <a:endParaRPr lang="en-US" sz="1300" dirty="0"/>
-          </a:p>
-        </p:txBody>
-      </p:sp>
-      <p:sp>
-        <p:nvSpPr>
-          <p:cNvPr id="22" name="Shape 20"/>
-          <p:cNvSpPr/>
-          <p:nvPr/>
-        </p:nvSpPr>
-        <p:spPr>
-          <a:xfrm>
-            <a:off x="6812280" y="2743200"/>
-            <a:ext cx="2011680" cy="502920"/>
-          </a:xfrm>
-          <a:prstGeom prst="rect">
-            <a:avLst>
-              <a:gd name="adj" fmla="val 14545"/>
-            </a:avLst>
-          </a:prstGeom>
-          <a:solidFill>
-            <a:srgbClr val="EEF2FF"/>
-          </a:solidFill>
-          <a:ln w="12700">
-            <a:solidFill>
-              <a:srgbClr val="6366F1"/>
-            </a:solidFill>
-            <a:prstDash val="solid"/>
-          </a:ln>
-        </p:spPr>
-      </p:sp>
-      <p:sp>
-        <p:nvSpPr>
-          <p:cNvPr id="23" name="Text 21"/>
-          <p:cNvSpPr/>
-          <p:nvPr/>
-        </p:nvSpPr>
-        <p:spPr>
-          <a:xfrm>
-            <a:off x="6812280" y="2743200"/>
-            <a:ext cx="2011680" cy="502920"/>
-          </a:xfrm>
-          <a:prstGeom prst="rect">
-            <a:avLst/>
-          </a:prstGeom>
-          <a:noFill/>
-          <a:ln/>
-        </p:spPr>
-        <p:txBody>
-          <a:bodyPr wrap="square" lIns="0" tIns="0" rIns="0" bIns="0" rtlCol="0" anchor="ctr"/>
-          <a:lstStyle/>
-          <a:p>
-            <a:pPr algn="ctr" indent="0" marL="0">
-              <a:buNone/>
-            </a:pPr>
-            <a:r>
-              <a:rPr lang="en-US" sz="1300" b="1" dirty="0">
-                <a:solidFill>
-                  <a:srgbClr val="4338CA"/>
-                </a:solidFill>
-                <a:latin typeface="Trebuchet MS" pitchFamily="34" charset="0"/>
-                <a:ea typeface="Trebuchet MS" pitchFamily="34" charset="-122"/>
-                <a:cs typeface="Trebuchet MS" pitchFamily="34" charset="-120"/>
-              </a:rPr>
-              <a:t>halfway</a:t>
-            </a:r>
-            <a:endParaRPr lang="en-US" sz="1300" dirty="0"/>
-          </a:p>
-        </p:txBody>
-      </p:sp>
-      <p:sp>
-        <p:nvSpPr>
-          <p:cNvPr id="24" name="Shape 22"/>
-          <p:cNvSpPr/>
-          <p:nvPr/>
-        </p:nvSpPr>
-        <p:spPr>
-          <a:xfrm>
-            <a:off x="365760" y="3401568"/>
-            <a:ext cx="2011680" cy="502920"/>
-          </a:xfrm>
-          <a:prstGeom prst="rect">
-            <a:avLst>
-              <a:gd name="adj" fmla="val 14545"/>
-            </a:avLst>
-          </a:prstGeom>
-          <a:solidFill>
-            <a:srgbClr val="EEF2FF"/>
-          </a:solidFill>
-          <a:ln w="12700">
-            <a:solidFill>
-              <a:srgbClr val="6366F1"/>
-            </a:solidFill>
-            <a:prstDash val="solid"/>
-          </a:ln>
-        </p:spPr>
-      </p:sp>
-      <p:sp>
-        <p:nvSpPr>
-          <p:cNvPr id="25" name="Text 23"/>
-          <p:cNvSpPr/>
-          <p:nvPr/>
-        </p:nvSpPr>
-        <p:spPr>
-          <a:xfrm>
-            <a:off x="365760" y="3401568"/>
-            <a:ext cx="2011680" cy="502920"/>
-          </a:xfrm>
-          <a:prstGeom prst="rect">
-            <a:avLst/>
-          </a:prstGeom>
-          <a:noFill/>
-          <a:ln/>
-        </p:spPr>
-        <p:txBody>
-          <a:bodyPr wrap="square" lIns="0" tIns="0" rIns="0" bIns="0" rtlCol="0" anchor="ctr"/>
-          <a:lstStyle/>
-          <a:p>
-            <a:pPr algn="ctr" indent="0" marL="0">
-              <a:buNone/>
-            </a:pPr>
-            <a:r>
-              <a:rPr lang="en-US" sz="1300" b="1" dirty="0">
-                <a:solidFill>
-                  <a:srgbClr val="4338CA"/>
-                </a:solidFill>
-                <a:latin typeface="Trebuchet MS" pitchFamily="34" charset="0"/>
-                <a:ea typeface="Trebuchet MS" pitchFamily="34" charset="-122"/>
-                <a:cs typeface="Trebuchet MS" pitchFamily="34" charset="-120"/>
-              </a:rPr>
-              <a:t>doorway</a:t>
-            </a:r>
-            <a:endParaRPr lang="en-US" sz="1300" dirty="0"/>
-          </a:p>
-        </p:txBody>
-      </p:sp>
-      <p:sp>
-        <p:nvSpPr>
-          <p:cNvPr id="26" name="Shape 24"/>
-          <p:cNvSpPr/>
-          <p:nvPr/>
-        </p:nvSpPr>
-        <p:spPr>
-          <a:xfrm>
-            <a:off x="2514600" y="3401568"/>
-            <a:ext cx="2011680" cy="502920"/>
-          </a:xfrm>
-          <a:prstGeom prst="rect">
-            <a:avLst>
-              <a:gd name="adj" fmla="val 14545"/>
-            </a:avLst>
-          </a:prstGeom>
-          <a:solidFill>
-            <a:srgbClr val="EEF2FF"/>
-          </a:solidFill>
-          <a:ln w="12700">
-            <a:solidFill>
-              <a:srgbClr val="6366F1"/>
-            </a:solidFill>
-            <a:prstDash val="solid"/>
-          </a:ln>
-        </p:spPr>
-      </p:sp>
-      <p:sp>
-        <p:nvSpPr>
-          <p:cNvPr id="27" name="Text 25"/>
-          <p:cNvSpPr/>
-          <p:nvPr/>
-        </p:nvSpPr>
-        <p:spPr>
-          <a:xfrm>
-            <a:off x="2514600" y="3401568"/>
-            <a:ext cx="2011680" cy="502920"/>
-          </a:xfrm>
-          <a:prstGeom prst="rect">
-            <a:avLst/>
-          </a:prstGeom>
-          <a:noFill/>
-          <a:ln/>
-        </p:spPr>
-        <p:txBody>
-          <a:bodyPr wrap="square" lIns="0" tIns="0" rIns="0" bIns="0" rtlCol="0" anchor="ctr"/>
-          <a:lstStyle/>
-          <a:p>
-            <a:pPr algn="ctr" indent="0" marL="0">
-              <a:buNone/>
-            </a:pPr>
-            <a:r>
-              <a:rPr lang="en-US" sz="1300" b="1" dirty="0">
-                <a:solidFill>
-                  <a:srgbClr val="4338CA"/>
-                </a:solidFill>
-                <a:latin typeface="Trebuchet MS" pitchFamily="34" charset="0"/>
-                <a:ea typeface="Trebuchet MS" pitchFamily="34" charset="-122"/>
-                <a:cs typeface="Trebuchet MS" pitchFamily="34" charset="-120"/>
-              </a:rPr>
-              <a:t>runway</a:t>
-            </a:r>
-            <a:endParaRPr lang="en-US" sz="1300" dirty="0"/>
-          </a:p>
-        </p:txBody>
-      </p:sp>
-      <p:sp>
-        <p:nvSpPr>
-          <p:cNvPr id="28" name="Shape 26"/>
-          <p:cNvSpPr/>
-          <p:nvPr/>
-        </p:nvSpPr>
-        <p:spPr>
-          <a:xfrm>
-            <a:off x="4663440" y="3401568"/>
-            <a:ext cx="2011680" cy="502920"/>
-          </a:xfrm>
-          <a:prstGeom prst="rect">
-            <a:avLst>
-              <a:gd name="adj" fmla="val 14545"/>
-            </a:avLst>
-          </a:prstGeom>
-          <a:solidFill>
-            <a:srgbClr val="EEF2FF"/>
-          </a:solidFill>
-          <a:ln w="12700">
-            <a:solidFill>
-              <a:srgbClr val="6366F1"/>
-            </a:solidFill>
-            <a:prstDash val="solid"/>
-          </a:ln>
-        </p:spPr>
-      </p:sp>
-      <p:sp>
-        <p:nvSpPr>
-          <p:cNvPr id="29" name="Text 27"/>
-          <p:cNvSpPr/>
-          <p:nvPr/>
-        </p:nvSpPr>
-        <p:spPr>
-          <a:xfrm>
-            <a:off x="4663440" y="3401568"/>
-            <a:ext cx="2011680" cy="502920"/>
-          </a:xfrm>
-          <a:prstGeom prst="rect">
-            <a:avLst/>
-          </a:prstGeom>
-          <a:noFill/>
-          <a:ln/>
-        </p:spPr>
-        <p:txBody>
-          <a:bodyPr wrap="square" lIns="0" tIns="0" rIns="0" bIns="0" rtlCol="0" anchor="ctr"/>
-          <a:lstStyle/>
-          <a:p>
-            <a:pPr algn="ctr" indent="0" marL="0">
-              <a:buNone/>
-            </a:pPr>
-            <a:r>
-              <a:rPr lang="en-US" sz="1300" b="1" dirty="0">
-                <a:solidFill>
-                  <a:srgbClr val="4338CA"/>
-                </a:solidFill>
-                <a:latin typeface="Trebuchet MS" pitchFamily="34" charset="0"/>
-                <a:ea typeface="Trebuchet MS" pitchFamily="34" charset="-122"/>
-                <a:cs typeface="Trebuchet MS" pitchFamily="34" charset="-120"/>
-              </a:rPr>
-              <a:t>freeway</a:t>
+              <a:t>way</a:t>
             </a:r>
             <a:endParaRPr lang="en-US" sz="1300" dirty="0"/>
           </a:p>
@@ -37036,7 +35498,7 @@
                 <a:ea typeface="Calibri" pitchFamily="34" charset="-122"/>
                 <a:cs typeface="Calibri" pitchFamily="34" charset="-120"/>
               </a:rPr>
-              <a:t>Word Labs  •  wordlabs.app  •  Root: 'way' = path, road, or direction</a:t>
+              <a:t>Word Labs  •  wordlabs.app  •  Root: 'way' = a path, direction or method</a:t>
             </a:r>
             <a:endParaRPr lang="en-US" sz="800" dirty="0"/>
           </a:p>
@@ -37337,7 +35799,7 @@
                 <a:ea typeface="Trebuchet MS" pitchFamily="34" charset="-122"/>
                 <a:cs typeface="Trebuchet MS" pitchFamily="34" charset="-120"/>
               </a:rPr>
-              <a:t>gate-</a:t>
+              <a:t>a-</a:t>
             </a:r>
             <a:endParaRPr lang="en-US" sz="1300" dirty="0"/>
           </a:p>
@@ -37465,7 +35927,7 @@
                 <a:ea typeface="Trebuchet MS" pitchFamily="34" charset="-122"/>
                 <a:cs typeface="Trebuchet MS" pitchFamily="34" charset="-120"/>
               </a:rPr>
-              <a:t>--s</a:t>
+              <a:t>-s</a:t>
             </a:r>
             <a:endParaRPr lang="en-US" sz="1300" dirty="0"/>
           </a:p>
@@ -37529,7 +35991,7 @@
                 <a:ea typeface="Trebuchet MS" pitchFamily="34" charset="-122"/>
                 <a:cs typeface="Trebuchet MS" pitchFamily="34" charset="-120"/>
               </a:rPr>
-              <a:t>door-</a:t>
+              <a:t>mid-</a:t>
             </a:r>
             <a:endParaRPr lang="en-US" sz="1300" dirty="0"/>
           </a:p>
@@ -37575,7 +36037,7 @@
             <a:avLst/>
           </a:prstGeom>
           <a:solidFill>
-            <a:srgbClr val="FCE7F3"/>
+            <a:srgbClr val="F1F5F9"/>
           </a:solidFill>
           <a:ln w="12700">
             <a:solidFill>
@@ -37587,18 +36049,43 @@
       </p:sp>
       <p:sp>
         <p:nvSpPr>
-          <p:cNvPr id="27" name="Text 25"/>
-          <p:cNvSpPr/>
-          <p:nvPr/>
-        </p:nvSpPr>
-        <p:spPr>
-          <a:xfrm>
-            <a:off x="5943600" y="2212848"/>
+          <p:cNvPr id="27" name="Shape 25"/>
+          <p:cNvSpPr/>
+          <p:nvPr/>
+        </p:nvSpPr>
+        <p:spPr>
+          <a:xfrm>
+            <a:off x="640080" y="2670048"/>
             <a:ext cx="1463040" cy="420624"/>
           </a:xfrm>
           <a:prstGeom prst="rect">
             <a:avLst/>
           </a:prstGeom>
+          <a:solidFill>
+            <a:srgbClr val="DDD6FE"/>
+          </a:solidFill>
+          <a:ln w="12700">
+            <a:solidFill>
+              <a:srgbClr val="E5E7EB"/>
+            </a:solidFill>
+            <a:prstDash val="solid"/>
+          </a:ln>
+        </p:spPr>
+      </p:sp>
+      <p:sp>
+        <p:nvSpPr>
+          <p:cNvPr id="28" name="Text 26"/>
+          <p:cNvSpPr/>
+          <p:nvPr/>
+        </p:nvSpPr>
+        <p:spPr>
+          <a:xfrm>
+            <a:off x="640080" y="2670048"/>
+            <a:ext cx="1463040" cy="420624"/>
+          </a:xfrm>
+          <a:prstGeom prst="rect">
+            <a:avLst/>
+          </a:prstGeom>
           <a:noFill/>
           <a:ln/>
         </p:spPr>
@@ -37612,13 +36099,13 @@
             <a:r>
               <a:rPr lang="en-US" sz="1300" b="1" dirty="0">
                 <a:solidFill>
-                  <a:srgbClr val="9D174D"/>
+                  <a:srgbClr val="4C1D95"/>
                 </a:solidFill>
                 <a:latin typeface="Trebuchet MS" pitchFamily="34" charset="0"/>
                 <a:ea typeface="Trebuchet MS" pitchFamily="34" charset="-122"/>
                 <a:cs typeface="Trebuchet MS" pitchFamily="34" charset="-120"/>
               </a:rPr>
-              <a:t>--ed</a:t>
+              <a:t>sub-</a:t>
             </a:r>
             <a:endParaRPr lang="en-US" sz="1300" dirty="0"/>
           </a:p>
@@ -37626,19 +36113,69 @@
       </p:sp>
       <p:sp>
         <p:nvSpPr>
-          <p:cNvPr id="28" name="Shape 26"/>
-          <p:cNvSpPr/>
-          <p:nvPr/>
-        </p:nvSpPr>
-        <p:spPr>
-          <a:xfrm>
-            <a:off x="640080" y="2670048"/>
+          <p:cNvPr id="29" name="Shape 27"/>
+          <p:cNvSpPr/>
+          <p:nvPr/>
+        </p:nvSpPr>
+        <p:spPr>
+          <a:xfrm>
+            <a:off x="3291840" y="2670048"/>
+            <a:ext cx="1645920" cy="420624"/>
+          </a:xfrm>
+          <a:prstGeom prst="rect">
+            <a:avLst/>
+          </a:prstGeom>
+          <a:solidFill>
+            <a:srgbClr val="F8FAFC"/>
+          </a:solidFill>
+          <a:ln w="12700">
+            <a:solidFill>
+              <a:srgbClr val="E5E7EB"/>
+            </a:solidFill>
+            <a:prstDash val="solid"/>
+          </a:ln>
+        </p:spPr>
+      </p:sp>
+      <p:sp>
+        <p:nvSpPr>
+          <p:cNvPr id="30" name="Shape 28"/>
+          <p:cNvSpPr/>
+          <p:nvPr/>
+        </p:nvSpPr>
+        <p:spPr>
+          <a:xfrm>
+            <a:off x="5943600" y="2670048"/>
             <a:ext cx="1463040" cy="420624"/>
           </a:xfrm>
           <a:prstGeom prst="rect">
             <a:avLst/>
           </a:prstGeom>
           <a:solidFill>
+            <a:srgbClr val="F8FAFC"/>
+          </a:solidFill>
+          <a:ln w="12700">
+            <a:solidFill>
+              <a:srgbClr val="E5E7EB"/>
+            </a:solidFill>
+            <a:prstDash val="solid"/>
+          </a:ln>
+        </p:spPr>
+      </p:sp>
+      <p:sp>
+        <p:nvSpPr>
+          <p:cNvPr id="31" name="Shape 29"/>
+          <p:cNvSpPr/>
+          <p:nvPr/>
+        </p:nvSpPr>
+        <p:spPr>
+          <a:xfrm>
+            <a:off x="640080" y="3127248"/>
+            <a:ext cx="1463040" cy="420624"/>
+          </a:xfrm>
+          <a:prstGeom prst="rect">
+            <a:avLst/>
+          </a:prstGeom>
+          <a:solidFill>
             <a:srgbClr val="DDD6FE"/>
           </a:solidFill>
           <a:ln w="12700">
@@ -37651,13 +36188,13 @@
       </p:sp>
       <p:sp>
         <p:nvSpPr>
-          <p:cNvPr id="29" name="Text 27"/>
-          <p:cNvSpPr/>
-          <p:nvPr/>
-        </p:nvSpPr>
-        <p:spPr>
-          <a:xfrm>
-            <a:off x="640080" y="2670048"/>
+          <p:cNvPr id="32" name="Text 30"/>
+          <p:cNvSpPr/>
+          <p:nvPr/>
+        </p:nvSpPr>
+        <p:spPr>
+          <a:xfrm>
+            <a:off x="640080" y="3127248"/>
             <a:ext cx="1463040" cy="420624"/>
           </a:xfrm>
           <a:prstGeom prst="rect">
@@ -37682,7 +36219,7 @@
                 <a:ea typeface="Trebuchet MS" pitchFamily="34" charset="-122"/>
                 <a:cs typeface="Trebuchet MS" pitchFamily="34" charset="-120"/>
               </a:rPr>
-              <a:t>path-</a:t>
+              <a:t>under-</a:t>
             </a:r>
             <a:endParaRPr lang="en-US" sz="1300" dirty="0"/>
           </a:p>
@@ -37690,160 +36227,7 @@
       </p:sp>
       <p:sp>
         <p:nvSpPr>
-          <p:cNvPr id="30" name="Shape 28"/>
-          <p:cNvSpPr/>
-          <p:nvPr/>
-        </p:nvSpPr>
-        <p:spPr>
-          <a:xfrm>
-            <a:off x="3291840" y="2670048"/>
-            <a:ext cx="1645920" cy="420624"/>
-          </a:xfrm>
-          <a:prstGeom prst="rect">
-            <a:avLst/>
-          </a:prstGeom>
-          <a:solidFill>
-            <a:srgbClr val="F8FAFC"/>
-          </a:solidFill>
-          <a:ln w="12700">
-            <a:solidFill>
-              <a:srgbClr val="E5E7EB"/>
-            </a:solidFill>
-            <a:prstDash val="solid"/>
-          </a:ln>
-        </p:spPr>
-      </p:sp>
-      <p:sp>
-        <p:nvSpPr>
-          <p:cNvPr id="31" name="Shape 29"/>
-          <p:cNvSpPr/>
-          <p:nvPr/>
-        </p:nvSpPr>
-        <p:spPr>
-          <a:xfrm>
-            <a:off x="5943600" y="2670048"/>
-            <a:ext cx="1463040" cy="420624"/>
-          </a:xfrm>
-          <a:prstGeom prst="rect">
-            <a:avLst/>
-          </a:prstGeom>
-          <a:solidFill>
-            <a:srgbClr val="FCE7F3"/>
-          </a:solidFill>
-          <a:ln w="12700">
-            <a:solidFill>
-              <a:srgbClr val="E5E7EB"/>
-            </a:solidFill>
-            <a:prstDash val="solid"/>
-          </a:ln>
-        </p:spPr>
-      </p:sp>
-      <p:sp>
-        <p:nvSpPr>
-          <p:cNvPr id="32" name="Text 30"/>
-          <p:cNvSpPr/>
-          <p:nvPr/>
-        </p:nvSpPr>
-        <p:spPr>
-          <a:xfrm>
-            <a:off x="5943600" y="2670048"/>
-            <a:ext cx="1463040" cy="420624"/>
-          </a:xfrm>
-          <a:prstGeom prst="rect">
-            <a:avLst/>
-          </a:prstGeom>
-          <a:noFill/>
-          <a:ln/>
-        </p:spPr>
-        <p:txBody>
-          <a:bodyPr wrap="square" lIns="0" tIns="0" rIns="0" bIns="0" rtlCol="0" anchor="ctr"/>
-          <a:lstStyle/>
-          <a:p>
-            <a:pPr algn="ctr" indent="0" marL="0">
-              <a:buNone/>
-            </a:pPr>
-            <a:r>
-              <a:rPr lang="en-US" sz="1300" b="1" dirty="0">
-                <a:solidFill>
-                  <a:srgbClr val="9D174D"/>
-                </a:solidFill>
-                <a:latin typeface="Trebuchet MS" pitchFamily="34" charset="0"/>
-                <a:ea typeface="Trebuchet MS" pitchFamily="34" charset="-122"/>
-                <a:cs typeface="Trebuchet MS" pitchFamily="34" charset="-120"/>
-              </a:rPr>
-              <a:t>--ing</a:t>
-            </a:r>
-            <a:endParaRPr lang="en-US" sz="1300" dirty="0"/>
-          </a:p>
-        </p:txBody>
-      </p:sp>
-      <p:sp>
-        <p:nvSpPr>
           <p:cNvPr id="33" name="Shape 31"/>
-          <p:cNvSpPr/>
-          <p:nvPr/>
-        </p:nvSpPr>
-        <p:spPr>
-          <a:xfrm>
-            <a:off x="640080" y="3127248"/>
-            <a:ext cx="1463040" cy="420624"/>
-          </a:xfrm>
-          <a:prstGeom prst="rect">
-            <a:avLst/>
-          </a:prstGeom>
-          <a:solidFill>
-            <a:srgbClr val="DDD6FE"/>
-          </a:solidFill>
-          <a:ln w="12700">
-            <a:solidFill>
-              <a:srgbClr val="E5E7EB"/>
-            </a:solidFill>
-            <a:prstDash val="solid"/>
-          </a:ln>
-        </p:spPr>
-      </p:sp>
-      <p:sp>
-        <p:nvSpPr>
-          <p:cNvPr id="34" name="Text 32"/>
-          <p:cNvSpPr/>
-          <p:nvPr/>
-        </p:nvSpPr>
-        <p:spPr>
-          <a:xfrm>
-            <a:off x="640080" y="3127248"/>
-            <a:ext cx="1463040" cy="420624"/>
-          </a:xfrm>
-          <a:prstGeom prst="rect">
-            <a:avLst/>
-          </a:prstGeom>
-          <a:noFill/>
-          <a:ln/>
-        </p:spPr>
-        <p:txBody>
-          <a:bodyPr wrap="square" lIns="0" tIns="0" rIns="0" bIns="0" rtlCol="0" anchor="ctr"/>
-          <a:lstStyle/>
-          <a:p>
-            <a:pPr algn="ctr" indent="0" marL="0">
-              <a:buNone/>
-            </a:pPr>
-            <a:r>
-              <a:rPr lang="en-US" sz="1300" b="1" dirty="0">
-                <a:solidFill>
-                  <a:srgbClr val="4C1D95"/>
-                </a:solidFill>
-                <a:latin typeface="Trebuchet MS" pitchFamily="34" charset="0"/>
-                <a:ea typeface="Trebuchet MS" pitchFamily="34" charset="-122"/>
-                <a:cs typeface="Trebuchet MS" pitchFamily="34" charset="-120"/>
-              </a:rPr>
-              <a:t>pass-</a:t>
-            </a:r>
-            <a:endParaRPr lang="en-US" sz="1300" dirty="0"/>
-          </a:p>
-        </p:txBody>
-      </p:sp>
-      <p:sp>
-        <p:nvSpPr>
-          <p:cNvPr id="35" name="Shape 33"/>
           <p:cNvSpPr/>
           <p:nvPr/>
         </p:nvSpPr>
@@ -37868,7 +36252,7 @@
       </p:sp>
       <p:sp>
         <p:nvSpPr>
-          <p:cNvPr id="36" name="Shape 34"/>
+          <p:cNvPr id="34" name="Shape 32"/>
           <p:cNvSpPr/>
           <p:nvPr/>
         </p:nvSpPr>
@@ -37881,7 +36265,7 @@
             <a:avLst/>
           </a:prstGeom>
           <a:solidFill>
-            <a:srgbClr val="FCE7F3"/>
+            <a:srgbClr val="F1F5F9"/>
           </a:solidFill>
           <a:ln w="12700">
             <a:solidFill>
@@ -37893,205 +36277,13 @@
       </p:sp>
       <p:sp>
         <p:nvSpPr>
-          <p:cNvPr id="37" name="Text 35"/>
-          <p:cNvSpPr/>
-          <p:nvPr/>
-        </p:nvSpPr>
-        <p:spPr>
-          <a:xfrm>
-            <a:off x="5943600" y="3127248"/>
-            <a:ext cx="1463040" cy="420624"/>
-          </a:xfrm>
-          <a:prstGeom prst="rect">
-            <a:avLst/>
-          </a:prstGeom>
-          <a:noFill/>
-          <a:ln/>
-        </p:spPr>
-        <p:txBody>
-          <a:bodyPr wrap="square" lIns="0" tIns="0" rIns="0" bIns="0" rtlCol="0" anchor="ctr"/>
-          <a:lstStyle/>
-          <a:p>
-            <a:pPr algn="ctr" indent="0" marL="0">
-              <a:buNone/>
-            </a:pPr>
-            <a:r>
-              <a:rPr lang="en-US" sz="1300" b="1" dirty="0">
-                <a:solidFill>
-                  <a:srgbClr val="9D174D"/>
-                </a:solidFill>
-                <a:latin typeface="Trebuchet MS" pitchFamily="34" charset="0"/>
-                <a:ea typeface="Trebuchet MS" pitchFamily="34" charset="-122"/>
-                <a:cs typeface="Trebuchet MS" pitchFamily="34" charset="-120"/>
-              </a:rPr>
-              <a:t>--ward</a:t>
-            </a:r>
-            <a:endParaRPr lang="en-US" sz="1300" dirty="0"/>
-          </a:p>
-        </p:txBody>
-      </p:sp>
-      <p:sp>
-        <p:nvSpPr>
-          <p:cNvPr id="38" name="Shape 36"/>
-          <p:cNvSpPr/>
-          <p:nvPr/>
-        </p:nvSpPr>
-        <p:spPr>
-          <a:xfrm>
-            <a:off x="640080" y="3584448"/>
-            <a:ext cx="1463040" cy="420624"/>
-          </a:xfrm>
-          <a:prstGeom prst="rect">
-            <a:avLst/>
-          </a:prstGeom>
-          <a:solidFill>
-            <a:srgbClr val="DDD6FE"/>
-          </a:solidFill>
-          <a:ln w="12700">
-            <a:solidFill>
-              <a:srgbClr val="E5E7EB"/>
-            </a:solidFill>
-            <a:prstDash val="solid"/>
-          </a:ln>
-        </p:spPr>
-      </p:sp>
-      <p:sp>
-        <p:nvSpPr>
-          <p:cNvPr id="39" name="Text 37"/>
-          <p:cNvSpPr/>
-          <p:nvPr/>
-        </p:nvSpPr>
-        <p:spPr>
-          <a:xfrm>
-            <a:off x="640080" y="3584448"/>
-            <a:ext cx="1463040" cy="420624"/>
-          </a:xfrm>
-          <a:prstGeom prst="rect">
-            <a:avLst/>
-          </a:prstGeom>
-          <a:noFill/>
-          <a:ln/>
-        </p:spPr>
-        <p:txBody>
-          <a:bodyPr wrap="square" lIns="0" tIns="0" rIns="0" bIns="0" rtlCol="0" anchor="ctr"/>
-          <a:lstStyle/>
-          <a:p>
-            <a:pPr algn="ctr" indent="0" marL="0">
-              <a:buNone/>
-            </a:pPr>
-            <a:r>
-              <a:rPr lang="en-US" sz="1300" b="1" dirty="0">
-                <a:solidFill>
-                  <a:srgbClr val="4C1D95"/>
-                </a:solidFill>
-                <a:latin typeface="Trebuchet MS" pitchFamily="34" charset="0"/>
-                <a:ea typeface="Trebuchet MS" pitchFamily="34" charset="-122"/>
-                <a:cs typeface="Trebuchet MS" pitchFamily="34" charset="-120"/>
-              </a:rPr>
-              <a:t>sub-</a:t>
-            </a:r>
-            <a:endParaRPr lang="en-US" sz="1300" dirty="0"/>
-          </a:p>
-        </p:txBody>
-      </p:sp>
-      <p:sp>
-        <p:nvSpPr>
-          <p:cNvPr id="40" name="Shape 38"/>
-          <p:cNvSpPr/>
-          <p:nvPr/>
-        </p:nvSpPr>
-        <p:spPr>
-          <a:xfrm>
-            <a:off x="3291840" y="3584448"/>
-            <a:ext cx="1645920" cy="420624"/>
-          </a:xfrm>
-          <a:prstGeom prst="rect">
-            <a:avLst/>
-          </a:prstGeom>
-          <a:solidFill>
-            <a:srgbClr val="F8FAFC"/>
-          </a:solidFill>
-          <a:ln w="12700">
-            <a:solidFill>
-              <a:srgbClr val="E5E7EB"/>
-            </a:solidFill>
-            <a:prstDash val="solid"/>
-          </a:ln>
-        </p:spPr>
-      </p:sp>
-      <p:sp>
-        <p:nvSpPr>
-          <p:cNvPr id="41" name="Shape 39"/>
-          <p:cNvSpPr/>
-          <p:nvPr/>
-        </p:nvSpPr>
-        <p:spPr>
-          <a:xfrm>
-            <a:off x="5943600" y="3584448"/>
-            <a:ext cx="1463040" cy="420624"/>
-          </a:xfrm>
-          <a:prstGeom prst="rect">
-            <a:avLst/>
-          </a:prstGeom>
-          <a:solidFill>
-            <a:srgbClr val="FCE7F3"/>
-          </a:solidFill>
-          <a:ln w="12700">
-            <a:solidFill>
-              <a:srgbClr val="E5E7EB"/>
-            </a:solidFill>
-            <a:prstDash val="solid"/>
-          </a:ln>
-        </p:spPr>
-      </p:sp>
-      <p:sp>
-        <p:nvSpPr>
-          <p:cNvPr id="42" name="Text 40"/>
-          <p:cNvSpPr/>
-          <p:nvPr/>
-        </p:nvSpPr>
-        <p:spPr>
-          <a:xfrm>
-            <a:off x="5943600" y="3584448"/>
-            <a:ext cx="1463040" cy="420624"/>
-          </a:xfrm>
-          <a:prstGeom prst="rect">
-            <a:avLst/>
-          </a:prstGeom>
-          <a:noFill/>
-          <a:ln/>
-        </p:spPr>
-        <p:txBody>
-          <a:bodyPr wrap="square" lIns="0" tIns="0" rIns="0" bIns="0" rtlCol="0" anchor="ctr"/>
-          <a:lstStyle/>
-          <a:p>
-            <a:pPr algn="ctr" indent="0" marL="0">
-              <a:buNone/>
-            </a:pPr>
-            <a:r>
-              <a:rPr lang="en-US" sz="1300" b="1" dirty="0">
-                <a:solidFill>
-                  <a:srgbClr val="9D174D"/>
-                </a:solidFill>
-                <a:latin typeface="Trebuchet MS" pitchFamily="34" charset="0"/>
-                <a:ea typeface="Trebuchet MS" pitchFamily="34" charset="-122"/>
-                <a:cs typeface="Trebuchet MS" pitchFamily="34" charset="-120"/>
-              </a:rPr>
-              <a:t>--farer</a:t>
-            </a:r>
-            <a:endParaRPr lang="en-US" sz="1300" dirty="0"/>
-          </a:p>
-        </p:txBody>
-      </p:sp>
-      <p:sp>
-        <p:nvSpPr>
-          <p:cNvPr id="43" name="Text 41"/>
-          <p:cNvSpPr/>
-          <p:nvPr/>
-        </p:nvSpPr>
-        <p:spPr>
-          <a:xfrm>
-            <a:off x="365760" y="4178808"/>
+          <p:cNvPr id="35" name="Text 33"/>
+          <p:cNvSpPr/>
+          <p:nvPr/>
+        </p:nvSpPr>
+        <p:spPr>
+          <a:xfrm>
+            <a:off x="365760" y="3721608"/>
             <a:ext cx="1097280" cy="420624"/>
           </a:xfrm>
           <a:prstGeom prst="rect">
@@ -38124,14 +36316,14 @@
       </p:sp>
       <p:sp>
         <p:nvSpPr>
-          <p:cNvPr id="44" name="Shape 42"/>
-          <p:cNvSpPr/>
-          <p:nvPr/>
-        </p:nvSpPr>
-        <p:spPr>
-          <a:xfrm>
-            <a:off x="1508760" y="4178808"/>
-            <a:ext cx="1097280" cy="420624"/>
+          <p:cNvPr id="36" name="Shape 34"/>
+          <p:cNvSpPr/>
+          <p:nvPr/>
+        </p:nvSpPr>
+        <p:spPr>
+          <a:xfrm>
+            <a:off x="1508760" y="3721608"/>
+            <a:ext cx="822960" cy="420624"/>
           </a:xfrm>
           <a:prstGeom prst="rect">
             <a:avLst>
@@ -38158,14 +36350,14 @@
       </p:sp>
       <p:sp>
         <p:nvSpPr>
-          <p:cNvPr id="45" name="Text 43"/>
-          <p:cNvSpPr/>
-          <p:nvPr/>
-        </p:nvSpPr>
-        <p:spPr>
-          <a:xfrm>
-            <a:off x="1508760" y="4178808"/>
-            <a:ext cx="1097280" cy="420624"/>
+          <p:cNvPr id="37" name="Text 35"/>
+          <p:cNvSpPr/>
+          <p:nvPr/>
+        </p:nvSpPr>
+        <p:spPr>
+          <a:xfrm>
+            <a:off x="1508760" y="3721608"/>
+            <a:ext cx="822960" cy="420624"/>
           </a:xfrm>
           <a:prstGeom prst="rect">
             <a:avLst/>
@@ -38189,7 +36381,7 @@
                 <a:ea typeface="Trebuchet MS" pitchFamily="34" charset="-122"/>
                 <a:cs typeface="Trebuchet MS" pitchFamily="34" charset="-120"/>
               </a:rPr>
-              <a:t>gate-</a:t>
+              <a:t>a-</a:t>
             </a:r>
             <a:endParaRPr lang="en-US" sz="1300" dirty="0"/>
           </a:p>
@@ -38197,13 +36389,13 @@
       </p:sp>
       <p:sp>
         <p:nvSpPr>
-          <p:cNvPr id="46" name="Text 44"/>
-          <p:cNvSpPr/>
-          <p:nvPr/>
-        </p:nvSpPr>
-        <p:spPr>
-          <a:xfrm>
-            <a:off x="2633472" y="4178808"/>
+          <p:cNvPr id="38" name="Text 36"/>
+          <p:cNvSpPr/>
+          <p:nvPr/>
+        </p:nvSpPr>
+        <p:spPr>
+          <a:xfrm>
+            <a:off x="2359152" y="3721608"/>
             <a:ext cx="320040" cy="420624"/>
           </a:xfrm>
           <a:prstGeom prst="rect">
@@ -38236,13 +36428,13 @@
       </p:sp>
       <p:sp>
         <p:nvSpPr>
-          <p:cNvPr id="47" name="Shape 45"/>
-          <p:cNvSpPr/>
-          <p:nvPr/>
-        </p:nvSpPr>
-        <p:spPr>
-          <a:xfrm>
-            <a:off x="2980944" y="4178808"/>
+          <p:cNvPr id="39" name="Shape 37"/>
+          <p:cNvSpPr/>
+          <p:nvPr/>
+        </p:nvSpPr>
+        <p:spPr>
+          <a:xfrm>
+            <a:off x="2706624" y="3721608"/>
             <a:ext cx="1097280" cy="420624"/>
           </a:xfrm>
           <a:prstGeom prst="rect">
@@ -38270,13 +36462,13 @@
       </p:sp>
       <p:sp>
         <p:nvSpPr>
-          <p:cNvPr id="48" name="Text 46"/>
-          <p:cNvSpPr/>
-          <p:nvPr/>
-        </p:nvSpPr>
-        <p:spPr>
-          <a:xfrm>
-            <a:off x="2980944" y="4178808"/>
+          <p:cNvPr id="40" name="Text 38"/>
+          <p:cNvSpPr/>
+          <p:nvPr/>
+        </p:nvSpPr>
+        <p:spPr>
+          <a:xfrm>
+            <a:off x="2706624" y="3721608"/>
             <a:ext cx="1097280" cy="420624"/>
           </a:xfrm>
           <a:prstGeom prst="rect">
@@ -38309,13 +36501,13 @@
       </p:sp>
       <p:sp>
         <p:nvSpPr>
-          <p:cNvPr id="49" name="Text 47"/>
-          <p:cNvSpPr/>
-          <p:nvPr/>
-        </p:nvSpPr>
-        <p:spPr>
-          <a:xfrm>
-            <a:off x="4105656" y="4178808"/>
+          <p:cNvPr id="41" name="Text 39"/>
+          <p:cNvSpPr/>
+          <p:nvPr/>
+        </p:nvSpPr>
+        <p:spPr>
+          <a:xfrm>
+            <a:off x="3831336" y="3721608"/>
             <a:ext cx="320040" cy="420624"/>
           </a:xfrm>
           <a:prstGeom prst="rect">
@@ -38348,13 +36540,13 @@
       </p:sp>
       <p:sp>
         <p:nvSpPr>
-          <p:cNvPr id="50" name="Shape 48"/>
-          <p:cNvSpPr/>
-          <p:nvPr/>
-        </p:nvSpPr>
-        <p:spPr>
-          <a:xfrm>
-            <a:off x="4453128" y="4178808"/>
+          <p:cNvPr id="42" name="Shape 40"/>
+          <p:cNvSpPr/>
+          <p:nvPr/>
+        </p:nvSpPr>
+        <p:spPr>
+          <a:xfrm>
+            <a:off x="4178808" y="3721608"/>
             <a:ext cx="822960" cy="420624"/>
           </a:xfrm>
           <a:prstGeom prst="rect">
@@ -38382,13 +36574,13 @@
       </p:sp>
       <p:sp>
         <p:nvSpPr>
-          <p:cNvPr id="51" name="Text 49"/>
-          <p:cNvSpPr/>
-          <p:nvPr/>
-        </p:nvSpPr>
-        <p:spPr>
-          <a:xfrm>
-            <a:off x="4453128" y="4178808"/>
+          <p:cNvPr id="43" name="Text 41"/>
+          <p:cNvSpPr/>
+          <p:nvPr/>
+        </p:nvSpPr>
+        <p:spPr>
+          <a:xfrm>
+            <a:off x="4178808" y="3721608"/>
             <a:ext cx="822960" cy="420624"/>
           </a:xfrm>
           <a:prstGeom prst="rect">
@@ -38413,7 +36605,7 @@
                 <a:ea typeface="Trebuchet MS" pitchFamily="34" charset="-122"/>
                 <a:cs typeface="Trebuchet MS" pitchFamily="34" charset="-120"/>
               </a:rPr>
-              <a:t>--s</a:t>
+              <a:t>-s</a:t>
             </a:r>
             <a:endParaRPr lang="en-US" sz="1300" dirty="0"/>
           </a:p>
@@ -38421,13 +36613,13 @@
       </p:sp>
       <p:sp>
         <p:nvSpPr>
-          <p:cNvPr id="52" name="Text 50"/>
-          <p:cNvSpPr/>
-          <p:nvPr/>
-        </p:nvSpPr>
-        <p:spPr>
-          <a:xfrm>
-            <a:off x="5349240" y="4178808"/>
+          <p:cNvPr id="44" name="Text 42"/>
+          <p:cNvSpPr/>
+          <p:nvPr/>
+        </p:nvSpPr>
+        <p:spPr>
+          <a:xfrm>
+            <a:off x="5074920" y="3721608"/>
             <a:ext cx="365760" cy="420624"/>
           </a:xfrm>
           <a:prstGeom prst="rect">
@@ -38460,13 +36652,13 @@
       </p:sp>
       <p:sp>
         <p:nvSpPr>
-          <p:cNvPr id="53" name="Shape 51"/>
-          <p:cNvSpPr/>
-          <p:nvPr/>
-        </p:nvSpPr>
-        <p:spPr>
-          <a:xfrm>
-            <a:off x="5760720" y="4178808"/>
+          <p:cNvPr id="45" name="Shape 43"/>
+          <p:cNvSpPr/>
+          <p:nvPr/>
+        </p:nvSpPr>
+        <p:spPr>
+          <a:xfrm>
+            <a:off x="5486400" y="3721608"/>
             <a:ext cx="2194560" cy="420624"/>
           </a:xfrm>
           <a:prstGeom prst="rect">
@@ -38487,13 +36679,13 @@
       </p:sp>
       <p:sp>
         <p:nvSpPr>
-          <p:cNvPr id="54" name="Text 52"/>
-          <p:cNvSpPr/>
-          <p:nvPr/>
-        </p:nvSpPr>
-        <p:spPr>
-          <a:xfrm>
-            <a:off x="5760720" y="4178808"/>
+          <p:cNvPr id="46" name="Text 44"/>
+          <p:cNvSpPr/>
+          <p:nvPr/>
+        </p:nvSpPr>
+        <p:spPr>
+          <a:xfrm>
+            <a:off x="5486400" y="3721608"/>
             <a:ext cx="2194560" cy="420624"/>
           </a:xfrm>
           <a:prstGeom prst="rect">
@@ -38518,7 +36710,7 @@
                 <a:ea typeface="Trebuchet MS" pitchFamily="34" charset="-122"/>
                 <a:cs typeface="Trebuchet MS" pitchFamily="34" charset="-120"/>
               </a:rPr>
-              <a:t>pathway</a:t>
+              <a:t>way</a:t>
             </a:r>
             <a:endParaRPr lang="en-US" sz="1400" dirty="0"/>
           </a:p>
@@ -38810,7 +37002,7 @@
                 <a:ea typeface="Calibri" pitchFamily="34" charset="-122"/>
                 <a:cs typeface="Calibri" pitchFamily="34" charset="-120"/>
               </a:rPr>
-              <a:t>Word Labs  •  wordlabs.app  •  Root: 'way' = path, road, or direction</a:t>
+              <a:t>Word Labs  •  wordlabs.app  •  Root: 'way' = a path, direction or method</a:t>
             </a:r>
             <a:endParaRPr lang="en-US" sz="800" dirty="0"/>
           </a:p>
@@ -38922,7 +37114,7 @@
                 <a:ea typeface="Trebuchet MS" pitchFamily="34" charset="-122"/>
                 <a:cs typeface="Trebuchet MS" pitchFamily="34" charset="-120"/>
               </a:rPr>
-              <a:t>pathway</a:t>
+              <a:t>way</a:t>
             </a:r>
             <a:endParaRPr lang="en-US" sz="1200" dirty="0"/>
           </a:p>
@@ -38988,841 +37180,7 @@
                 <a:ea typeface="Calibri" pitchFamily="34" charset="-122"/>
                 <a:cs typeface="Calibri" pitchFamily="34" charset="-120"/>
               </a:rPr>
-              <a:t>An underground tunnel or train system that people travel through.</a:t>
-            </a:r>
-            <a:endParaRPr lang="en-US" sz="1200" dirty="0"/>
-          </a:p>
-        </p:txBody>
-      </p:sp>
-      <p:sp>
-        <p:nvSpPr>
-          <p:cNvPr id="15" name="Shape 13"/>
-          <p:cNvSpPr/>
-          <p:nvPr/>
-        </p:nvSpPr>
-        <p:spPr>
-          <a:xfrm>
-            <a:off x="365760" y="1719072"/>
-            <a:ext cx="2011680" cy="457200"/>
-          </a:xfrm>
-          <a:prstGeom prst="rect">
-            <a:avLst>
-              <a:gd name="adj" fmla="val 12000"/>
-            </a:avLst>
-          </a:prstGeom>
-          <a:solidFill>
-            <a:srgbClr val="EEF2FF"/>
-          </a:solidFill>
-          <a:ln w="12700">
-            <a:solidFill>
-              <a:srgbClr val="6366F1"/>
-            </a:solidFill>
-            <a:prstDash val="solid"/>
-          </a:ln>
-          <a:effectLst>
-            <a:outerShdw sx="100000" sy="100000" kx="0" ky="0" algn="bl" rotWithShape="0" blurRad="101600" dist="38100" dir="8100000">
-              <a:srgbClr val="000000">
-                <a:alpha val="12000"/>
-              </a:srgbClr>
-            </a:outerShdw>
-          </a:effectLst>
-        </p:spPr>
-      </p:sp>
-      <p:sp>
-        <p:nvSpPr>
-          <p:cNvPr id="16" name="Text 14"/>
-          <p:cNvSpPr/>
-          <p:nvPr/>
-        </p:nvSpPr>
-        <p:spPr>
-          <a:xfrm>
-            <a:off x="365760" y="1719072"/>
-            <a:ext cx="2011680" cy="457200"/>
-          </a:xfrm>
-          <a:prstGeom prst="rect">
-            <a:avLst/>
-          </a:prstGeom>
-          <a:noFill/>
-          <a:ln/>
-        </p:spPr>
-        <p:txBody>
-          <a:bodyPr wrap="square" lIns="0" tIns="0" rIns="0" bIns="0" rtlCol="0" anchor="ctr"/>
-          <a:lstStyle/>
-          <a:p>
-            <a:pPr algn="ctr" indent="0" marL="0">
-              <a:buNone/>
-            </a:pPr>
-            <a:r>
-              <a:rPr lang="en-US" sz="1200" b="1" dirty="0">
-                <a:solidFill>
-                  <a:srgbClr val="4338CA"/>
-                </a:solidFill>
-                <a:latin typeface="Trebuchet MS" pitchFamily="34" charset="0"/>
-                <a:ea typeface="Trebuchet MS" pitchFamily="34" charset="-122"/>
-                <a:cs typeface="Trebuchet MS" pitchFamily="34" charset="-120"/>
-              </a:rPr>
-              <a:t>gateway</a:t>
-            </a:r>
-            <a:endParaRPr lang="en-US" sz="1200" dirty="0"/>
-          </a:p>
-        </p:txBody>
-      </p:sp>
-      <p:sp>
-        <p:nvSpPr>
-          <p:cNvPr id="17" name="Shape 15"/>
-          <p:cNvSpPr/>
-          <p:nvPr/>
-        </p:nvSpPr>
-        <p:spPr>
-          <a:xfrm>
-            <a:off x="2514600" y="1719072"/>
-            <a:ext cx="6263640" cy="457200"/>
-          </a:xfrm>
-          <a:prstGeom prst="rect">
-            <a:avLst>
-              <a:gd name="adj" fmla="val 12000"/>
-            </a:avLst>
-          </a:prstGeom>
-          <a:solidFill>
-            <a:srgbClr val="F8FAFC"/>
-          </a:solidFill>
-          <a:ln w="12700">
-            <a:solidFill>
-              <a:srgbClr val="E2E8F0"/>
-            </a:solidFill>
-            <a:prstDash val="solid"/>
-          </a:ln>
-        </p:spPr>
-      </p:sp>
-      <p:sp>
-        <p:nvSpPr>
-          <p:cNvPr id="18" name="Text 16"/>
-          <p:cNvSpPr/>
-          <p:nvPr/>
-        </p:nvSpPr>
-        <p:spPr>
-          <a:xfrm>
-            <a:off x="2651760" y="1719072"/>
-            <a:ext cx="6035040" cy="457200"/>
-          </a:xfrm>
-          <a:prstGeom prst="rect">
-            <a:avLst/>
-          </a:prstGeom>
-          <a:noFill/>
-          <a:ln/>
-        </p:spPr>
-        <p:txBody>
-          <a:bodyPr wrap="square" rtlCol="0" anchor="ctr"/>
-          <a:lstStyle/>
-          <a:p>
-            <a:pPr algn="l" indent="0" marL="0">
-              <a:buNone/>
-            </a:pPr>
-            <a:r>
-              <a:rPr lang="en-US" sz="1200" dirty="0">
-                <a:solidFill>
-                  <a:srgbClr val="0F172A"/>
-                </a:solidFill>
-                <a:latin typeface="Calibri" pitchFamily="34" charset="0"/>
-                <a:ea typeface="Calibri" pitchFamily="34" charset="-122"/>
-                <a:cs typeface="Calibri" pitchFamily="34" charset="-120"/>
-              </a:rPr>
-              <a:t>The middle point between two places — you've gone half the distance.</a:t>
-            </a:r>
-            <a:endParaRPr lang="en-US" sz="1200" dirty="0"/>
-          </a:p>
-        </p:txBody>
-      </p:sp>
-      <p:sp>
-        <p:nvSpPr>
-          <p:cNvPr id="19" name="Shape 17"/>
-          <p:cNvSpPr/>
-          <p:nvPr/>
-        </p:nvSpPr>
-        <p:spPr>
-          <a:xfrm>
-            <a:off x="365760" y="2249424"/>
-            <a:ext cx="2011680" cy="457200"/>
-          </a:xfrm>
-          <a:prstGeom prst="rect">
-            <a:avLst>
-              <a:gd name="adj" fmla="val 12000"/>
-            </a:avLst>
-          </a:prstGeom>
-          <a:solidFill>
-            <a:srgbClr val="EEF2FF"/>
-          </a:solidFill>
-          <a:ln w="12700">
-            <a:solidFill>
-              <a:srgbClr val="6366F1"/>
-            </a:solidFill>
-            <a:prstDash val="solid"/>
-          </a:ln>
-          <a:effectLst>
-            <a:outerShdw sx="100000" sy="100000" kx="0" ky="0" algn="bl" rotWithShape="0" blurRad="101600" dist="38100" dir="8100000">
-              <a:srgbClr val="000000">
-                <a:alpha val="12000"/>
-              </a:srgbClr>
-            </a:outerShdw>
-          </a:effectLst>
-        </p:spPr>
-      </p:sp>
-      <p:sp>
-        <p:nvSpPr>
-          <p:cNvPr id="20" name="Text 18"/>
-          <p:cNvSpPr/>
-          <p:nvPr/>
-        </p:nvSpPr>
-        <p:spPr>
-          <a:xfrm>
-            <a:off x="365760" y="2249424"/>
-            <a:ext cx="2011680" cy="457200"/>
-          </a:xfrm>
-          <a:prstGeom prst="rect">
-            <a:avLst/>
-          </a:prstGeom>
-          <a:noFill/>
-          <a:ln/>
-        </p:spPr>
-        <p:txBody>
-          <a:bodyPr wrap="square" lIns="0" tIns="0" rIns="0" bIns="0" rtlCol="0" anchor="ctr"/>
-          <a:lstStyle/>
-          <a:p>
-            <a:pPr algn="ctr" indent="0" marL="0">
-              <a:buNone/>
-            </a:pPr>
-            <a:r>
-              <a:rPr lang="en-US" sz="1200" b="1" dirty="0">
-                <a:solidFill>
-                  <a:srgbClr val="4338CA"/>
-                </a:solidFill>
-                <a:latin typeface="Trebuchet MS" pitchFamily="34" charset="0"/>
-                <a:ea typeface="Trebuchet MS" pitchFamily="34" charset="-122"/>
-                <a:cs typeface="Trebuchet MS" pitchFamily="34" charset="-120"/>
-              </a:rPr>
-              <a:t>subway</a:t>
-            </a:r>
-            <a:endParaRPr lang="en-US" sz="1200" dirty="0"/>
-          </a:p>
-        </p:txBody>
-      </p:sp>
-      <p:sp>
-        <p:nvSpPr>
-          <p:cNvPr id="21" name="Shape 19"/>
-          <p:cNvSpPr/>
-          <p:nvPr/>
-        </p:nvSpPr>
-        <p:spPr>
-          <a:xfrm>
-            <a:off x="2514600" y="2249424"/>
-            <a:ext cx="6263640" cy="457200"/>
-          </a:xfrm>
-          <a:prstGeom prst="rect">
-            <a:avLst>
-              <a:gd name="adj" fmla="val 12000"/>
-            </a:avLst>
-          </a:prstGeom>
-          <a:solidFill>
-            <a:srgbClr val="F8FAFC"/>
-          </a:solidFill>
-          <a:ln w="12700">
-            <a:solidFill>
-              <a:srgbClr val="E2E8F0"/>
-            </a:solidFill>
-            <a:prstDash val="solid"/>
-          </a:ln>
-        </p:spPr>
-      </p:sp>
-      <p:sp>
-        <p:nvSpPr>
-          <p:cNvPr id="22" name="Text 20"/>
-          <p:cNvSpPr/>
-          <p:nvPr/>
-        </p:nvSpPr>
-        <p:spPr>
-          <a:xfrm>
-            <a:off x="2651760" y="2249424"/>
-            <a:ext cx="6035040" cy="457200"/>
-          </a:xfrm>
-          <a:prstGeom prst="rect">
-            <a:avLst/>
-          </a:prstGeom>
-          <a:noFill/>
-          <a:ln/>
-        </p:spPr>
-        <p:txBody>
-          <a:bodyPr wrap="square" rtlCol="0" anchor="ctr"/>
-          <a:lstStyle/>
-          <a:p>
-            <a:pPr algn="l" indent="0" marL="0">
-              <a:buNone/>
-            </a:pPr>
-            <a:r>
-              <a:rPr lang="en-US" sz="1200" dirty="0">
-                <a:solidFill>
-                  <a:srgbClr val="0F172A"/>
-                </a:solidFill>
-                <a:latin typeface="Calibri" pitchFamily="34" charset="0"/>
-                <a:ea typeface="Calibri" pitchFamily="34" charset="-122"/>
-                <a:cs typeface="Calibri" pitchFamily="34" charset="-120"/>
-              </a:rPr>
-              <a:t>A wide, fast road where cars can travel long distances without stopping.</a:t>
-            </a:r>
-            <a:endParaRPr lang="en-US" sz="1200" dirty="0"/>
-          </a:p>
-        </p:txBody>
-      </p:sp>
-      <p:sp>
-        <p:nvSpPr>
-          <p:cNvPr id="23" name="Shape 21"/>
-          <p:cNvSpPr/>
-          <p:nvPr/>
-        </p:nvSpPr>
-        <p:spPr>
-          <a:xfrm>
-            <a:off x="365760" y="2779776"/>
-            <a:ext cx="2011680" cy="457200"/>
-          </a:xfrm>
-          <a:prstGeom prst="rect">
-            <a:avLst>
-              <a:gd name="adj" fmla="val 12000"/>
-            </a:avLst>
-          </a:prstGeom>
-          <a:solidFill>
-            <a:srgbClr val="EEF2FF"/>
-          </a:solidFill>
-          <a:ln w="12700">
-            <a:solidFill>
-              <a:srgbClr val="6366F1"/>
-            </a:solidFill>
-            <a:prstDash val="solid"/>
-          </a:ln>
-          <a:effectLst>
-            <a:outerShdw sx="100000" sy="100000" kx="0" ky="0" algn="bl" rotWithShape="0" blurRad="101600" dist="38100" dir="8100000">
-              <a:srgbClr val="000000">
-                <a:alpha val="12000"/>
-              </a:srgbClr>
-            </a:outerShdw>
-          </a:effectLst>
-        </p:spPr>
-      </p:sp>
-      <p:sp>
-        <p:nvSpPr>
-          <p:cNvPr id="24" name="Text 22"/>
-          <p:cNvSpPr/>
-          <p:nvPr/>
-        </p:nvSpPr>
-        <p:spPr>
-          <a:xfrm>
-            <a:off x="365760" y="2779776"/>
-            <a:ext cx="2011680" cy="457200"/>
-          </a:xfrm>
-          <a:prstGeom prst="rect">
-            <a:avLst/>
-          </a:prstGeom>
-          <a:noFill/>
-          <a:ln/>
-        </p:spPr>
-        <p:txBody>
-          <a:bodyPr wrap="square" lIns="0" tIns="0" rIns="0" bIns="0" rtlCol="0" anchor="ctr"/>
-          <a:lstStyle/>
-          <a:p>
-            <a:pPr algn="ctr" indent="0" marL="0">
-              <a:buNone/>
-            </a:pPr>
-            <a:r>
-              <a:rPr lang="en-US" sz="1200" b="1" dirty="0">
-                <a:solidFill>
-                  <a:srgbClr val="4338CA"/>
-                </a:solidFill>
-                <a:latin typeface="Trebuchet MS" pitchFamily="34" charset="0"/>
-                <a:ea typeface="Trebuchet MS" pitchFamily="34" charset="-122"/>
-                <a:cs typeface="Trebuchet MS" pitchFamily="34" charset="-120"/>
-              </a:rPr>
-              <a:t>halfway</a:t>
-            </a:r>
-            <a:endParaRPr lang="en-US" sz="1200" dirty="0"/>
-          </a:p>
-        </p:txBody>
-      </p:sp>
-      <p:sp>
-        <p:nvSpPr>
-          <p:cNvPr id="25" name="Shape 23"/>
-          <p:cNvSpPr/>
-          <p:nvPr/>
-        </p:nvSpPr>
-        <p:spPr>
-          <a:xfrm>
-            <a:off x="2514600" y="2779776"/>
-            <a:ext cx="6263640" cy="457200"/>
-          </a:xfrm>
-          <a:prstGeom prst="rect">
-            <a:avLst>
-              <a:gd name="adj" fmla="val 12000"/>
-            </a:avLst>
-          </a:prstGeom>
-          <a:solidFill>
-            <a:srgbClr val="F8FAFC"/>
-          </a:solidFill>
-          <a:ln w="12700">
-            <a:solidFill>
-              <a:srgbClr val="E2E8F0"/>
-            </a:solidFill>
-            <a:prstDash val="solid"/>
-          </a:ln>
-        </p:spPr>
-      </p:sp>
-      <p:sp>
-        <p:nvSpPr>
-          <p:cNvPr id="26" name="Text 24"/>
-          <p:cNvSpPr/>
-          <p:nvPr/>
-        </p:nvSpPr>
-        <p:spPr>
-          <a:xfrm>
-            <a:off x="2651760" y="2779776"/>
-            <a:ext cx="6035040" cy="457200"/>
-          </a:xfrm>
-          <a:prstGeom prst="rect">
-            <a:avLst/>
-          </a:prstGeom>
-          <a:noFill/>
-          <a:ln/>
-        </p:spPr>
-        <p:txBody>
-          <a:bodyPr wrap="square" rtlCol="0" anchor="ctr"/>
-          <a:lstStyle/>
-          <a:p>
-            <a:pPr algn="l" indent="0" marL="0">
-              <a:buNone/>
-            </a:pPr>
-            <a:r>
-              <a:rPr lang="en-US" sz="1200" dirty="0">
-                <a:solidFill>
-                  <a:srgbClr val="0F172A"/>
-                </a:solidFill>
-                <a:latin typeface="Calibri" pitchFamily="34" charset="0"/>
-                <a:ea typeface="Calibri" pitchFamily="34" charset="-122"/>
-                <a:cs typeface="Calibri" pitchFamily="34" charset="-120"/>
-              </a:rPr>
-              <a:t>The long, flat strip of road that aeroplanes use to take off and land.</a:t>
-            </a:r>
-            <a:endParaRPr lang="en-US" sz="1200" dirty="0"/>
-          </a:p>
-        </p:txBody>
-      </p:sp>
-      <p:sp>
-        <p:nvSpPr>
-          <p:cNvPr id="27" name="Shape 25"/>
-          <p:cNvSpPr/>
-          <p:nvPr/>
-        </p:nvSpPr>
-        <p:spPr>
-          <a:xfrm>
-            <a:off x="365760" y="3310128"/>
-            <a:ext cx="2011680" cy="457200"/>
-          </a:xfrm>
-          <a:prstGeom prst="rect">
-            <a:avLst>
-              <a:gd name="adj" fmla="val 12000"/>
-            </a:avLst>
-          </a:prstGeom>
-          <a:solidFill>
-            <a:srgbClr val="EEF2FF"/>
-          </a:solidFill>
-          <a:ln w="12700">
-            <a:solidFill>
-              <a:srgbClr val="6366F1"/>
-            </a:solidFill>
-            <a:prstDash val="solid"/>
-          </a:ln>
-          <a:effectLst>
-            <a:outerShdw sx="100000" sy="100000" kx="0" ky="0" algn="bl" rotWithShape="0" blurRad="101600" dist="38100" dir="8100000">
-              <a:srgbClr val="000000">
-                <a:alpha val="12000"/>
-              </a:srgbClr>
-            </a:outerShdw>
-          </a:effectLst>
-        </p:spPr>
-      </p:sp>
-      <p:sp>
-        <p:nvSpPr>
-          <p:cNvPr id="28" name="Text 26"/>
-          <p:cNvSpPr/>
-          <p:nvPr/>
-        </p:nvSpPr>
-        <p:spPr>
-          <a:xfrm>
-            <a:off x="365760" y="3310128"/>
-            <a:ext cx="2011680" cy="457200"/>
-          </a:xfrm>
-          <a:prstGeom prst="rect">
-            <a:avLst/>
-          </a:prstGeom>
-          <a:noFill/>
-          <a:ln/>
-        </p:spPr>
-        <p:txBody>
-          <a:bodyPr wrap="square" lIns="0" tIns="0" rIns="0" bIns="0" rtlCol="0" anchor="ctr"/>
-          <a:lstStyle/>
-          <a:p>
-            <a:pPr algn="ctr" indent="0" marL="0">
-              <a:buNone/>
-            </a:pPr>
-            <a:r>
-              <a:rPr lang="en-US" sz="1200" b="1" dirty="0">
-                <a:solidFill>
-                  <a:srgbClr val="4338CA"/>
-                </a:solidFill>
-                <a:latin typeface="Trebuchet MS" pitchFamily="34" charset="0"/>
-                <a:ea typeface="Trebuchet MS" pitchFamily="34" charset="-122"/>
-                <a:cs typeface="Trebuchet MS" pitchFamily="34" charset="-120"/>
-              </a:rPr>
-              <a:t>doorway</a:t>
-            </a:r>
-            <a:endParaRPr lang="en-US" sz="1200" dirty="0"/>
-          </a:p>
-        </p:txBody>
-      </p:sp>
-      <p:sp>
-        <p:nvSpPr>
-          <p:cNvPr id="29" name="Shape 27"/>
-          <p:cNvSpPr/>
-          <p:nvPr/>
-        </p:nvSpPr>
-        <p:spPr>
-          <a:xfrm>
-            <a:off x="2514600" y="3310128"/>
-            <a:ext cx="6263640" cy="457200"/>
-          </a:xfrm>
-          <a:prstGeom prst="rect">
-            <a:avLst>
-              <a:gd name="adj" fmla="val 12000"/>
-            </a:avLst>
-          </a:prstGeom>
-          <a:solidFill>
-            <a:srgbClr val="F8FAFC"/>
-          </a:solidFill>
-          <a:ln w="12700">
-            <a:solidFill>
-              <a:srgbClr val="E2E8F0"/>
-            </a:solidFill>
-            <a:prstDash val="solid"/>
-          </a:ln>
-        </p:spPr>
-      </p:sp>
-      <p:sp>
-        <p:nvSpPr>
-          <p:cNvPr id="30" name="Text 28"/>
-          <p:cNvSpPr/>
-          <p:nvPr/>
-        </p:nvSpPr>
-        <p:spPr>
-          <a:xfrm>
-            <a:off x="2651760" y="3310128"/>
-            <a:ext cx="6035040" cy="457200"/>
-          </a:xfrm>
-          <a:prstGeom prst="rect">
-            <a:avLst/>
-          </a:prstGeom>
-          <a:noFill/>
-          <a:ln/>
-        </p:spPr>
-        <p:txBody>
-          <a:bodyPr wrap="square" rtlCol="0" anchor="ctr"/>
-          <a:lstStyle/>
-          <a:p>
-            <a:pPr algn="l" indent="0" marL="0">
-              <a:buNone/>
-            </a:pPr>
-            <a:r>
-              <a:rPr lang="en-US" sz="1200" dirty="0">
-                <a:solidFill>
-                  <a:srgbClr val="0F172A"/>
-                </a:solidFill>
-                <a:latin typeface="Calibri" pitchFamily="34" charset="0"/>
-                <a:ea typeface="Calibri" pitchFamily="34" charset="-122"/>
-                <a:cs typeface="Calibri" pitchFamily="34" charset="-120"/>
-              </a:rPr>
-              <a:t>A track or route you walk along to get somewhere.</a:t>
-            </a:r>
-            <a:endParaRPr lang="en-US" sz="1200" dirty="0"/>
-          </a:p>
-        </p:txBody>
-      </p:sp>
-      <p:sp>
-        <p:nvSpPr>
-          <p:cNvPr id="31" name="Shape 29"/>
-          <p:cNvSpPr/>
-          <p:nvPr/>
-        </p:nvSpPr>
-        <p:spPr>
-          <a:xfrm>
-            <a:off x="365760" y="3840480"/>
-            <a:ext cx="2011680" cy="457200"/>
-          </a:xfrm>
-          <a:prstGeom prst="rect">
-            <a:avLst>
-              <a:gd name="adj" fmla="val 12000"/>
-            </a:avLst>
-          </a:prstGeom>
-          <a:solidFill>
-            <a:srgbClr val="EEF2FF"/>
-          </a:solidFill>
-          <a:ln w="12700">
-            <a:solidFill>
-              <a:srgbClr val="6366F1"/>
-            </a:solidFill>
-            <a:prstDash val="solid"/>
-          </a:ln>
-          <a:effectLst>
-            <a:outerShdw sx="100000" sy="100000" kx="0" ky="0" algn="bl" rotWithShape="0" blurRad="101600" dist="38100" dir="8100000">
-              <a:srgbClr val="000000">
-                <a:alpha val="12000"/>
-              </a:srgbClr>
-            </a:outerShdw>
-          </a:effectLst>
-        </p:spPr>
-      </p:sp>
-      <p:sp>
-        <p:nvSpPr>
-          <p:cNvPr id="32" name="Text 30"/>
-          <p:cNvSpPr/>
-          <p:nvPr/>
-        </p:nvSpPr>
-        <p:spPr>
-          <a:xfrm>
-            <a:off x="365760" y="3840480"/>
-            <a:ext cx="2011680" cy="457200"/>
-          </a:xfrm>
-          <a:prstGeom prst="rect">
-            <a:avLst/>
-          </a:prstGeom>
-          <a:noFill/>
-          <a:ln/>
-        </p:spPr>
-        <p:txBody>
-          <a:bodyPr wrap="square" lIns="0" tIns="0" rIns="0" bIns="0" rtlCol="0" anchor="ctr"/>
-          <a:lstStyle/>
-          <a:p>
-            <a:pPr algn="ctr" indent="0" marL="0">
-              <a:buNone/>
-            </a:pPr>
-            <a:r>
-              <a:rPr lang="en-US" sz="1200" b="1" dirty="0">
-                <a:solidFill>
-                  <a:srgbClr val="4338CA"/>
-                </a:solidFill>
-                <a:latin typeface="Trebuchet MS" pitchFamily="34" charset="0"/>
-                <a:ea typeface="Trebuchet MS" pitchFamily="34" charset="-122"/>
-                <a:cs typeface="Trebuchet MS" pitchFamily="34" charset="-120"/>
-              </a:rPr>
-              <a:t>runway</a:t>
-            </a:r>
-            <a:endParaRPr lang="en-US" sz="1200" dirty="0"/>
-          </a:p>
-        </p:txBody>
-      </p:sp>
-      <p:sp>
-        <p:nvSpPr>
-          <p:cNvPr id="33" name="Shape 31"/>
-          <p:cNvSpPr/>
-          <p:nvPr/>
-        </p:nvSpPr>
-        <p:spPr>
-          <a:xfrm>
-            <a:off x="2514600" y="3840480"/>
-            <a:ext cx="6263640" cy="457200"/>
-          </a:xfrm>
-          <a:prstGeom prst="rect">
-            <a:avLst>
-              <a:gd name="adj" fmla="val 12000"/>
-            </a:avLst>
-          </a:prstGeom>
-          <a:solidFill>
-            <a:srgbClr val="F8FAFC"/>
-          </a:solidFill>
-          <a:ln w="12700">
-            <a:solidFill>
-              <a:srgbClr val="E2E8F0"/>
-            </a:solidFill>
-            <a:prstDash val="solid"/>
-          </a:ln>
-        </p:spPr>
-      </p:sp>
-      <p:sp>
-        <p:nvSpPr>
-          <p:cNvPr id="34" name="Text 32"/>
-          <p:cNvSpPr/>
-          <p:nvPr/>
-        </p:nvSpPr>
-        <p:spPr>
-          <a:xfrm>
-            <a:off x="2651760" y="3840480"/>
-            <a:ext cx="6035040" cy="457200"/>
-          </a:xfrm>
-          <a:prstGeom prst="rect">
-            <a:avLst/>
-          </a:prstGeom>
-          <a:noFill/>
-          <a:ln/>
-        </p:spPr>
-        <p:txBody>
-          <a:bodyPr wrap="square" rtlCol="0" anchor="ctr"/>
-          <a:lstStyle/>
-          <a:p>
-            <a:pPr algn="l" indent="0" marL="0">
-              <a:buNone/>
-            </a:pPr>
-            <a:r>
-              <a:rPr lang="en-US" sz="1200" dirty="0">
-                <a:solidFill>
-                  <a:srgbClr val="0F172A"/>
-                </a:solidFill>
-                <a:latin typeface="Calibri" pitchFamily="34" charset="0"/>
-                <a:ea typeface="Calibri" pitchFamily="34" charset="-122"/>
-                <a:cs typeface="Calibri" pitchFamily="34" charset="-120"/>
-              </a:rPr>
-              <a:t>The opening in a wall where a door sits, that you walk through.</a:t>
-            </a:r>
-            <a:endParaRPr lang="en-US" sz="1200" dirty="0"/>
-          </a:p>
-        </p:txBody>
-      </p:sp>
-      <p:sp>
-        <p:nvSpPr>
-          <p:cNvPr id="35" name="Shape 33"/>
-          <p:cNvSpPr/>
-          <p:nvPr/>
-        </p:nvSpPr>
-        <p:spPr>
-          <a:xfrm>
-            <a:off x="365760" y="4370832"/>
-            <a:ext cx="2011680" cy="457200"/>
-          </a:xfrm>
-          <a:prstGeom prst="rect">
-            <a:avLst>
-              <a:gd name="adj" fmla="val 12000"/>
-            </a:avLst>
-          </a:prstGeom>
-          <a:solidFill>
-            <a:srgbClr val="EEF2FF"/>
-          </a:solidFill>
-          <a:ln w="12700">
-            <a:solidFill>
-              <a:srgbClr val="6366F1"/>
-            </a:solidFill>
-            <a:prstDash val="solid"/>
-          </a:ln>
-          <a:effectLst>
-            <a:outerShdw sx="100000" sy="100000" kx="0" ky="0" algn="bl" rotWithShape="0" blurRad="101600" dist="38100" dir="8100000">
-              <a:srgbClr val="000000">
-                <a:alpha val="12000"/>
-              </a:srgbClr>
-            </a:outerShdw>
-          </a:effectLst>
-        </p:spPr>
-      </p:sp>
-      <p:sp>
-        <p:nvSpPr>
-          <p:cNvPr id="36" name="Text 34"/>
-          <p:cNvSpPr/>
-          <p:nvPr/>
-        </p:nvSpPr>
-        <p:spPr>
-          <a:xfrm>
-            <a:off x="365760" y="4370832"/>
-            <a:ext cx="2011680" cy="457200"/>
-          </a:xfrm>
-          <a:prstGeom prst="rect">
-            <a:avLst/>
-          </a:prstGeom>
-          <a:noFill/>
-          <a:ln/>
-        </p:spPr>
-        <p:txBody>
-          <a:bodyPr wrap="square" lIns="0" tIns="0" rIns="0" bIns="0" rtlCol="0" anchor="ctr"/>
-          <a:lstStyle/>
-          <a:p>
-            <a:pPr algn="ctr" indent="0" marL="0">
-              <a:buNone/>
-            </a:pPr>
-            <a:r>
-              <a:rPr lang="en-US" sz="1200" b="1" dirty="0">
-                <a:solidFill>
-                  <a:srgbClr val="4338CA"/>
-                </a:solidFill>
-                <a:latin typeface="Trebuchet MS" pitchFamily="34" charset="0"/>
-                <a:ea typeface="Trebuchet MS" pitchFamily="34" charset="-122"/>
-                <a:cs typeface="Trebuchet MS" pitchFamily="34" charset="-120"/>
-              </a:rPr>
-              <a:t>freeway</a:t>
-            </a:r>
-            <a:endParaRPr lang="en-US" sz="1200" dirty="0"/>
-          </a:p>
-        </p:txBody>
-      </p:sp>
-      <p:sp>
-        <p:nvSpPr>
-          <p:cNvPr id="37" name="Shape 35"/>
-          <p:cNvSpPr/>
-          <p:nvPr/>
-        </p:nvSpPr>
-        <p:spPr>
-          <a:xfrm>
-            <a:off x="2514600" y="4370832"/>
-            <a:ext cx="6263640" cy="457200"/>
-          </a:xfrm>
-          <a:prstGeom prst="rect">
-            <a:avLst>
-              <a:gd name="adj" fmla="val 12000"/>
-            </a:avLst>
-          </a:prstGeom>
-          <a:solidFill>
-            <a:srgbClr val="F8FAFC"/>
-          </a:solidFill>
-          <a:ln w="12700">
-            <a:solidFill>
-              <a:srgbClr val="E2E8F0"/>
-            </a:solidFill>
-            <a:prstDash val="solid"/>
-          </a:ln>
-        </p:spPr>
-      </p:sp>
-      <p:sp>
-        <p:nvSpPr>
-          <p:cNvPr id="38" name="Text 36"/>
-          <p:cNvSpPr/>
-          <p:nvPr/>
-        </p:nvSpPr>
-        <p:spPr>
-          <a:xfrm>
-            <a:off x="2651760" y="4370832"/>
-            <a:ext cx="6035040" cy="457200"/>
-          </a:xfrm>
-          <a:prstGeom prst="rect">
-            <a:avLst/>
-          </a:prstGeom>
-          <a:noFill/>
-          <a:ln/>
-        </p:spPr>
-        <p:txBody>
-          <a:bodyPr wrap="square" rtlCol="0" anchor="ctr"/>
-          <a:lstStyle/>
-          <a:p>
-            <a:pPr algn="l" indent="0" marL="0">
-              <a:buNone/>
-            </a:pPr>
-            <a:r>
-              <a:rPr lang="en-US" sz="1200" dirty="0">
-                <a:solidFill>
-                  <a:srgbClr val="0F172A"/>
-                </a:solidFill>
-                <a:latin typeface="Calibri" pitchFamily="34" charset="0"/>
-                <a:ea typeface="Calibri" pitchFamily="34" charset="-122"/>
-                <a:cs typeface="Calibri" pitchFamily="34" charset="-120"/>
-              </a:rPr>
-              <a:t>An opening or entrance that acts like a door to pass through.</a:t>
+              <a:t>a method, road, or direction for doing something or getting somewhere</a:t>
             </a:r>
             <a:endParaRPr lang="en-US" sz="1200" dirty="0"/>
           </a:p>
@@ -40114,7 +37472,7 @@
                 <a:ea typeface="Calibri" pitchFamily="34" charset="-122"/>
                 <a:cs typeface="Calibri" pitchFamily="34" charset="-120"/>
               </a:rPr>
-              <a:t>Word Labs  •  wordlabs.app  •  Root: 'way' = path, road, or direction</a:t>
+              <a:t>Word Labs  •  wordlabs.app  •  Root: 'way' = a path, direction or method</a:t>
             </a:r>
             <a:endParaRPr lang="en-US" sz="800" dirty="0"/>
           </a:p>
@@ -40317,7 +37675,7 @@
                 <a:ea typeface="Calibri" pitchFamily="34" charset="-122"/>
                 <a:cs typeface="Calibri" pitchFamily="34" charset="-120"/>
               </a:rPr>
-              <a:t>The hikers followed the narrow pathway through the dense bushland to reach the waterfall.</a:t>
+              <a:t>This is the quickest way to school.</a:t>
             </a:r>
             <a:endParaRPr lang="en-US" sz="1500" dirty="0"/>
           </a:p>
@@ -40481,7 +37839,7 @@
                 <a:ea typeface="Calibri" pitchFamily="34" charset="-122"/>
                 <a:cs typeface="Calibri" pitchFamily="34" charset="-120"/>
               </a:rPr>
-              <a:t>We were only halfway to school when it started to rain heavily.</a:t>
+              <a:t>There are many ways to solve this problem.</a:t>
             </a:r>
             <a:endParaRPr lang="en-US" sz="1500" dirty="0"/>
           </a:p>
@@ -40645,7 +38003,7 @@
                 <a:ea typeface="Calibri" pitchFamily="34" charset="-122"/>
                 <a:cs typeface="Calibri" pitchFamily="34" charset="-120"/>
               </a:rPr>
-              <a:t>The pilot guided the large aeroplane carefully down the runway before it lifted into the sky.</a:t>
+              <a:t>We stopped for a rest midway through the hike.</a:t>
             </a:r>
             <a:endParaRPr lang="en-US" sz="1500" dirty="0"/>
           </a:p>
